--- a/site/showcase/exports/journal_image.pptx
+++ b/site/showcase/exports/journal_image.pptx
@@ -19,6 +19,10 @@
     <p:sldId id="267" r:id="rId19"/>
     <p:sldId id="268" r:id="rId20"/>
     <p:sldId id="269" r:id="rId21"/>
+    <p:sldId id="270" r:id="rId22"/>
+    <p:sldId id="271" r:id="rId23"/>
+    <p:sldId id="272" r:id="rId24"/>
+    <p:sldId id="273" r:id="rId25"/>
   </p:sldIdLst>
   <p:sldSz cx="9144000" cy="6858000" type="screen4x3"/>
   <p:notesSz cx="6858000" cy="9144000"/>
@@ -595,12 +599,72 @@
           </a:p>
           <a:p>
             <a:r>
-              <a:t>Evidence supporting this verdict</a:t>
-            </a:r>
-          </a:p>
-          <a:p>
-            <a:r>
-              <a:t>Record | No entries recorded.</a:t>
+              <a:t>Provider evidence / 3</a:t>
+            </a:r>
+          </a:p>
+          <a:p>
+            <a:r>
+              <a:t>Provider | Gemini Vision</a:t>
+            </a:r>
+          </a:p>
+          <a:p>
+            <a:r>
+              <a:t>Model | gemini-3.8-flash</a:t>
+            </a:r>
+          </a:p>
+          <a:p>
+            <a:r>
+              <a:t>Status | ok</a:t>
+            </a:r>
+          </a:p>
+          <a:p>
+            <a:r>
+              <a:t>Assessment | synthetic likely</a:t>
+            </a:r>
+          </a:p>
+          <a:p>
+            <a:r>
+              <a:t>Confidence | medium</a:t>
+            </a:r>
+          </a:p>
+          <a:p>
+            <a:r>
+              <a:t>Role in assessment | Supporting</a:t>
+            </a:r>
+          </a:p>
+          <a:p>
+            <a:r>
+              <a:t>Provider summary | synthetic likelihood 72/100; tells: model read this as AI editing over a photographic base image, hyper-rendered skin textures, characteristic AI portrait lighting across multiple subjects, slightly unnatural finger and needle interaction</a:t>
+            </a:r>
+          </a:p>
+          <a:p>
+            <a:r>
+              <a:t>Evidence 1 | Model read this as AI editing over a photographic base image</a:t>
+            </a:r>
+          </a:p>
+          <a:p>
+            <a:r>
+              <a:t>Evidence 2 | Hyper-rendered skin textures</a:t>
+            </a:r>
+          </a:p>
+          <a:p>
+            <a:r>
+              <a:t>Evidence 3 | Characteristic AI portrait lighting across multiple subjects</a:t>
+            </a:r>
+          </a:p>
+          <a:p>
+            <a:r>
+              <a:t>Evidence 4 | Slightly unnatural finger and needle interaction</a:t>
+            </a:r>
+          </a:p>
+          <a:p>
+            <a:r>
+              <a:t>Evidence 5 | Stereotyped expressive posing common in text-to-image models</a:t>
+            </a:r>
+          </a:p>
+          <a:p>
+            <a:r>
+              <a:t>Evidence 6 | Caveat: Composite infographic layout uses standard design typography alongside potentially AI-generated stock-style faces.</a:t>
             </a:r>
           </a:p>
         </p:txBody>
@@ -675,17 +739,62 @@
           </a:p>
           <a:p>
             <a:r>
-              <a:t>Additional findings</a:t>
-            </a:r>
-          </a:p>
-          <a:p>
-            <a:r>
-              <a:t>Local forensic cues | Supporting observation; considered alongside the model assessments.</a:t>
-            </a:r>
-          </a:p>
-          <a:p>
-            <a:r>
-              <a:t>C2PA Content Credentials | Embedded credentials: none found. Origin remains unresolved by this check.</a:t>
+              <a:t>Content Credentials / provenance</a:t>
+            </a:r>
+          </a:p>
+          <a:p>
+            <a:r>
+              <a:t>Provider | C2PA Content Credentials</a:t>
+            </a:r>
+          </a:p>
+          <a:p>
+            <a:r>
+              <a:t>Model | Not recorded</a:t>
+            </a:r>
+          </a:p>
+          <a:p>
+            <a:r>
+              <a:t>Status | ok</a:t>
+            </a:r>
+          </a:p>
+          <a:p>
+            <a:r>
+              <a:t>Assessment | inconclusive</a:t>
+            </a:r>
+          </a:p>
+          <a:p>
+            <a:r>
+              <a:t>Confidence | Not recorded</a:t>
+            </a:r>
+          </a:p>
+          <a:p>
+            <a:r>
+              <a:t>Role in assessment | Additional finding</a:t>
+            </a:r>
+          </a:p>
+          <a:p>
+            <a:r>
+              <a:t>Provider summary | Embedded credentials: none found. Origin remains unresolved by this check.</a:t>
+            </a:r>
+          </a:p>
+          <a:p>
+            <a:r>
+              <a:t>Evidence 1 | Coverage: credentials embedded in the submitted file. External credentials were not retrieved.</a:t>
+            </a:r>
+          </a:p>
+          <a:p>
+            <a:r>
+              <a:t>Evidence 2 | Verifier: c2pa-python 0.37.12; native SDK 0.91.0; specification target 2.4; policy embedded-offline-reviewed-trust-v3.</a:t>
+            </a:r>
+          </a:p>
+          <a:p>
+            <a:r>
+              <a:t>Evidence 3 | Offline embedded-manifest verification; no network trust-list, manifest or revocation refresh.</a:t>
+            </a:r>
+          </a:p>
+          <a:p>
+            <a:r>
+              <a:t>Evidence 4 | No reviewed local C2PA trust snapshot installed. Provenance overrides are disabled.</a:t>
             </a:r>
           </a:p>
         </p:txBody>
@@ -760,22 +869,62 @@
           </a:p>
           <a:p>
             <a:r>
-              <a:t>How this assessment was reached</a:t>
-            </a:r>
-          </a:p>
-          <a:p>
-            <a:r>
-              <a:t>1. override | outcome=none; detail=No confirmed C2PA AI assertion or SynthID watermark. Origin remains unresolved by these checks.</a:t>
-            </a:r>
-          </a:p>
-          <a:p>
-            <a:r>
-              <a:t>2. model_agreement | synthetic=[]; authentic=[]; uncertain=[]; forensic_supports_synthetic=False</a:t>
-            </a:r>
-          </a:p>
-          <a:p>
-            <a:r>
-              <a:t>3. verdict | value=inconclusive; confidence=low; reason=No vision model returned a usable result. Check provider status in the table.</a:t>
+              <a:t>Content Credentials / provenance</a:t>
+            </a:r>
+          </a:p>
+          <a:p>
+            <a:r>
+              <a:t>Provider | C2PA Content Credentials</a:t>
+            </a:r>
+          </a:p>
+          <a:p>
+            <a:r>
+              <a:t>Model | Not recorded</a:t>
+            </a:r>
+          </a:p>
+          <a:p>
+            <a:r>
+              <a:t>Status | ok</a:t>
+            </a:r>
+          </a:p>
+          <a:p>
+            <a:r>
+              <a:t>Assessment | inconclusive</a:t>
+            </a:r>
+          </a:p>
+          <a:p>
+            <a:r>
+              <a:t>Confidence | Not recorded</a:t>
+            </a:r>
+          </a:p>
+          <a:p>
+            <a:r>
+              <a:t>Role in assessment | Additional finding</a:t>
+            </a:r>
+          </a:p>
+          <a:p>
+            <a:r>
+              <a:t>Provider summary | Embedded credentials: none found. Origin remains unresolved by this check.</a:t>
+            </a:r>
+          </a:p>
+          <a:p>
+            <a:r>
+              <a:t>Evidence 1 | Coverage: credentials embedded in the submitted file. External credentials were not retrieved.</a:t>
+            </a:r>
+          </a:p>
+          <a:p>
+            <a:r>
+              <a:t>Evidence 2 | Verifier: c2pa-python 0.37.12; native SDK 0.91.0; specification target 2.4; policy embedded-offline-reviewed-trust-v3.</a:t>
+            </a:r>
+          </a:p>
+          <a:p>
+            <a:r>
+              <a:t>Evidence 3 | Offline embedded-manifest verification; no network trust-list, manifest or revocation refresh.</a:t>
+            </a:r>
+          </a:p>
+          <a:p>
+            <a:r>
+              <a:t>Evidence 4 | No reviewed local C2PA trust snapshot installed. Provenance overrides are disabled.</a:t>
             </a:r>
           </a:p>
         </p:txBody>
@@ -850,57 +999,62 @@
           </a:p>
           <a:p>
             <a:r>
-              <a:t>File and analysis record</a:t>
-            </a:r>
-          </a:p>
-          <a:p>
-            <a:r>
-              <a:t>File | journal-image.png</a:t>
-            </a:r>
-          </a:p>
-          <a:p>
-            <a:r>
-              <a:t>Analysis ID | a275a269-8b2c-4442-bbd7-d03ff4ee7c91</a:t>
-            </a:r>
-          </a:p>
-          <a:p>
-            <a:r>
-              <a:t>Generated | 2026-09-26T18:37:47+00:00</a:t>
-            </a:r>
-          </a:p>
-          <a:p>
-            <a:r>
-              <a:t>Tool | SDA Vision 0.1.0</a:t>
-            </a:r>
-          </a:p>
-          <a:p>
-            <a:r>
-              <a:t>Models | Not recorded</a:t>
-            </a:r>
-          </a:p>
-          <a:p>
-            <a:r>
-              <a:t>Method version | verdict-consistency-2026-09-26.1</a:t>
-            </a:r>
-          </a:p>
-          <a:p>
-            <a:r>
-              <a:t>Analysis lens | general</a:t>
-            </a:r>
-          </a:p>
-          <a:p>
-            <a:r>
-              <a:t>Original SHA-256 | b11aa1e8c5c17a9496d362987bd4bf0c00a83bccd3a4a704f0f6ab7a7cf6fc8d</a:t>
-            </a:r>
-          </a:p>
-          <a:p>
-            <a:r>
-              <a:t>Ingestion note 1 | Local checks only. LLM visual checks have not been run for this example; no provider requests or fees. An Inconclusive combined result here reflects unavailable visual assessments, not three inconclusive model replies.</a:t>
-            </a:r>
-          </a:p>
-          <a:p>
-            <a:r>
-              <a:t>Ingestion note 2 | Presentation copy of saved report 51daff64-c246-46da-95b5-06bef3c925b8. The descriptive filename replaces the earlier example ID for navigation. Original analysis dates, provider replies, scores and acquisition context are retained; no new model analysis.</a:t>
+              <a:t>Provider evidence / 5</a:t>
+            </a:r>
+          </a:p>
+          <a:p>
+            <a:r>
+              <a:t>Provider | Local forensic cues</a:t>
+            </a:r>
+          </a:p>
+          <a:p>
+            <a:r>
+              <a:t>Model | Not recorded</a:t>
+            </a:r>
+          </a:p>
+          <a:p>
+            <a:r>
+              <a:t>Status | ok</a:t>
+            </a:r>
+          </a:p>
+          <a:p>
+            <a:r>
+              <a:t>Assessment | partially synthetic</a:t>
+            </a:r>
+          </a:p>
+          <a:p>
+            <a:r>
+              <a:t>Confidence | low</a:t>
+            </a:r>
+          </a:p>
+          <a:p>
+            <a:r>
+              <a:t>Role in assessment | Additional finding</a:t>
+            </a:r>
+          </a:p>
+          <a:p>
+            <a:r>
+              <a:t>Provider summary | Heuristic synthetic likelihood 41/100 from metadata + pixel statistics.</a:t>
+            </a:r>
+          </a:p>
+          <a:p>
+            <a:r>
+              <a:t>Evidence 1 | No camera EXIF (common in AI exports, screenshots, and re-saves).</a:t>
+            </a:r>
+          </a:p>
+          <a:p>
+            <a:r>
+              <a:t>Evidence 2 | ELA mean 1.8, peak 53 (uniform high ELA can indicate generation/heavy edit).</a:t>
+            </a:r>
+          </a:p>
+          <a:p>
+            <a:r>
+              <a:t>Evidence 3 | High-frequency noise std 10.42 (very low/very uniform noise is a synthesis cue).</a:t>
+            </a:r>
+          </a:p>
+          <a:p>
+            <a:r>
+              <a:t>Evidence 4 | Spectral peakiness 24.85 (periodic frequency peaks can mark generated textures).</a:t>
             </a:r>
           </a:p>
         </p:txBody>
@@ -975,6 +1129,396 @@
           </a:p>
           <a:p>
             <a:r>
+              <a:t>Evidence supporting this verdict</a:t>
+            </a:r>
+          </a:p>
+          <a:p>
+            <a:r>
+              <a:t>Claude Vision | synthetic likelihood 90/100; tells: uniform painterly-photoreal rendering style shared across the main scene and all six portrait tiles, typical of a single image-generation pass, stock-archetype faces with exaggerated, near-identical 'distressed' expressions and similar desaturated grading, over-smooth yet hyper-detailed skin texture (pores and stubble rendered evenly, slightly waxy highlights), syringe and gloved-hand geometry ambiguous: needle entry point and grip read loosely, with fingers merging around the barrel</a:t>
+            </a:r>
+          </a:p>
+          <a:p>
+            <a:r>
+              <a:t>OpenAI Vision | synthetic likelihood 78/100; tells: Main vaccination scene and six inset portraits share unusually uniform cinematic lighting and textured skin rendering., Syringe barrel, plunger, and gloved grip have indistinct, difficult-to-reconcile geometry., Hair and facial creases in several portraits appear unusually densely sharpened against smooth backgrounds., Crisp, coherent typography and neatly aligned panels indicate a designed graphic but do not independently establish AI use.</a:t>
+            </a:r>
+          </a:p>
+          <a:p>
+            <a:r>
+              <a:t>Gemini Vision | synthetic likelihood 72/100; tells: model read this as AI editing over a photographic base image, hyper-rendered skin textures, characteristic AI portrait lighting across multiple subjects, slightly unnatural finger and needle interaction</a:t>
+            </a:r>
+          </a:p>
+        </p:txBody>
+      </p:sp>
+      <p:sp>
+        <p:nvSpPr>
+          <p:cNvPr id="4" name="Slide Number Placeholder 3"/>
+          <p:cNvSpPr>
+            <a:spLocks noGrp="1"/>
+          </p:cNvSpPr>
+          <p:nvPr>
+            <p:ph type="sldNum" idx="5" sz="quarter"/>
+          </p:nvPr>
+        </p:nvSpPr>
+        <p:spPr/>
+      </p:sp>
+    </p:spTree>
+  </p:cSld>
+  <p:clrMapOvr>
+    <a:masterClrMapping/>
+  </p:clrMapOvr>
+</p:notes>
+</file>
+
+<file path=ppt/notesSlides/notesSlide15.xml><?xml version="1.0" encoding="utf-8"?>
+<p:notes xmlns:a="http://schemas.openxmlformats.org/drawingml/2006/main" xmlns:p="http://schemas.openxmlformats.org/presentationml/2006/main" xmlns:r="http://schemas.openxmlformats.org/officeDocument/2006/relationships">
+  <p:cSld>
+    <p:spTree>
+      <p:nvGrpSpPr>
+        <p:cNvPr id="1" name=""/>
+        <p:cNvGrpSpPr/>
+        <p:nvPr/>
+      </p:nvGrpSpPr>
+      <p:grpSpPr>
+        <a:xfrm>
+          <a:off x="0" y="0"/>
+          <a:ext cx="0" cy="0"/>
+          <a:chOff x="0" y="0"/>
+          <a:chExt cx="0" cy="0"/>
+        </a:xfrm>
+      </p:grpSpPr>
+      <p:sp>
+        <p:nvSpPr>
+          <p:cNvPr id="2" name="Slide Image Placeholder 1"/>
+          <p:cNvSpPr>
+            <a:spLocks noGrp="1"/>
+          </p:cNvSpPr>
+          <p:nvPr>
+            <p:ph type="sldImg" idx="2"/>
+          </p:nvPr>
+        </p:nvSpPr>
+        <p:spPr/>
+      </p:sp>
+      <p:sp>
+        <p:nvSpPr>
+          <p:cNvPr id="3" name="Notes Placeholder 2"/>
+          <p:cNvSpPr>
+            <a:spLocks noGrp="1"/>
+          </p:cNvSpPr>
+          <p:nvPr>
+            <p:ph type="body" idx="3" sz="quarter"/>
+          </p:nvPr>
+        </p:nvSpPr>
+        <p:spPr/>
+        <p:txBody>
+          <a:bodyPr/>
+          <a:lstStyle/>
+          <a:p>
+            <a:r>
+              <a:t>journal-image.png</a:t>
+            </a:r>
+          </a:p>
+          <a:p>
+            <a:r>
+              <a:t>Additional findings</a:t>
+            </a:r>
+          </a:p>
+          <a:p>
+            <a:r>
+              <a:t>Local forensic cues | Supporting observation; considered alongside the model assessments.</a:t>
+            </a:r>
+          </a:p>
+          <a:p>
+            <a:r>
+              <a:t>C2PA Content Credentials | Embedded credentials: none found. Origin remains unresolved by this check.</a:t>
+            </a:r>
+          </a:p>
+        </p:txBody>
+      </p:sp>
+      <p:sp>
+        <p:nvSpPr>
+          <p:cNvPr id="4" name="Slide Number Placeholder 3"/>
+          <p:cNvSpPr>
+            <a:spLocks noGrp="1"/>
+          </p:cNvSpPr>
+          <p:nvPr>
+            <p:ph type="sldNum" idx="5" sz="quarter"/>
+          </p:nvPr>
+        </p:nvSpPr>
+        <p:spPr/>
+      </p:sp>
+    </p:spTree>
+  </p:cSld>
+  <p:clrMapOvr>
+    <a:masterClrMapping/>
+  </p:clrMapOvr>
+</p:notes>
+</file>
+
+<file path=ppt/notesSlides/notesSlide16.xml><?xml version="1.0" encoding="utf-8"?>
+<p:notes xmlns:a="http://schemas.openxmlformats.org/drawingml/2006/main" xmlns:p="http://schemas.openxmlformats.org/presentationml/2006/main" xmlns:r="http://schemas.openxmlformats.org/officeDocument/2006/relationships">
+  <p:cSld>
+    <p:spTree>
+      <p:nvGrpSpPr>
+        <p:cNvPr id="1" name=""/>
+        <p:cNvGrpSpPr/>
+        <p:nvPr/>
+      </p:nvGrpSpPr>
+      <p:grpSpPr>
+        <a:xfrm>
+          <a:off x="0" y="0"/>
+          <a:ext cx="0" cy="0"/>
+          <a:chOff x="0" y="0"/>
+          <a:chExt cx="0" cy="0"/>
+        </a:xfrm>
+      </p:grpSpPr>
+      <p:sp>
+        <p:nvSpPr>
+          <p:cNvPr id="2" name="Slide Image Placeholder 1"/>
+          <p:cNvSpPr>
+            <a:spLocks noGrp="1"/>
+          </p:cNvSpPr>
+          <p:nvPr>
+            <p:ph type="sldImg" idx="2"/>
+          </p:nvPr>
+        </p:nvSpPr>
+        <p:spPr/>
+      </p:sp>
+      <p:sp>
+        <p:nvSpPr>
+          <p:cNvPr id="3" name="Notes Placeholder 2"/>
+          <p:cNvSpPr>
+            <a:spLocks noGrp="1"/>
+          </p:cNvSpPr>
+          <p:nvPr>
+            <p:ph type="body" idx="3" sz="quarter"/>
+          </p:nvPr>
+        </p:nvSpPr>
+        <p:spPr/>
+        <p:txBody>
+          <a:bodyPr/>
+          <a:lstStyle/>
+          <a:p>
+            <a:r>
+              <a:t>journal-image.png</a:t>
+            </a:r>
+          </a:p>
+          <a:p>
+            <a:r>
+              <a:t>Visible text</a:t>
+            </a:r>
+          </a:p>
+          <a:p>
+            <a:r>
+              <a:t>Recorded text | Research Brief • 2025</a:t>
+            </a:r>
+          </a:p>
+          <a:p>
+            <a:r>
+              <a:t>Neurological Reports Following</a:t>
+            </a:r>
+          </a:p>
+          <a:p>
+            <a:r>
+              <a:t>Immunisation: A Preliminary Review</a:t>
+            </a:r>
+          </a:p>
+          <a:p>
+            <a:r>
+              <a:t>NEW REVIEW RAISES QUESTIONS</a:t>
+            </a:r>
+          </a:p>
+          <a:p>
+            <a:r>
+              <a:t>ABOUT mRNA SHOTS</a:t>
+            </a:r>
+          </a:p>
+          <a:p>
+            <a:r>
+              <a:t>Z</a:t>
+            </a:r>
+          </a:p>
+          <a:p>
+            <a:r>
+              <a:t>Z</a:t>
+            </a:r>
+          </a:p>
+          <a:p>
+            <a:r>
+              <a:t>MOOD</a:t>
+            </a:r>
+          </a:p>
+          <a:p>
+            <a:r>
+              <a:t>MEMORY</a:t>
+            </a:r>
+          </a:p>
+          <a:p>
+            <a:r>
+              <a:t>SLEEP</a:t>
+            </a:r>
+          </a:p>
+        </p:txBody>
+      </p:sp>
+      <p:sp>
+        <p:nvSpPr>
+          <p:cNvPr id="4" name="Slide Number Placeholder 3"/>
+          <p:cNvSpPr>
+            <a:spLocks noGrp="1"/>
+          </p:cNvSpPr>
+          <p:nvPr>
+            <p:ph type="sldNum" idx="5" sz="quarter"/>
+          </p:nvPr>
+        </p:nvSpPr>
+        <p:spPr/>
+      </p:sp>
+    </p:spTree>
+  </p:cSld>
+  <p:clrMapOvr>
+    <a:masterClrMapping/>
+  </p:clrMapOvr>
+</p:notes>
+</file>
+
+<file path=ppt/notesSlides/notesSlide17.xml><?xml version="1.0" encoding="utf-8"?>
+<p:notes xmlns:a="http://schemas.openxmlformats.org/drawingml/2006/main" xmlns:p="http://schemas.openxmlformats.org/presentationml/2006/main" xmlns:r="http://schemas.openxmlformats.org/officeDocument/2006/relationships">
+  <p:cSld>
+    <p:spTree>
+      <p:nvGrpSpPr>
+        <p:cNvPr id="1" name=""/>
+        <p:cNvGrpSpPr/>
+        <p:nvPr/>
+      </p:nvGrpSpPr>
+      <p:grpSpPr>
+        <a:xfrm>
+          <a:off x="0" y="0"/>
+          <a:ext cx="0" cy="0"/>
+          <a:chOff x="0" y="0"/>
+          <a:chExt cx="0" cy="0"/>
+        </a:xfrm>
+      </p:grpSpPr>
+      <p:sp>
+        <p:nvSpPr>
+          <p:cNvPr id="2" name="Slide Image Placeholder 1"/>
+          <p:cNvSpPr>
+            <a:spLocks noGrp="1"/>
+          </p:cNvSpPr>
+          <p:nvPr>
+            <p:ph type="sldImg" idx="2"/>
+          </p:nvPr>
+        </p:nvSpPr>
+        <p:spPr/>
+      </p:sp>
+      <p:sp>
+        <p:nvSpPr>
+          <p:cNvPr id="3" name="Notes Placeholder 2"/>
+          <p:cNvSpPr>
+            <a:spLocks noGrp="1"/>
+          </p:cNvSpPr>
+          <p:nvPr>
+            <p:ph type="body" idx="3" sz="quarter"/>
+          </p:nvPr>
+        </p:nvSpPr>
+        <p:spPr/>
+        <p:txBody>
+          <a:bodyPr/>
+          <a:lstStyle/>
+          <a:p>
+            <a:r>
+              <a:t>journal-image.png</a:t>
+            </a:r>
+          </a:p>
+          <a:p>
+            <a:r>
+              <a:t>How this assessment was reached</a:t>
+            </a:r>
+          </a:p>
+          <a:p>
+            <a:r>
+              <a:t>1. override | outcome=none; detail=No confirmed C2PA AI assertion or SynthID watermark. Origin remains unresolved by these checks.</a:t>
+            </a:r>
+          </a:p>
+          <a:p>
+            <a:r>
+              <a:t>2. model_agreement | synthetic=['Claude Vision', 'OpenAI Vision', 'Gemini Vision']; authentic=[]; uncertain=[]; forensic_supports_synthetic=False</a:t>
+            </a:r>
+          </a:p>
+          <a:p>
+            <a:r>
+              <a:t>3. verdict | value=synthetic_likely; confidence=high; reason=3 models agree this is likely synthetic.</a:t>
+            </a:r>
+          </a:p>
+        </p:txBody>
+      </p:sp>
+      <p:sp>
+        <p:nvSpPr>
+          <p:cNvPr id="4" name="Slide Number Placeholder 3"/>
+          <p:cNvSpPr>
+            <a:spLocks noGrp="1"/>
+          </p:cNvSpPr>
+          <p:nvPr>
+            <p:ph type="sldNum" idx="5" sz="quarter"/>
+          </p:nvPr>
+        </p:nvSpPr>
+        <p:spPr/>
+      </p:sp>
+    </p:spTree>
+  </p:cSld>
+  <p:clrMapOvr>
+    <a:masterClrMapping/>
+  </p:clrMapOvr>
+</p:notes>
+</file>
+
+<file path=ppt/notesSlides/notesSlide18.xml><?xml version="1.0" encoding="utf-8"?>
+<p:notes xmlns:a="http://schemas.openxmlformats.org/drawingml/2006/main" xmlns:p="http://schemas.openxmlformats.org/presentationml/2006/main" xmlns:r="http://schemas.openxmlformats.org/officeDocument/2006/relationships">
+  <p:cSld>
+    <p:spTree>
+      <p:nvGrpSpPr>
+        <p:cNvPr id="1" name=""/>
+        <p:cNvGrpSpPr/>
+        <p:nvPr/>
+      </p:nvGrpSpPr>
+      <p:grpSpPr>
+        <a:xfrm>
+          <a:off x="0" y="0"/>
+          <a:ext cx="0" cy="0"/>
+          <a:chOff x="0" y="0"/>
+          <a:chExt cx="0" cy="0"/>
+        </a:xfrm>
+      </p:grpSpPr>
+      <p:sp>
+        <p:nvSpPr>
+          <p:cNvPr id="2" name="Slide Image Placeholder 1"/>
+          <p:cNvSpPr>
+            <a:spLocks noGrp="1"/>
+          </p:cNvSpPr>
+          <p:nvPr>
+            <p:ph type="sldImg" idx="2"/>
+          </p:nvPr>
+        </p:nvSpPr>
+        <p:spPr/>
+      </p:sp>
+      <p:sp>
+        <p:nvSpPr>
+          <p:cNvPr id="3" name="Notes Placeholder 2"/>
+          <p:cNvSpPr>
+            <a:spLocks noGrp="1"/>
+          </p:cNvSpPr>
+          <p:nvPr>
+            <p:ph type="body" idx="3" sz="quarter"/>
+          </p:nvPr>
+        </p:nvSpPr>
+        <p:spPr/>
+        <p:txBody>
+          <a:bodyPr/>
+          <a:lstStyle/>
+          <a:p>
+            <a:r>
+              <a:t>journal-image.png</a:t>
+            </a:r>
+          </a:p>
+          <a:p>
+            <a:r>
               <a:t>File and analysis record</a:t>
             </a:r>
           </a:p>
@@ -985,12 +1529,12 @@
           </a:p>
           <a:p>
             <a:r>
-              <a:t>Analysis ID | a275a269-8b2c-4442-bbd7-d03ff4ee7c91</a:t>
-            </a:r>
-          </a:p>
-          <a:p>
-            <a:r>
-              <a:t>Generated | 2026-09-26T18:37:47+00:00</a:t>
+              <a:t>Analysis ID | edbcc4b1-e980-4105-87b5-1bcf9bc171af</a:t>
+            </a:r>
+          </a:p>
+          <a:p>
+            <a:r>
+              <a:t>Generated | 2026-09-26T22:31:06+00:00</a:t>
             </a:r>
           </a:p>
           <a:p>
@@ -1000,12 +1544,12 @@
           </a:p>
           <a:p>
             <a:r>
-              <a:t>Models | Not recorded</a:t>
-            </a:r>
-          </a:p>
-          <a:p>
-            <a:r>
-              <a:t>Method version | verdict-consistency-2026-09-26.1</a:t>
+              <a:t>Models | claude-opus-5-5, gemini-3.8-flash, gpt-6-astra</a:t>
+            </a:r>
+          </a:p>
+          <a:p>
+            <a:r>
+              <a:t>Method version | pdf-preparation-2026-09-26.1</a:t>
             </a:r>
           </a:p>
           <a:p>
@@ -1020,12 +1564,12 @@
           </a:p>
           <a:p>
             <a:r>
-              <a:t>Ingestion note 1 | Local checks only. LLM visual checks have not been run for this example; no provider requests or fees. An Inconclusive combined result here reflects unavailable visual assessments, not three inconclusive model replies.</a:t>
-            </a:r>
-          </a:p>
-          <a:p>
-            <a:r>
-              <a:t>Ingestion note 2 | Presentation copy of saved report 51daff64-c246-46da-95b5-06bef3c925b8. The descriptive filename replaces the earlier example ID for navigation. Original analysis dates, provider replies, scores and acquisition context are retained; no new model analysis.</a:t>
+              <a:t>Ingestion note 1 | Fresh provider replies acquired for eleven-examples-refresh-20260926-r1; report assembled locally from the saved responses without further API calls.</a:t>
+            </a:r>
+          </a:p>
+          <a:p>
+            <a:r>
+              <a:t>Ingestion note 2 | Provider latency values are restored from the acquisition receipts (maximum sampled-frame latency per provider); raw replies and assessment results are unchanged by this bookkeeping step.</a:t>
             </a:r>
           </a:p>
         </p:txBody>
@@ -1105,32 +1649,32 @@
           </a:p>
           <a:p>
             <a:r>
-              <a:t>Finding | Inconclusive</a:t>
-            </a:r>
-          </a:p>
-          <a:p>
-            <a:r>
-              <a:t>Recorded verdict | inconclusive</a:t>
-            </a:r>
-          </a:p>
-          <a:p>
-            <a:r>
-              <a:t>Confidence | low</a:t>
-            </a:r>
-          </a:p>
-          <a:p>
-            <a:r>
-              <a:t>Indicative rating | n/a</a:t>
-            </a:r>
-          </a:p>
-          <a:p>
-            <a:r>
-              <a:t>Rating basis | no numeric score</a:t>
-            </a:r>
-          </a:p>
-          <a:p>
-            <a:r>
-              <a:t>Explanation | No vision model returned a usable result. Check provider status in the table.</a:t>
+              <a:t>Finding | Leaning synthetic</a:t>
+            </a:r>
+          </a:p>
+          <a:p>
+            <a:r>
+              <a:t>Recorded verdict | synthetic likely</a:t>
+            </a:r>
+          </a:p>
+          <a:p>
+            <a:r>
+              <a:t>Confidence | high</a:t>
+            </a:r>
+          </a:p>
+          <a:p>
+            <a:r>
+              <a:t>Indicative rating | 78/100</a:t>
+            </a:r>
+          </a:p>
+          <a:p>
+            <a:r>
+              <a:t>Rating basis | median of available model ratings; not a calibrated probability</a:t>
+            </a:r>
+          </a:p>
+          <a:p>
+            <a:r>
+              <a:t>Explanation | 3 models agree this is likely synthetic.</a:t>
             </a:r>
           </a:p>
           <a:p>
@@ -1220,17 +1764,17 @@
           </a:p>
           <a:p>
             <a:r>
-              <a:t>Claude Vision | vision / disabled | inconclusive | n/a</a:t>
-            </a:r>
-          </a:p>
-          <a:p>
-            <a:r>
-              <a:t>OpenAI Vision | vision / disabled | inconclusive | n/a</a:t>
-            </a:r>
-          </a:p>
-          <a:p>
-            <a:r>
-              <a:t>Gemini Vision | vision / disabled | inconclusive | n/a</a:t>
+              <a:t>Claude Vision | vision / ok | synthetic likely | 90/100</a:t>
+            </a:r>
+          </a:p>
+          <a:p>
+            <a:r>
+              <a:t>OpenAI Vision | vision / ok | synthetic likely | 78/100</a:t>
+            </a:r>
+          </a:p>
+          <a:p>
+            <a:r>
+              <a:t>Gemini Vision | vision / ok | synthetic likely | 72/100</a:t>
             </a:r>
           </a:p>
           <a:p>
@@ -1325,37 +1869,82 @@
           </a:p>
           <a:p>
             <a:r>
-              <a:t>Model | Not recorded</a:t>
-            </a:r>
-          </a:p>
-          <a:p>
-            <a:r>
-              <a:t>Status | disabled</a:t>
-            </a:r>
-          </a:p>
-          <a:p>
-            <a:r>
-              <a:t>Assessment | inconclusive</a:t>
-            </a:r>
-          </a:p>
-          <a:p>
-            <a:r>
-              <a:t>Confidence | Not recorded</a:t>
-            </a:r>
-          </a:p>
-          <a:p>
-            <a:r>
-              <a:t>Role in assessment | Not listed</a:t>
-            </a:r>
-          </a:p>
-          <a:p>
-            <a:r>
-              <a:t>Provider summary | LLM visual check not run for this example. This testing record contains local file checks only.</a:t>
-            </a:r>
-          </a:p>
-          <a:p>
-            <a:r>
-              <a:t>Evidence 1 | No request or image was sent to this provider for this record.</a:t>
+              <a:t>Model | claude-opus-5-5</a:t>
+            </a:r>
+          </a:p>
+          <a:p>
+            <a:r>
+              <a:t>Status | ok</a:t>
+            </a:r>
+          </a:p>
+          <a:p>
+            <a:r>
+              <a:t>Assessment | synthetic likely</a:t>
+            </a:r>
+          </a:p>
+          <a:p>
+            <a:r>
+              <a:t>Confidence | medium</a:t>
+            </a:r>
+          </a:p>
+          <a:p>
+            <a:r>
+              <a:t>Role in assessment | Supporting</a:t>
+            </a:r>
+          </a:p>
+          <a:p>
+            <a:r>
+              <a:t>Provider summary | synthetic likelihood 90/100; tells: uniform painterly-photoreal rendering style shared across the main scene and all six portrait tiles, typical of a single image-generation pass, stock-archetype faces with exaggerated, near-identical 'distressed' expressions and similar desaturated grading, over-smooth yet hyper-detailed skin texture (pores and stubble rendered evenly, slightly waxy highlights), syringe and gloved-hand geometry ambiguous: needle entry point and grip read loosely, with fingers merging around the barrel</a:t>
+            </a:r>
+          </a:p>
+          <a:p>
+            <a:r>
+              <a:t>Evidence 1 | Uniform painterly-photoreal rendering style shared across the main scene and all six portrait tiles, typical of a single image-generation pass</a:t>
+            </a:r>
+          </a:p>
+          <a:p>
+            <a:r>
+              <a:t>Evidence 2 | Stock-archetype faces with exaggerated, near-identical 'distressed' expressions and similar desaturated grading</a:t>
+            </a:r>
+          </a:p>
+          <a:p>
+            <a:r>
+              <a:t>Evidence 3 | Over-smooth yet hyper-detailed skin texture (pores and stubble rendered evenly, slightly waxy highlights)</a:t>
+            </a:r>
+          </a:p>
+          <a:p>
+            <a:r>
+              <a:t>Evidence 4 | Syringe and gloved-hand geometry ambiguous: needle entry point and grip read loosely, with fingers merging around the barrel</a:t>
+            </a:r>
+          </a:p>
+          <a:p>
+            <a:r>
+              <a:t>Evidence 5 | Man's hand pinching the sleeve has soft, poorly separated knuckles</a:t>
+            </a:r>
+          </a:p>
+          <a:p>
+            <a:r>
+              <a:t>Evidence 6 | Clean, correctly spelled headline and label typography integrated seamlessly with the artwork, consistent with recent text-capable generators</a:t>
+            </a:r>
+          </a:p>
+          <a:p>
+            <a:r>
+              <a:t>Evidence 7 | Decorative torn-paper edge and grunge textures with a generic, procedurally uniform look</a:t>
+            </a:r>
+          </a:p>
+          <a:p>
+            <a:r>
+              <a:t>Evidence 8 | No camera-consistent noise, lens blur falloff, or compression grain differences between the 'photo' regions</a:t>
+            </a:r>
+          </a:p>
+          <a:p>
+            <a:r>
+              <a:t>Evidence 9 | Square 1254x1254-style canvas with PNG output and no provenance metadata context supplied</a:t>
+            </a:r>
+          </a:p>
+          <a:p>
+            <a:r>
+              <a:t>Evidence 10 | Caveat: The fully synthetic look is strong, but a designed graphic could also combine stock photos with heavy stylisation. Check the file's metadata, C2PA/content credentials and reverse-image matches before attributing origin. The rating does not assess the truth of any health claim.</a:t>
             </a:r>
           </a:p>
         </p:txBody>
@@ -1430,47 +2019,92 @@
           </a:p>
           <a:p>
             <a:r>
-              <a:t>Provider evidence / 2</a:t>
-            </a:r>
-          </a:p>
-          <a:p>
-            <a:r>
-              <a:t>Provider | OpenAI Vision</a:t>
-            </a:r>
-          </a:p>
-          <a:p>
-            <a:r>
-              <a:t>Model | Not recorded</a:t>
-            </a:r>
-          </a:p>
-          <a:p>
-            <a:r>
-              <a:t>Status | disabled</a:t>
-            </a:r>
-          </a:p>
-          <a:p>
-            <a:r>
-              <a:t>Assessment | inconclusive</a:t>
-            </a:r>
-          </a:p>
-          <a:p>
-            <a:r>
-              <a:t>Confidence | Not recorded</a:t>
-            </a:r>
-          </a:p>
-          <a:p>
-            <a:r>
-              <a:t>Role in assessment | Not listed</a:t>
-            </a:r>
-          </a:p>
-          <a:p>
-            <a:r>
-              <a:t>Provider summary | LLM visual check not run for this example. This testing record contains local file checks only.</a:t>
-            </a:r>
-          </a:p>
-          <a:p>
-            <a:r>
-              <a:t>Evidence 1 | No request or image was sent to this provider for this record.</a:t>
+              <a:t>Provider evidence / 1</a:t>
+            </a:r>
+          </a:p>
+          <a:p>
+            <a:r>
+              <a:t>Provider | Claude Vision</a:t>
+            </a:r>
+          </a:p>
+          <a:p>
+            <a:r>
+              <a:t>Model | claude-opus-5-5</a:t>
+            </a:r>
+          </a:p>
+          <a:p>
+            <a:r>
+              <a:t>Status | ok</a:t>
+            </a:r>
+          </a:p>
+          <a:p>
+            <a:r>
+              <a:t>Assessment | synthetic likely</a:t>
+            </a:r>
+          </a:p>
+          <a:p>
+            <a:r>
+              <a:t>Confidence | medium</a:t>
+            </a:r>
+          </a:p>
+          <a:p>
+            <a:r>
+              <a:t>Role in assessment | Supporting</a:t>
+            </a:r>
+          </a:p>
+          <a:p>
+            <a:r>
+              <a:t>Provider summary | synthetic likelihood 90/100; tells: uniform painterly-photoreal rendering style shared across the main scene and all six portrait tiles, typical of a single image-generation pass, stock-archetype faces with exaggerated, near-identical 'distressed' expressions and similar desaturated grading, over-smooth yet hyper-detailed skin texture (pores and stubble rendered evenly, slightly waxy highlights), syringe and gloved-hand geometry ambiguous: needle entry point and grip read loosely, with fingers merging around the barrel</a:t>
+            </a:r>
+          </a:p>
+          <a:p>
+            <a:r>
+              <a:t>Evidence 1 | Uniform painterly-photoreal rendering style shared across the main scene and all six portrait tiles, typical of a single image-generation pass</a:t>
+            </a:r>
+          </a:p>
+          <a:p>
+            <a:r>
+              <a:t>Evidence 2 | Stock-archetype faces with exaggerated, near-identical 'distressed' expressions and similar desaturated grading</a:t>
+            </a:r>
+          </a:p>
+          <a:p>
+            <a:r>
+              <a:t>Evidence 3 | Over-smooth yet hyper-detailed skin texture (pores and stubble rendered evenly, slightly waxy highlights)</a:t>
+            </a:r>
+          </a:p>
+          <a:p>
+            <a:r>
+              <a:t>Evidence 4 | Syringe and gloved-hand geometry ambiguous: needle entry point and grip read loosely, with fingers merging around the barrel</a:t>
+            </a:r>
+          </a:p>
+          <a:p>
+            <a:r>
+              <a:t>Evidence 5 | Man's hand pinching the sleeve has soft, poorly separated knuckles</a:t>
+            </a:r>
+          </a:p>
+          <a:p>
+            <a:r>
+              <a:t>Evidence 6 | Clean, correctly spelled headline and label typography integrated seamlessly with the artwork, consistent with recent text-capable generators</a:t>
+            </a:r>
+          </a:p>
+          <a:p>
+            <a:r>
+              <a:t>Evidence 7 | Decorative torn-paper edge and grunge textures with a generic, procedurally uniform look</a:t>
+            </a:r>
+          </a:p>
+          <a:p>
+            <a:r>
+              <a:t>Evidence 8 | No camera-consistent noise, lens blur falloff, or compression grain differences between the 'photo' regions</a:t>
+            </a:r>
+          </a:p>
+          <a:p>
+            <a:r>
+              <a:t>Evidence 9 | Square 1254x1254-style canvas with PNG output and no provenance metadata context supplied</a:t>
+            </a:r>
+          </a:p>
+          <a:p>
+            <a:r>
+              <a:t>Evidence 10 | Caveat: The fully synthetic look is strong, but a designed graphic could also combine stock photos with heavy stylisation. Check the file's metadata, C2PA/content credentials and reverse-image matches before attributing origin. The rating does not assess the truth of any health claim.</a:t>
             </a:r>
           </a:p>
         </p:txBody>
@@ -1545,47 +2179,92 @@
           </a:p>
           <a:p>
             <a:r>
-              <a:t>Provider evidence / 3</a:t>
-            </a:r>
-          </a:p>
-          <a:p>
-            <a:r>
-              <a:t>Provider | Gemini Vision</a:t>
-            </a:r>
-          </a:p>
-          <a:p>
-            <a:r>
-              <a:t>Model | Not recorded</a:t>
-            </a:r>
-          </a:p>
-          <a:p>
-            <a:r>
-              <a:t>Status | disabled</a:t>
-            </a:r>
-          </a:p>
-          <a:p>
-            <a:r>
-              <a:t>Assessment | inconclusive</a:t>
-            </a:r>
-          </a:p>
-          <a:p>
-            <a:r>
-              <a:t>Confidence | Not recorded</a:t>
-            </a:r>
-          </a:p>
-          <a:p>
-            <a:r>
-              <a:t>Role in assessment | Not listed</a:t>
-            </a:r>
-          </a:p>
-          <a:p>
-            <a:r>
-              <a:t>Provider summary | LLM visual check not run for this example. This testing record contains local file checks only.</a:t>
-            </a:r>
-          </a:p>
-          <a:p>
-            <a:r>
-              <a:t>Evidence 1 | No request or image was sent to this provider for this record.</a:t>
+              <a:t>Provider evidence / 1</a:t>
+            </a:r>
+          </a:p>
+          <a:p>
+            <a:r>
+              <a:t>Provider | Claude Vision</a:t>
+            </a:r>
+          </a:p>
+          <a:p>
+            <a:r>
+              <a:t>Model | claude-opus-5-5</a:t>
+            </a:r>
+          </a:p>
+          <a:p>
+            <a:r>
+              <a:t>Status | ok</a:t>
+            </a:r>
+          </a:p>
+          <a:p>
+            <a:r>
+              <a:t>Assessment | synthetic likely</a:t>
+            </a:r>
+          </a:p>
+          <a:p>
+            <a:r>
+              <a:t>Confidence | medium</a:t>
+            </a:r>
+          </a:p>
+          <a:p>
+            <a:r>
+              <a:t>Role in assessment | Supporting</a:t>
+            </a:r>
+          </a:p>
+          <a:p>
+            <a:r>
+              <a:t>Provider summary | synthetic likelihood 90/100; tells: uniform painterly-photoreal rendering style shared across the main scene and all six portrait tiles, typical of a single image-generation pass, stock-archetype faces with exaggerated, near-identical 'distressed' expressions and similar desaturated grading, over-smooth yet hyper-detailed skin texture (pores and stubble rendered evenly, slightly waxy highlights), syringe and gloved-hand geometry ambiguous: needle entry point and grip read loosely, with fingers merging around the barrel</a:t>
+            </a:r>
+          </a:p>
+          <a:p>
+            <a:r>
+              <a:t>Evidence 1 | Uniform painterly-photoreal rendering style shared across the main scene and all six portrait tiles, typical of a single image-generation pass</a:t>
+            </a:r>
+          </a:p>
+          <a:p>
+            <a:r>
+              <a:t>Evidence 2 | Stock-archetype faces with exaggerated, near-identical 'distressed' expressions and similar desaturated grading</a:t>
+            </a:r>
+          </a:p>
+          <a:p>
+            <a:r>
+              <a:t>Evidence 3 | Over-smooth yet hyper-detailed skin texture (pores and stubble rendered evenly, slightly waxy highlights)</a:t>
+            </a:r>
+          </a:p>
+          <a:p>
+            <a:r>
+              <a:t>Evidence 4 | Syringe and gloved-hand geometry ambiguous: needle entry point and grip read loosely, with fingers merging around the barrel</a:t>
+            </a:r>
+          </a:p>
+          <a:p>
+            <a:r>
+              <a:t>Evidence 5 | Man's hand pinching the sleeve has soft, poorly separated knuckles</a:t>
+            </a:r>
+          </a:p>
+          <a:p>
+            <a:r>
+              <a:t>Evidence 6 | Clean, correctly spelled headline and label typography integrated seamlessly with the artwork, consistent with recent text-capable generators</a:t>
+            </a:r>
+          </a:p>
+          <a:p>
+            <a:r>
+              <a:t>Evidence 7 | Decorative torn-paper edge and grunge textures with a generic, procedurally uniform look</a:t>
+            </a:r>
+          </a:p>
+          <a:p>
+            <a:r>
+              <a:t>Evidence 8 | No camera-consistent noise, lens blur falloff, or compression grain differences between the 'photo' regions</a:t>
+            </a:r>
+          </a:p>
+          <a:p>
+            <a:r>
+              <a:t>Evidence 9 | Square 1254x1254-style canvas with PNG output and no provenance metadata context supplied</a:t>
+            </a:r>
+          </a:p>
+          <a:p>
+            <a:r>
+              <a:t>Evidence 10 | Caveat: The fully synthetic look is strong, but a designed graphic could also combine stock photos with heavy stylisation. Check the file's metadata, C2PA/content credentials and reverse-image matches before attributing origin. The rating does not assess the truth of any health claim.</a:t>
             </a:r>
           </a:p>
         </p:txBody>
@@ -1660,17 +2339,17 @@
           </a:p>
           <a:p>
             <a:r>
-              <a:t>Content Credentials / provenance</a:t>
-            </a:r>
-          </a:p>
-          <a:p>
-            <a:r>
-              <a:t>Provider | C2PA Content Credentials</a:t>
-            </a:r>
-          </a:p>
-          <a:p>
-            <a:r>
-              <a:t>Model | Not recorded</a:t>
+              <a:t>Provider evidence / 2</a:t>
+            </a:r>
+          </a:p>
+          <a:p>
+            <a:r>
+              <a:t>Provider | OpenAI Vision</a:t>
+            </a:r>
+          </a:p>
+          <a:p>
+            <a:r>
+              <a:t>Model | gpt-6-astra</a:t>
             </a:r>
           </a:p>
           <a:p>
@@ -1680,42 +2359,47 @@
           </a:p>
           <a:p>
             <a:r>
-              <a:t>Assessment | inconclusive</a:t>
-            </a:r>
-          </a:p>
-          <a:p>
-            <a:r>
-              <a:t>Confidence | Not recorded</a:t>
-            </a:r>
-          </a:p>
-          <a:p>
-            <a:r>
-              <a:t>Role in assessment | Additional finding</a:t>
-            </a:r>
-          </a:p>
-          <a:p>
-            <a:r>
-              <a:t>Provider summary | Embedded credentials: none found. Origin remains unresolved by this check.</a:t>
-            </a:r>
-          </a:p>
-          <a:p>
-            <a:r>
-              <a:t>Evidence 1 | Coverage: credentials embedded in the submitted file. External credentials were not retrieved.</a:t>
-            </a:r>
-          </a:p>
-          <a:p>
-            <a:r>
-              <a:t>Evidence 2 | Verifier: c2pa-python 0.37.12; native SDK 0.91.0; specification target 2.4; policy embedded-offline-reviewed-trust-v3.</a:t>
-            </a:r>
-          </a:p>
-          <a:p>
-            <a:r>
-              <a:t>Evidence 3 | Offline embedded-manifest verification; no network trust-list, manifest or revocation refresh.</a:t>
-            </a:r>
-          </a:p>
-          <a:p>
-            <a:r>
-              <a:t>Evidence 4 | No reviewed local C2PA trust snapshot installed. Provenance overrides are disabled.</a:t>
+              <a:t>Assessment | synthetic likely</a:t>
+            </a:r>
+          </a:p>
+          <a:p>
+            <a:r>
+              <a:t>Confidence | medium</a:t>
+            </a:r>
+          </a:p>
+          <a:p>
+            <a:r>
+              <a:t>Role in assessment | Supporting</a:t>
+            </a:r>
+          </a:p>
+          <a:p>
+            <a:r>
+              <a:t>Provider summary | synthetic likelihood 78/100; tells: Main vaccination scene and six inset portraits share unusually uniform cinematic lighting and textured skin rendering., Syringe barrel, plunger, and gloved grip have indistinct, difficult-to-reconcile geometry., Hair and facial creases in several portraits appear unusually densely sharpened against smooth backgrounds., Crisp, coherent typography and neatly aligned panels indicate a designed graphic but do not independently establish AI use.</a:t>
+            </a:r>
+          </a:p>
+          <a:p>
+            <a:r>
+              <a:t>Evidence 1 | Main vaccination scene and six inset portraits share unusually uniform cinematic lighting and textured skin rendering.</a:t>
+            </a:r>
+          </a:p>
+          <a:p>
+            <a:r>
+              <a:t>Evidence 2 | Syringe barrel, plunger, and gloved grip have indistinct, difficult-to-reconcile geometry.</a:t>
+            </a:r>
+          </a:p>
+          <a:p>
+            <a:r>
+              <a:t>Evidence 3 | Hair and facial creases in several portraits appear unusually densely sharpened against smooth backgrounds.</a:t>
+            </a:r>
+          </a:p>
+          <a:p>
+            <a:r>
+              <a:t>Evidence 4 | Crisp, coherent typography and neatly aligned panels indicate a designed graphic but do not independently establish AI use.</a:t>
+            </a:r>
+          </a:p>
+          <a:p>
+            <a:r>
+              <a:t>Evidence 5 | Caveat: A professionally designed collage of stock photographs could produce similar styling; source assets and provenance are needed to distinguish generated portraits from conventional editing.</a:t>
             </a:r>
           </a:p>
         </p:txBody>
@@ -1790,17 +2474,17 @@
           </a:p>
           <a:p>
             <a:r>
-              <a:t>Content Credentials / provenance</a:t>
-            </a:r>
-          </a:p>
-          <a:p>
-            <a:r>
-              <a:t>Provider | C2PA Content Credentials</a:t>
-            </a:r>
-          </a:p>
-          <a:p>
-            <a:r>
-              <a:t>Model | Not recorded</a:t>
+              <a:t>Provider evidence / 2</a:t>
+            </a:r>
+          </a:p>
+          <a:p>
+            <a:r>
+              <a:t>Provider | OpenAI Vision</a:t>
+            </a:r>
+          </a:p>
+          <a:p>
+            <a:r>
+              <a:t>Model | gpt-6-astra</a:t>
             </a:r>
           </a:p>
           <a:p>
@@ -1810,42 +2494,47 @@
           </a:p>
           <a:p>
             <a:r>
-              <a:t>Assessment | inconclusive</a:t>
-            </a:r>
-          </a:p>
-          <a:p>
-            <a:r>
-              <a:t>Confidence | Not recorded</a:t>
-            </a:r>
-          </a:p>
-          <a:p>
-            <a:r>
-              <a:t>Role in assessment | Additional finding</a:t>
-            </a:r>
-          </a:p>
-          <a:p>
-            <a:r>
-              <a:t>Provider summary | Embedded credentials: none found. Origin remains unresolved by this check.</a:t>
-            </a:r>
-          </a:p>
-          <a:p>
-            <a:r>
-              <a:t>Evidence 1 | Coverage: credentials embedded in the submitted file. External credentials were not retrieved.</a:t>
-            </a:r>
-          </a:p>
-          <a:p>
-            <a:r>
-              <a:t>Evidence 2 | Verifier: c2pa-python 0.37.12; native SDK 0.91.0; specification target 2.4; policy embedded-offline-reviewed-trust-v3.</a:t>
-            </a:r>
-          </a:p>
-          <a:p>
-            <a:r>
-              <a:t>Evidence 3 | Offline embedded-manifest verification; no network trust-list, manifest or revocation refresh.</a:t>
-            </a:r>
-          </a:p>
-          <a:p>
-            <a:r>
-              <a:t>Evidence 4 | No reviewed local C2PA trust snapshot installed. Provenance overrides are disabled.</a:t>
+              <a:t>Assessment | synthetic likely</a:t>
+            </a:r>
+          </a:p>
+          <a:p>
+            <a:r>
+              <a:t>Confidence | medium</a:t>
+            </a:r>
+          </a:p>
+          <a:p>
+            <a:r>
+              <a:t>Role in assessment | Supporting</a:t>
+            </a:r>
+          </a:p>
+          <a:p>
+            <a:r>
+              <a:t>Provider summary | synthetic likelihood 78/100; tells: Main vaccination scene and six inset portraits share unusually uniform cinematic lighting and textured skin rendering., Syringe barrel, plunger, and gloved grip have indistinct, difficult-to-reconcile geometry., Hair and facial creases in several portraits appear unusually densely sharpened against smooth backgrounds., Crisp, coherent typography and neatly aligned panels indicate a designed graphic but do not independently establish AI use.</a:t>
+            </a:r>
+          </a:p>
+          <a:p>
+            <a:r>
+              <a:t>Evidence 1 | Main vaccination scene and six inset portraits share unusually uniform cinematic lighting and textured skin rendering.</a:t>
+            </a:r>
+          </a:p>
+          <a:p>
+            <a:r>
+              <a:t>Evidence 2 | Syringe barrel, plunger, and gloved grip have indistinct, difficult-to-reconcile geometry.</a:t>
+            </a:r>
+          </a:p>
+          <a:p>
+            <a:r>
+              <a:t>Evidence 3 | Hair and facial creases in several portraits appear unusually densely sharpened against smooth backgrounds.</a:t>
+            </a:r>
+          </a:p>
+          <a:p>
+            <a:r>
+              <a:t>Evidence 4 | Crisp, coherent typography and neatly aligned panels indicate a designed graphic but do not independently establish AI use.</a:t>
+            </a:r>
+          </a:p>
+          <a:p>
+            <a:r>
+              <a:t>Evidence 5 | Caveat: A professionally designed collage of stock photographs could produce similar styling; source assets and provenance are needed to distinguish generated portraits from conventional editing.</a:t>
             </a:r>
           </a:p>
         </p:txBody>
@@ -1920,17 +2609,17 @@
           </a:p>
           <a:p>
             <a:r>
-              <a:t>Provider evidence / 5</a:t>
-            </a:r>
-          </a:p>
-          <a:p>
-            <a:r>
-              <a:t>Provider | Local forensic cues</a:t>
-            </a:r>
-          </a:p>
-          <a:p>
-            <a:r>
-              <a:t>Model | Not recorded</a:t>
+              <a:t>Provider evidence / 3</a:t>
+            </a:r>
+          </a:p>
+          <a:p>
+            <a:r>
+              <a:t>Provider | Gemini Vision</a:t>
+            </a:r>
+          </a:p>
+          <a:p>
+            <a:r>
+              <a:t>Model | gemini-3.8-flash</a:t>
             </a:r>
           </a:p>
           <a:p>
@@ -1940,42 +2629,52 @@
           </a:p>
           <a:p>
             <a:r>
-              <a:t>Assessment | partially synthetic</a:t>
-            </a:r>
-          </a:p>
-          <a:p>
-            <a:r>
-              <a:t>Confidence | low</a:t>
-            </a:r>
-          </a:p>
-          <a:p>
-            <a:r>
-              <a:t>Role in assessment | Additional finding</a:t>
-            </a:r>
-          </a:p>
-          <a:p>
-            <a:r>
-              <a:t>Provider summary | Heuristic synthetic likelihood 41/100 from metadata + pixel statistics.</a:t>
-            </a:r>
-          </a:p>
-          <a:p>
-            <a:r>
-              <a:t>Evidence 1 | No camera EXIF (common in AI exports, screenshots, and re-saves).</a:t>
-            </a:r>
-          </a:p>
-          <a:p>
-            <a:r>
-              <a:t>Evidence 2 | ELA mean 1.8, peak 53 (uniform high ELA can indicate generation/heavy edit).</a:t>
-            </a:r>
-          </a:p>
-          <a:p>
-            <a:r>
-              <a:t>Evidence 3 | High-frequency noise std 10.42 (very low/very uniform noise is a synthesis cue).</a:t>
-            </a:r>
-          </a:p>
-          <a:p>
-            <a:r>
-              <a:t>Evidence 4 | Spectral peakiness 24.85 (periodic frequency peaks can mark generated textures).</a:t>
+              <a:t>Assessment | synthetic likely</a:t>
+            </a:r>
+          </a:p>
+          <a:p>
+            <a:r>
+              <a:t>Confidence | medium</a:t>
+            </a:r>
+          </a:p>
+          <a:p>
+            <a:r>
+              <a:t>Role in assessment | Supporting</a:t>
+            </a:r>
+          </a:p>
+          <a:p>
+            <a:r>
+              <a:t>Provider summary | synthetic likelihood 72/100; tells: model read this as AI editing over a photographic base image, hyper-rendered skin textures, characteristic AI portrait lighting across multiple subjects, slightly unnatural finger and needle interaction</a:t>
+            </a:r>
+          </a:p>
+          <a:p>
+            <a:r>
+              <a:t>Evidence 1 | Model read this as AI editing over a photographic base image</a:t>
+            </a:r>
+          </a:p>
+          <a:p>
+            <a:r>
+              <a:t>Evidence 2 | Hyper-rendered skin textures</a:t>
+            </a:r>
+          </a:p>
+          <a:p>
+            <a:r>
+              <a:t>Evidence 3 | Characteristic AI portrait lighting across multiple subjects</a:t>
+            </a:r>
+          </a:p>
+          <a:p>
+            <a:r>
+              <a:t>Evidence 4 | Slightly unnatural finger and needle interaction</a:t>
+            </a:r>
+          </a:p>
+          <a:p>
+            <a:r>
+              <a:t>Evidence 5 | Stereotyped expressive posing common in text-to-image models</a:t>
+            </a:r>
+          </a:p>
+          <a:p>
+            <a:r>
+              <a:t>Evidence 6 | Caveat: Composite infographic layout uses standard design typography alongside potentially AI-generated stock-style faces.</a:t>
             </a:r>
           </a:p>
         </p:txBody>
@@ -5312,7 +6011,7 @@
               </a:defRPr>
             </a:pPr>
             <a:r>
-              <a:t>Evidence supporting this verdict</a:t>
+              <a:t>Provider evidence / 3 (continued)</a:t>
             </a:r>
           </a:p>
         </p:txBody>
@@ -5532,7 +6231,7 @@
                         </a:defRPr>
                       </a:pPr>
                       <a:r>
-                        <a:t>Record</a:t>
+                        <a:t>Evidence 4</a:t>
                       </a:r>
                     </a:p>
                   </a:txBody>
@@ -5562,7 +6261,202 @@
                         </a:defRPr>
                       </a:pPr>
                       <a:r>
-                        <a:t>No entries recorded.</a:t>
+                        <a:t>Slightly unnatural finger and needle interaction</a:t>
+                      </a:r>
+                    </a:p>
+                  </a:txBody>
+                  <a:tcPr marL="82296" marR="82296" marT="64008" marB="64008">
+                    <a:solidFill>
+                      <a:srgbClr val="F1F7F7"/>
+                    </a:solidFill>
+                  </a:tcPr>
+                </a:tc>
+              </a:tr>
+            </a:tbl>
+          </a:graphicData>
+        </a:graphic>
+      </p:graphicFrame>
+      <p:graphicFrame>
+        <p:nvGraphicFramePr>
+          <p:cNvPr id="8" name="Table 7"/>
+          <p:cNvGraphicFramePr>
+            <a:graphicFrameLocks noGrp="1"/>
+          </p:cNvGraphicFramePr>
+          <p:nvPr/>
+        </p:nvGraphicFramePr>
+        <p:xfrm>
+          <a:off x="365760" y="2050288"/>
+          <a:ext cx="8412479" cy="349504"/>
+        </p:xfrm>
+        <a:graphic>
+          <a:graphicData uri="http://schemas.openxmlformats.org/drawingml/2006/table">
+            <a:tbl>
+              <a:tblPr firstRow="1" bandRow="1">
+                <a:tableStyleId>{5C22544A-7EE6-4342-B048-85BDC9FD1C3A}</a:tableStyleId>
+              </a:tblPr>
+              <a:tblGrid>
+                <a:gridCol w="2271369"/>
+                <a:gridCol w="6141110"/>
+              </a:tblGrid>
+              <a:tr h="349504">
+                <a:tc>
+                  <a:txBody>
+                    <a:bodyPr wrap="none"/>
+                    <a:lstStyle/>
+                    <a:p>
+                      <a:pPr>
+                        <a:lnSpc>
+                          <a:spcPts val="1600"/>
+                        </a:lnSpc>
+                        <a:spcAft>
+                          <a:spcPts val="0"/>
+                        </a:spcAft>
+                        <a:defRPr sz="1200" b="0">
+                          <a:solidFill>
+                            <a:srgbClr val="21243A"/>
+                          </a:solidFill>
+                          <a:latin typeface="Arial"/>
+                        </a:defRPr>
+                      </a:pPr>
+                      <a:r>
+                        <a:t>Evidence 5</a:t>
+                      </a:r>
+                    </a:p>
+                  </a:txBody>
+                  <a:tcPr marL="82296" marR="82296" marT="64008" marB="64008">
+                    <a:solidFill>
+                      <a:srgbClr val="FFFFFF"/>
+                    </a:solidFill>
+                  </a:tcPr>
+                </a:tc>
+                <a:tc>
+                  <a:txBody>
+                    <a:bodyPr wrap="none"/>
+                    <a:lstStyle/>
+                    <a:p>
+                      <a:pPr>
+                        <a:lnSpc>
+                          <a:spcPts val="1600"/>
+                        </a:lnSpc>
+                        <a:spcAft>
+                          <a:spcPts val="0"/>
+                        </a:spcAft>
+                        <a:defRPr sz="1200" b="0">
+                          <a:solidFill>
+                            <a:srgbClr val="21243A"/>
+                          </a:solidFill>
+                          <a:latin typeface="Arial"/>
+                        </a:defRPr>
+                      </a:pPr>
+                      <a:r>
+                        <a:t>Stereotyped expressive posing common in text-to-image models</a:t>
+                      </a:r>
+                    </a:p>
+                  </a:txBody>
+                  <a:tcPr marL="82296" marR="82296" marT="64008" marB="64008">
+                    <a:solidFill>
+                      <a:srgbClr val="FFFFFF"/>
+                    </a:solidFill>
+                  </a:tcPr>
+                </a:tc>
+              </a:tr>
+            </a:tbl>
+          </a:graphicData>
+        </a:graphic>
+      </p:graphicFrame>
+      <p:graphicFrame>
+        <p:nvGraphicFramePr>
+          <p:cNvPr id="9" name="Table 8"/>
+          <p:cNvGraphicFramePr>
+            <a:graphicFrameLocks noGrp="1"/>
+          </p:cNvGraphicFramePr>
+          <p:nvPr/>
+        </p:nvGraphicFramePr>
+        <p:xfrm>
+          <a:off x="365760" y="2399792"/>
+          <a:ext cx="8412479" cy="552704"/>
+        </p:xfrm>
+        <a:graphic>
+          <a:graphicData uri="http://schemas.openxmlformats.org/drawingml/2006/table">
+            <a:tbl>
+              <a:tblPr firstRow="1" bandRow="1">
+                <a:tableStyleId>{5C22544A-7EE6-4342-B048-85BDC9FD1C3A}</a:tableStyleId>
+              </a:tblPr>
+              <a:tblGrid>
+                <a:gridCol w="2271369"/>
+                <a:gridCol w="6141110"/>
+              </a:tblGrid>
+              <a:tr h="552704">
+                <a:tc>
+                  <a:txBody>
+                    <a:bodyPr wrap="none"/>
+                    <a:lstStyle/>
+                    <a:p>
+                      <a:pPr>
+                        <a:lnSpc>
+                          <a:spcPts val="1600"/>
+                        </a:lnSpc>
+                        <a:spcAft>
+                          <a:spcPts val="0"/>
+                        </a:spcAft>
+                        <a:defRPr sz="1200" b="0">
+                          <a:solidFill>
+                            <a:srgbClr val="21243A"/>
+                          </a:solidFill>
+                          <a:latin typeface="Arial"/>
+                        </a:defRPr>
+                      </a:pPr>
+                      <a:r>
+                        <a:t>Evidence 6</a:t>
+                      </a:r>
+                    </a:p>
+                  </a:txBody>
+                  <a:tcPr marL="82296" marR="82296" marT="64008" marB="64008">
+                    <a:solidFill>
+                      <a:srgbClr val="F1F7F7"/>
+                    </a:solidFill>
+                  </a:tcPr>
+                </a:tc>
+                <a:tc>
+                  <a:txBody>
+                    <a:bodyPr wrap="none"/>
+                    <a:lstStyle/>
+                    <a:p>
+                      <a:pPr>
+                        <a:lnSpc>
+                          <a:spcPts val="1600"/>
+                        </a:lnSpc>
+                        <a:spcAft>
+                          <a:spcPts val="0"/>
+                        </a:spcAft>
+                        <a:defRPr sz="1200" b="0">
+                          <a:solidFill>
+                            <a:srgbClr val="21243A"/>
+                          </a:solidFill>
+                          <a:latin typeface="Arial"/>
+                        </a:defRPr>
+                      </a:pPr>
+                      <a:r>
+                        <a:t>Caveat: Composite infographic layout uses standard design typography alongside</a:t>
+                      </a:r>
+                    </a:p>
+                    <a:p>
+                      <a:pPr>
+                        <a:lnSpc>
+                          <a:spcPts val="1600"/>
+                        </a:lnSpc>
+                        <a:spcAft>
+                          <a:spcPts val="0"/>
+                        </a:spcAft>
+                        <a:defRPr sz="1200" b="0">
+                          <a:solidFill>
+                            <a:srgbClr val="21243A"/>
+                          </a:solidFill>
+                          <a:latin typeface="Arial"/>
+                        </a:defRPr>
+                      </a:pPr>
+                      <a:r>
+                        <a:t>potentially AI-generated stock-style faces.</a:t>
                       </a:r>
                     </a:p>
                   </a:txBody>
@@ -5674,7 +6568,7 @@
               </a:defRPr>
             </a:pPr>
             <a:r>
-              <a:t>Additional findings</a:t>
+              <a:t>Content Credentials / provenance</a:t>
             </a:r>
           </a:p>
         </p:txBody>
@@ -5894,7 +6788,7 @@
                         </a:defRPr>
                       </a:pPr>
                       <a:r>
-                        <a:t>Local forensic cues</a:t>
+                        <a:t>Provider</a:t>
                       </a:r>
                     </a:p>
                   </a:txBody>
@@ -5924,7 +6818,7 @@
                         </a:defRPr>
                       </a:pPr>
                       <a:r>
-                        <a:t>Supporting observation; considered alongside the model assessments.</a:t>
+                        <a:t>C2PA Content Credentials</a:t>
                       </a:r>
                     </a:p>
                   </a:txBody>
@@ -5982,7 +6876,7 @@
                         </a:defRPr>
                       </a:pPr>
                       <a:r>
-                        <a:t>C2PA Content Credentials</a:t>
+                        <a:t>Model</a:t>
                       </a:r>
                     </a:p>
                   </a:txBody>
@@ -6012,7 +6906,768 @@
                         </a:defRPr>
                       </a:pPr>
                       <a:r>
+                        <a:t>Not recorded</a:t>
+                      </a:r>
+                    </a:p>
+                  </a:txBody>
+                  <a:tcPr marL="82296" marR="82296" marT="64008" marB="64008">
+                    <a:solidFill>
+                      <a:srgbClr val="FFFFFF"/>
+                    </a:solidFill>
+                  </a:tcPr>
+                </a:tc>
+              </a:tr>
+            </a:tbl>
+          </a:graphicData>
+        </a:graphic>
+      </p:graphicFrame>
+      <p:graphicFrame>
+        <p:nvGraphicFramePr>
+          <p:cNvPr id="9" name="Table 8"/>
+          <p:cNvGraphicFramePr>
+            <a:graphicFrameLocks noGrp="1"/>
+          </p:cNvGraphicFramePr>
+          <p:nvPr/>
+        </p:nvGraphicFramePr>
+        <p:xfrm>
+          <a:off x="365760" y="2399792"/>
+          <a:ext cx="8412479" cy="349504"/>
+        </p:xfrm>
+        <a:graphic>
+          <a:graphicData uri="http://schemas.openxmlformats.org/drawingml/2006/table">
+            <a:tbl>
+              <a:tblPr firstRow="1" bandRow="1">
+                <a:tableStyleId>{5C22544A-7EE6-4342-B048-85BDC9FD1C3A}</a:tableStyleId>
+              </a:tblPr>
+              <a:tblGrid>
+                <a:gridCol w="2271369"/>
+                <a:gridCol w="6141110"/>
+              </a:tblGrid>
+              <a:tr h="349504">
+                <a:tc>
+                  <a:txBody>
+                    <a:bodyPr wrap="none"/>
+                    <a:lstStyle/>
+                    <a:p>
+                      <a:pPr>
+                        <a:lnSpc>
+                          <a:spcPts val="1600"/>
+                        </a:lnSpc>
+                        <a:spcAft>
+                          <a:spcPts val="0"/>
+                        </a:spcAft>
+                        <a:defRPr sz="1200" b="0">
+                          <a:solidFill>
+                            <a:srgbClr val="21243A"/>
+                          </a:solidFill>
+                          <a:latin typeface="Arial"/>
+                        </a:defRPr>
+                      </a:pPr>
+                      <a:r>
+                        <a:t>Status</a:t>
+                      </a:r>
+                    </a:p>
+                  </a:txBody>
+                  <a:tcPr marL="82296" marR="82296" marT="64008" marB="64008">
+                    <a:solidFill>
+                      <a:srgbClr val="F1F7F7"/>
+                    </a:solidFill>
+                  </a:tcPr>
+                </a:tc>
+                <a:tc>
+                  <a:txBody>
+                    <a:bodyPr wrap="none"/>
+                    <a:lstStyle/>
+                    <a:p>
+                      <a:pPr>
+                        <a:lnSpc>
+                          <a:spcPts val="1600"/>
+                        </a:lnSpc>
+                        <a:spcAft>
+                          <a:spcPts val="0"/>
+                        </a:spcAft>
+                        <a:defRPr sz="1200" b="0">
+                          <a:solidFill>
+                            <a:srgbClr val="21243A"/>
+                          </a:solidFill>
+                          <a:latin typeface="Arial"/>
+                        </a:defRPr>
+                      </a:pPr>
+                      <a:r>
+                        <a:t>ok</a:t>
+                      </a:r>
+                    </a:p>
+                  </a:txBody>
+                  <a:tcPr marL="82296" marR="82296" marT="64008" marB="64008">
+                    <a:solidFill>
+                      <a:srgbClr val="F1F7F7"/>
+                    </a:solidFill>
+                  </a:tcPr>
+                </a:tc>
+              </a:tr>
+            </a:tbl>
+          </a:graphicData>
+        </a:graphic>
+      </p:graphicFrame>
+      <p:graphicFrame>
+        <p:nvGraphicFramePr>
+          <p:cNvPr id="10" name="Table 9"/>
+          <p:cNvGraphicFramePr>
+            <a:graphicFrameLocks noGrp="1"/>
+          </p:cNvGraphicFramePr>
+          <p:nvPr/>
+        </p:nvGraphicFramePr>
+        <p:xfrm>
+          <a:off x="365760" y="2749296"/>
+          <a:ext cx="8412479" cy="349504"/>
+        </p:xfrm>
+        <a:graphic>
+          <a:graphicData uri="http://schemas.openxmlformats.org/drawingml/2006/table">
+            <a:tbl>
+              <a:tblPr firstRow="1" bandRow="1">
+                <a:tableStyleId>{5C22544A-7EE6-4342-B048-85BDC9FD1C3A}</a:tableStyleId>
+              </a:tblPr>
+              <a:tblGrid>
+                <a:gridCol w="2271369"/>
+                <a:gridCol w="6141110"/>
+              </a:tblGrid>
+              <a:tr h="349504">
+                <a:tc>
+                  <a:txBody>
+                    <a:bodyPr wrap="none"/>
+                    <a:lstStyle/>
+                    <a:p>
+                      <a:pPr>
+                        <a:lnSpc>
+                          <a:spcPts val="1600"/>
+                        </a:lnSpc>
+                        <a:spcAft>
+                          <a:spcPts val="0"/>
+                        </a:spcAft>
+                        <a:defRPr sz="1200" b="0">
+                          <a:solidFill>
+                            <a:srgbClr val="21243A"/>
+                          </a:solidFill>
+                          <a:latin typeface="Arial"/>
+                        </a:defRPr>
+                      </a:pPr>
+                      <a:r>
+                        <a:t>Assessment</a:t>
+                      </a:r>
+                    </a:p>
+                  </a:txBody>
+                  <a:tcPr marL="82296" marR="82296" marT="64008" marB="64008">
+                    <a:solidFill>
+                      <a:srgbClr val="FFFFFF"/>
+                    </a:solidFill>
+                  </a:tcPr>
+                </a:tc>
+                <a:tc>
+                  <a:txBody>
+                    <a:bodyPr wrap="none"/>
+                    <a:lstStyle/>
+                    <a:p>
+                      <a:pPr>
+                        <a:lnSpc>
+                          <a:spcPts val="1600"/>
+                        </a:lnSpc>
+                        <a:spcAft>
+                          <a:spcPts val="0"/>
+                        </a:spcAft>
+                        <a:defRPr sz="1200" b="0">
+                          <a:solidFill>
+                            <a:srgbClr val="21243A"/>
+                          </a:solidFill>
+                          <a:latin typeface="Arial"/>
+                        </a:defRPr>
+                      </a:pPr>
+                      <a:r>
+                        <a:t>inconclusive</a:t>
+                      </a:r>
+                    </a:p>
+                  </a:txBody>
+                  <a:tcPr marL="82296" marR="82296" marT="64008" marB="64008">
+                    <a:solidFill>
+                      <a:srgbClr val="FFFFFF"/>
+                    </a:solidFill>
+                  </a:tcPr>
+                </a:tc>
+              </a:tr>
+            </a:tbl>
+          </a:graphicData>
+        </a:graphic>
+      </p:graphicFrame>
+      <p:graphicFrame>
+        <p:nvGraphicFramePr>
+          <p:cNvPr id="11" name="Table 10"/>
+          <p:cNvGraphicFramePr>
+            <a:graphicFrameLocks noGrp="1"/>
+          </p:cNvGraphicFramePr>
+          <p:nvPr/>
+        </p:nvGraphicFramePr>
+        <p:xfrm>
+          <a:off x="365760" y="3098800"/>
+          <a:ext cx="8412479" cy="349504"/>
+        </p:xfrm>
+        <a:graphic>
+          <a:graphicData uri="http://schemas.openxmlformats.org/drawingml/2006/table">
+            <a:tbl>
+              <a:tblPr firstRow="1" bandRow="1">
+                <a:tableStyleId>{5C22544A-7EE6-4342-B048-85BDC9FD1C3A}</a:tableStyleId>
+              </a:tblPr>
+              <a:tblGrid>
+                <a:gridCol w="2271369"/>
+                <a:gridCol w="6141110"/>
+              </a:tblGrid>
+              <a:tr h="349504">
+                <a:tc>
+                  <a:txBody>
+                    <a:bodyPr wrap="none"/>
+                    <a:lstStyle/>
+                    <a:p>
+                      <a:pPr>
+                        <a:lnSpc>
+                          <a:spcPts val="1600"/>
+                        </a:lnSpc>
+                        <a:spcAft>
+                          <a:spcPts val="0"/>
+                        </a:spcAft>
+                        <a:defRPr sz="1200" b="0">
+                          <a:solidFill>
+                            <a:srgbClr val="21243A"/>
+                          </a:solidFill>
+                          <a:latin typeface="Arial"/>
+                        </a:defRPr>
+                      </a:pPr>
+                      <a:r>
+                        <a:t>Confidence</a:t>
+                      </a:r>
+                    </a:p>
+                  </a:txBody>
+                  <a:tcPr marL="82296" marR="82296" marT="64008" marB="64008">
+                    <a:solidFill>
+                      <a:srgbClr val="F1F7F7"/>
+                    </a:solidFill>
+                  </a:tcPr>
+                </a:tc>
+                <a:tc>
+                  <a:txBody>
+                    <a:bodyPr wrap="none"/>
+                    <a:lstStyle/>
+                    <a:p>
+                      <a:pPr>
+                        <a:lnSpc>
+                          <a:spcPts val="1600"/>
+                        </a:lnSpc>
+                        <a:spcAft>
+                          <a:spcPts val="0"/>
+                        </a:spcAft>
+                        <a:defRPr sz="1200" b="0">
+                          <a:solidFill>
+                            <a:srgbClr val="21243A"/>
+                          </a:solidFill>
+                          <a:latin typeface="Arial"/>
+                        </a:defRPr>
+                      </a:pPr>
+                      <a:r>
+                        <a:t>Not recorded</a:t>
+                      </a:r>
+                    </a:p>
+                  </a:txBody>
+                  <a:tcPr marL="82296" marR="82296" marT="64008" marB="64008">
+                    <a:solidFill>
+                      <a:srgbClr val="F1F7F7"/>
+                    </a:solidFill>
+                  </a:tcPr>
+                </a:tc>
+              </a:tr>
+            </a:tbl>
+          </a:graphicData>
+        </a:graphic>
+      </p:graphicFrame>
+      <p:graphicFrame>
+        <p:nvGraphicFramePr>
+          <p:cNvPr id="12" name="Table 11"/>
+          <p:cNvGraphicFramePr>
+            <a:graphicFrameLocks noGrp="1"/>
+          </p:cNvGraphicFramePr>
+          <p:nvPr/>
+        </p:nvGraphicFramePr>
+        <p:xfrm>
+          <a:off x="365760" y="3448304"/>
+          <a:ext cx="8412479" cy="349504"/>
+        </p:xfrm>
+        <a:graphic>
+          <a:graphicData uri="http://schemas.openxmlformats.org/drawingml/2006/table">
+            <a:tbl>
+              <a:tblPr firstRow="1" bandRow="1">
+                <a:tableStyleId>{5C22544A-7EE6-4342-B048-85BDC9FD1C3A}</a:tableStyleId>
+              </a:tblPr>
+              <a:tblGrid>
+                <a:gridCol w="2271369"/>
+                <a:gridCol w="6141110"/>
+              </a:tblGrid>
+              <a:tr h="349504">
+                <a:tc>
+                  <a:txBody>
+                    <a:bodyPr wrap="none"/>
+                    <a:lstStyle/>
+                    <a:p>
+                      <a:pPr>
+                        <a:lnSpc>
+                          <a:spcPts val="1600"/>
+                        </a:lnSpc>
+                        <a:spcAft>
+                          <a:spcPts val="0"/>
+                        </a:spcAft>
+                        <a:defRPr sz="1200" b="0">
+                          <a:solidFill>
+                            <a:srgbClr val="21243A"/>
+                          </a:solidFill>
+                          <a:latin typeface="Arial"/>
+                        </a:defRPr>
+                      </a:pPr>
+                      <a:r>
+                        <a:t>Role in assessment</a:t>
+                      </a:r>
+                    </a:p>
+                  </a:txBody>
+                  <a:tcPr marL="82296" marR="82296" marT="64008" marB="64008">
+                    <a:solidFill>
+                      <a:srgbClr val="FFFFFF"/>
+                    </a:solidFill>
+                  </a:tcPr>
+                </a:tc>
+                <a:tc>
+                  <a:txBody>
+                    <a:bodyPr wrap="none"/>
+                    <a:lstStyle/>
+                    <a:p>
+                      <a:pPr>
+                        <a:lnSpc>
+                          <a:spcPts val="1600"/>
+                        </a:lnSpc>
+                        <a:spcAft>
+                          <a:spcPts val="0"/>
+                        </a:spcAft>
+                        <a:defRPr sz="1200" b="0">
+                          <a:solidFill>
+                            <a:srgbClr val="21243A"/>
+                          </a:solidFill>
+                          <a:latin typeface="Arial"/>
+                        </a:defRPr>
+                      </a:pPr>
+                      <a:r>
+                        <a:t>Additional finding</a:t>
+                      </a:r>
+                    </a:p>
+                  </a:txBody>
+                  <a:tcPr marL="82296" marR="82296" marT="64008" marB="64008">
+                    <a:solidFill>
+                      <a:srgbClr val="FFFFFF"/>
+                    </a:solidFill>
+                  </a:tcPr>
+                </a:tc>
+              </a:tr>
+            </a:tbl>
+          </a:graphicData>
+        </a:graphic>
+      </p:graphicFrame>
+      <p:graphicFrame>
+        <p:nvGraphicFramePr>
+          <p:cNvPr id="13" name="Table 12"/>
+          <p:cNvGraphicFramePr>
+            <a:graphicFrameLocks noGrp="1"/>
+          </p:cNvGraphicFramePr>
+          <p:nvPr/>
+        </p:nvGraphicFramePr>
+        <p:xfrm>
+          <a:off x="365760" y="3797808"/>
+          <a:ext cx="8412479" cy="349504"/>
+        </p:xfrm>
+        <a:graphic>
+          <a:graphicData uri="http://schemas.openxmlformats.org/drawingml/2006/table">
+            <a:tbl>
+              <a:tblPr firstRow="1" bandRow="1">
+                <a:tableStyleId>{5C22544A-7EE6-4342-B048-85BDC9FD1C3A}</a:tableStyleId>
+              </a:tblPr>
+              <a:tblGrid>
+                <a:gridCol w="2271369"/>
+                <a:gridCol w="6141110"/>
+              </a:tblGrid>
+              <a:tr h="349504">
+                <a:tc>
+                  <a:txBody>
+                    <a:bodyPr wrap="none"/>
+                    <a:lstStyle/>
+                    <a:p>
+                      <a:pPr>
+                        <a:lnSpc>
+                          <a:spcPts val="1600"/>
+                        </a:lnSpc>
+                        <a:spcAft>
+                          <a:spcPts val="0"/>
+                        </a:spcAft>
+                        <a:defRPr sz="1200" b="0">
+                          <a:solidFill>
+                            <a:srgbClr val="21243A"/>
+                          </a:solidFill>
+                          <a:latin typeface="Arial"/>
+                        </a:defRPr>
+                      </a:pPr>
+                      <a:r>
+                        <a:t>Provider summary</a:t>
+                      </a:r>
+                    </a:p>
+                  </a:txBody>
+                  <a:tcPr marL="82296" marR="82296" marT="64008" marB="64008">
+                    <a:solidFill>
+                      <a:srgbClr val="F1F7F7"/>
+                    </a:solidFill>
+                  </a:tcPr>
+                </a:tc>
+                <a:tc>
+                  <a:txBody>
+                    <a:bodyPr wrap="none"/>
+                    <a:lstStyle/>
+                    <a:p>
+                      <a:pPr>
+                        <a:lnSpc>
+                          <a:spcPts val="1600"/>
+                        </a:lnSpc>
+                        <a:spcAft>
+                          <a:spcPts val="0"/>
+                        </a:spcAft>
+                        <a:defRPr sz="1200" b="0">
+                          <a:solidFill>
+                            <a:srgbClr val="21243A"/>
+                          </a:solidFill>
+                          <a:latin typeface="Arial"/>
+                        </a:defRPr>
+                      </a:pPr>
+                      <a:r>
                         <a:t>Embedded credentials: none found. Origin remains unresolved by this check.</a:t>
+                      </a:r>
+                    </a:p>
+                  </a:txBody>
+                  <a:tcPr marL="82296" marR="82296" marT="64008" marB="64008">
+                    <a:solidFill>
+                      <a:srgbClr val="F1F7F7"/>
+                    </a:solidFill>
+                  </a:tcPr>
+                </a:tc>
+              </a:tr>
+            </a:tbl>
+          </a:graphicData>
+        </a:graphic>
+      </p:graphicFrame>
+      <p:graphicFrame>
+        <p:nvGraphicFramePr>
+          <p:cNvPr id="14" name="Table 13"/>
+          <p:cNvGraphicFramePr>
+            <a:graphicFrameLocks noGrp="1"/>
+          </p:cNvGraphicFramePr>
+          <p:nvPr/>
+        </p:nvGraphicFramePr>
+        <p:xfrm>
+          <a:off x="365760" y="4147312"/>
+          <a:ext cx="8412479" cy="552704"/>
+        </p:xfrm>
+        <a:graphic>
+          <a:graphicData uri="http://schemas.openxmlformats.org/drawingml/2006/table">
+            <a:tbl>
+              <a:tblPr firstRow="1" bandRow="1">
+                <a:tableStyleId>{5C22544A-7EE6-4342-B048-85BDC9FD1C3A}</a:tableStyleId>
+              </a:tblPr>
+              <a:tblGrid>
+                <a:gridCol w="2271369"/>
+                <a:gridCol w="6141110"/>
+              </a:tblGrid>
+              <a:tr h="552704">
+                <a:tc>
+                  <a:txBody>
+                    <a:bodyPr wrap="none"/>
+                    <a:lstStyle/>
+                    <a:p>
+                      <a:pPr>
+                        <a:lnSpc>
+                          <a:spcPts val="1600"/>
+                        </a:lnSpc>
+                        <a:spcAft>
+                          <a:spcPts val="0"/>
+                        </a:spcAft>
+                        <a:defRPr sz="1200" b="0">
+                          <a:solidFill>
+                            <a:srgbClr val="21243A"/>
+                          </a:solidFill>
+                          <a:latin typeface="Arial"/>
+                        </a:defRPr>
+                      </a:pPr>
+                      <a:r>
+                        <a:t>Evidence 1</a:t>
+                      </a:r>
+                    </a:p>
+                  </a:txBody>
+                  <a:tcPr marL="82296" marR="82296" marT="64008" marB="64008">
+                    <a:solidFill>
+                      <a:srgbClr val="FFFFFF"/>
+                    </a:solidFill>
+                  </a:tcPr>
+                </a:tc>
+                <a:tc>
+                  <a:txBody>
+                    <a:bodyPr wrap="none"/>
+                    <a:lstStyle/>
+                    <a:p>
+                      <a:pPr>
+                        <a:lnSpc>
+                          <a:spcPts val="1600"/>
+                        </a:lnSpc>
+                        <a:spcAft>
+                          <a:spcPts val="0"/>
+                        </a:spcAft>
+                        <a:defRPr sz="1200" b="0">
+                          <a:solidFill>
+                            <a:srgbClr val="21243A"/>
+                          </a:solidFill>
+                          <a:latin typeface="Arial"/>
+                        </a:defRPr>
+                      </a:pPr>
+                      <a:r>
+                        <a:t>Coverage: credentials embedded in the submitted file. External credentials were</a:t>
+                      </a:r>
+                    </a:p>
+                    <a:p>
+                      <a:pPr>
+                        <a:lnSpc>
+                          <a:spcPts val="1600"/>
+                        </a:lnSpc>
+                        <a:spcAft>
+                          <a:spcPts val="0"/>
+                        </a:spcAft>
+                        <a:defRPr sz="1200" b="0">
+                          <a:solidFill>
+                            <a:srgbClr val="21243A"/>
+                          </a:solidFill>
+                          <a:latin typeface="Arial"/>
+                        </a:defRPr>
+                      </a:pPr>
+                      <a:r>
+                        <a:t>not retrieved.</a:t>
+                      </a:r>
+                    </a:p>
+                  </a:txBody>
+                  <a:tcPr marL="82296" marR="82296" marT="64008" marB="64008">
+                    <a:solidFill>
+                      <a:srgbClr val="FFFFFF"/>
+                    </a:solidFill>
+                  </a:tcPr>
+                </a:tc>
+              </a:tr>
+            </a:tbl>
+          </a:graphicData>
+        </a:graphic>
+      </p:graphicFrame>
+      <p:graphicFrame>
+        <p:nvGraphicFramePr>
+          <p:cNvPr id="15" name="Table 14"/>
+          <p:cNvGraphicFramePr>
+            <a:graphicFrameLocks noGrp="1"/>
+          </p:cNvGraphicFramePr>
+          <p:nvPr/>
+        </p:nvGraphicFramePr>
+        <p:xfrm>
+          <a:off x="365760" y="4700016"/>
+          <a:ext cx="8412479" cy="552704"/>
+        </p:xfrm>
+        <a:graphic>
+          <a:graphicData uri="http://schemas.openxmlformats.org/drawingml/2006/table">
+            <a:tbl>
+              <a:tblPr firstRow="1" bandRow="1">
+                <a:tableStyleId>{5C22544A-7EE6-4342-B048-85BDC9FD1C3A}</a:tableStyleId>
+              </a:tblPr>
+              <a:tblGrid>
+                <a:gridCol w="2271369"/>
+                <a:gridCol w="6141110"/>
+              </a:tblGrid>
+              <a:tr h="552704">
+                <a:tc>
+                  <a:txBody>
+                    <a:bodyPr wrap="none"/>
+                    <a:lstStyle/>
+                    <a:p>
+                      <a:pPr>
+                        <a:lnSpc>
+                          <a:spcPts val="1600"/>
+                        </a:lnSpc>
+                        <a:spcAft>
+                          <a:spcPts val="0"/>
+                        </a:spcAft>
+                        <a:defRPr sz="1200" b="0">
+                          <a:solidFill>
+                            <a:srgbClr val="21243A"/>
+                          </a:solidFill>
+                          <a:latin typeface="Arial"/>
+                        </a:defRPr>
+                      </a:pPr>
+                      <a:r>
+                        <a:t>Evidence 2</a:t>
+                      </a:r>
+                    </a:p>
+                  </a:txBody>
+                  <a:tcPr marL="82296" marR="82296" marT="64008" marB="64008">
+                    <a:solidFill>
+                      <a:srgbClr val="F1F7F7"/>
+                    </a:solidFill>
+                  </a:tcPr>
+                </a:tc>
+                <a:tc>
+                  <a:txBody>
+                    <a:bodyPr wrap="none"/>
+                    <a:lstStyle/>
+                    <a:p>
+                      <a:pPr>
+                        <a:lnSpc>
+                          <a:spcPts val="1600"/>
+                        </a:lnSpc>
+                        <a:spcAft>
+                          <a:spcPts val="0"/>
+                        </a:spcAft>
+                        <a:defRPr sz="1200" b="0">
+                          <a:solidFill>
+                            <a:srgbClr val="21243A"/>
+                          </a:solidFill>
+                          <a:latin typeface="Arial"/>
+                        </a:defRPr>
+                      </a:pPr>
+                      <a:r>
+                        <a:t>Verifier: c2pa-python 0.37.12; native SDK 0.91.0; specification target 2.4; policy</a:t>
+                      </a:r>
+                    </a:p>
+                    <a:p>
+                      <a:pPr>
+                        <a:lnSpc>
+                          <a:spcPts val="1600"/>
+                        </a:lnSpc>
+                        <a:spcAft>
+                          <a:spcPts val="0"/>
+                        </a:spcAft>
+                        <a:defRPr sz="1200" b="0">
+                          <a:solidFill>
+                            <a:srgbClr val="21243A"/>
+                          </a:solidFill>
+                          <a:latin typeface="Arial"/>
+                        </a:defRPr>
+                      </a:pPr>
+                      <a:r>
+                        <a:t>embedded-offline-reviewed-trust-v3.</a:t>
+                      </a:r>
+                    </a:p>
+                  </a:txBody>
+                  <a:tcPr marL="82296" marR="82296" marT="64008" marB="64008">
+                    <a:solidFill>
+                      <a:srgbClr val="F1F7F7"/>
+                    </a:solidFill>
+                  </a:tcPr>
+                </a:tc>
+              </a:tr>
+            </a:tbl>
+          </a:graphicData>
+        </a:graphic>
+      </p:graphicFrame>
+      <p:graphicFrame>
+        <p:nvGraphicFramePr>
+          <p:cNvPr id="16" name="Table 15"/>
+          <p:cNvGraphicFramePr>
+            <a:graphicFrameLocks noGrp="1"/>
+          </p:cNvGraphicFramePr>
+          <p:nvPr/>
+        </p:nvGraphicFramePr>
+        <p:xfrm>
+          <a:off x="365760" y="5252720"/>
+          <a:ext cx="8412479" cy="552704"/>
+        </p:xfrm>
+        <a:graphic>
+          <a:graphicData uri="http://schemas.openxmlformats.org/drawingml/2006/table">
+            <a:tbl>
+              <a:tblPr firstRow="1" bandRow="1">
+                <a:tableStyleId>{5C22544A-7EE6-4342-B048-85BDC9FD1C3A}</a:tableStyleId>
+              </a:tblPr>
+              <a:tblGrid>
+                <a:gridCol w="2271369"/>
+                <a:gridCol w="6141110"/>
+              </a:tblGrid>
+              <a:tr h="552704">
+                <a:tc>
+                  <a:txBody>
+                    <a:bodyPr wrap="none"/>
+                    <a:lstStyle/>
+                    <a:p>
+                      <a:pPr>
+                        <a:lnSpc>
+                          <a:spcPts val="1600"/>
+                        </a:lnSpc>
+                        <a:spcAft>
+                          <a:spcPts val="0"/>
+                        </a:spcAft>
+                        <a:defRPr sz="1200" b="0">
+                          <a:solidFill>
+                            <a:srgbClr val="21243A"/>
+                          </a:solidFill>
+                          <a:latin typeface="Arial"/>
+                        </a:defRPr>
+                      </a:pPr>
+                      <a:r>
+                        <a:t>Evidence 3</a:t>
+                      </a:r>
+                    </a:p>
+                  </a:txBody>
+                  <a:tcPr marL="82296" marR="82296" marT="64008" marB="64008">
+                    <a:solidFill>
+                      <a:srgbClr val="FFFFFF"/>
+                    </a:solidFill>
+                  </a:tcPr>
+                </a:tc>
+                <a:tc>
+                  <a:txBody>
+                    <a:bodyPr wrap="none"/>
+                    <a:lstStyle/>
+                    <a:p>
+                      <a:pPr>
+                        <a:lnSpc>
+                          <a:spcPts val="1600"/>
+                        </a:lnSpc>
+                        <a:spcAft>
+                          <a:spcPts val="0"/>
+                        </a:spcAft>
+                        <a:defRPr sz="1200" b="0">
+                          <a:solidFill>
+                            <a:srgbClr val="21243A"/>
+                          </a:solidFill>
+                          <a:latin typeface="Arial"/>
+                        </a:defRPr>
+                      </a:pPr>
+                      <a:r>
+                        <a:t>Offline embedded-manifest verification; no network trust-list, manifest or</a:t>
+                      </a:r>
+                    </a:p>
+                    <a:p>
+                      <a:pPr>
+                        <a:lnSpc>
+                          <a:spcPts val="1600"/>
+                        </a:lnSpc>
+                        <a:spcAft>
+                          <a:spcPts val="0"/>
+                        </a:spcAft>
+                        <a:defRPr sz="1200" b="0">
+                          <a:solidFill>
+                            <a:srgbClr val="21243A"/>
+                          </a:solidFill>
+                          <a:latin typeface="Arial"/>
+                        </a:defRPr>
+                      </a:pPr>
+                      <a:r>
+                        <a:t>revocation refresh.</a:t>
                       </a:r>
                     </a:p>
                   </a:txBody>
@@ -6124,7 +7779,7 @@
               </a:defRPr>
             </a:pPr>
             <a:r>
-              <a:t>How this assessment was reached</a:t>
+              <a:t>Content Credentials / provenance (continued)</a:t>
             </a:r>
           </a:p>
         </p:txBody>
@@ -6344,7 +7999,7 @@
                         </a:defRPr>
                       </a:pPr>
                       <a:r>
-                        <a:t>1. override</a:t>
+                        <a:t>Evidence 4</a:t>
                       </a:r>
                     </a:p>
                   </a:txBody>
@@ -6374,221 +8029,26 @@
                         </a:defRPr>
                       </a:pPr>
                       <a:r>
-                        <a:t>outcome=none; detail=No confirmed C2PA AI assertion or SynthID watermark.</a:t>
-                      </a:r>
-                    </a:p>
-                    <a:p>
-                      <a:pPr>
-                        <a:lnSpc>
-                          <a:spcPts val="1600"/>
-                        </a:lnSpc>
-                        <a:spcAft>
-                          <a:spcPts val="0"/>
-                        </a:spcAft>
-                        <a:defRPr sz="1200" b="0">
-                          <a:solidFill>
-                            <a:srgbClr val="21243A"/>
-                          </a:solidFill>
-                          <a:latin typeface="Arial"/>
-                        </a:defRPr>
-                      </a:pPr>
-                      <a:r>
-                        <a:t>Origin remains unresolved by these checks.</a:t>
-                      </a:r>
-                    </a:p>
-                  </a:txBody>
-                  <a:tcPr marL="82296" marR="82296" marT="64008" marB="64008">
-                    <a:solidFill>
-                      <a:srgbClr val="F1F7F7"/>
-                    </a:solidFill>
-                  </a:tcPr>
-                </a:tc>
-              </a:tr>
-            </a:tbl>
-          </a:graphicData>
-        </a:graphic>
-      </p:graphicFrame>
-      <p:graphicFrame>
-        <p:nvGraphicFramePr>
-          <p:cNvPr id="8" name="Table 7"/>
-          <p:cNvGraphicFramePr>
-            <a:graphicFrameLocks noGrp="1"/>
-          </p:cNvGraphicFramePr>
-          <p:nvPr/>
-        </p:nvGraphicFramePr>
-        <p:xfrm>
-          <a:off x="365760" y="2253488"/>
-          <a:ext cx="8412479" cy="349504"/>
-        </p:xfrm>
-        <a:graphic>
-          <a:graphicData uri="http://schemas.openxmlformats.org/drawingml/2006/table">
-            <a:tbl>
-              <a:tblPr firstRow="1" bandRow="1">
-                <a:tableStyleId>{5C22544A-7EE6-4342-B048-85BDC9FD1C3A}</a:tableStyleId>
-              </a:tblPr>
-              <a:tblGrid>
-                <a:gridCol w="2271369"/>
-                <a:gridCol w="6141110"/>
-              </a:tblGrid>
-              <a:tr h="349504">
-                <a:tc>
-                  <a:txBody>
-                    <a:bodyPr wrap="none"/>
-                    <a:lstStyle/>
-                    <a:p>
-                      <a:pPr>
-                        <a:lnSpc>
-                          <a:spcPts val="1600"/>
-                        </a:lnSpc>
-                        <a:spcAft>
-                          <a:spcPts val="0"/>
-                        </a:spcAft>
-                        <a:defRPr sz="1200" b="0">
-                          <a:solidFill>
-                            <a:srgbClr val="21243A"/>
-                          </a:solidFill>
-                          <a:latin typeface="Arial"/>
-                        </a:defRPr>
-                      </a:pPr>
-                      <a:r>
-                        <a:t>2. model_agreement</a:t>
-                      </a:r>
-                    </a:p>
-                  </a:txBody>
-                  <a:tcPr marL="82296" marR="82296" marT="64008" marB="64008">
-                    <a:solidFill>
-                      <a:srgbClr val="FFFFFF"/>
-                    </a:solidFill>
-                  </a:tcPr>
-                </a:tc>
-                <a:tc>
-                  <a:txBody>
-                    <a:bodyPr wrap="none"/>
-                    <a:lstStyle/>
-                    <a:p>
-                      <a:pPr>
-                        <a:lnSpc>
-                          <a:spcPts val="1600"/>
-                        </a:lnSpc>
-                        <a:spcAft>
-                          <a:spcPts val="0"/>
-                        </a:spcAft>
-                        <a:defRPr sz="1200" b="0">
-                          <a:solidFill>
-                            <a:srgbClr val="21243A"/>
-                          </a:solidFill>
-                          <a:latin typeface="Arial"/>
-                        </a:defRPr>
-                      </a:pPr>
-                      <a:r>
-                        <a:t>synthetic=[]; authentic=[]; uncertain=[]; forensic_supports_synthetic=False</a:t>
-                      </a:r>
-                    </a:p>
-                  </a:txBody>
-                  <a:tcPr marL="82296" marR="82296" marT="64008" marB="64008">
-                    <a:solidFill>
-                      <a:srgbClr val="FFFFFF"/>
-                    </a:solidFill>
-                  </a:tcPr>
-                </a:tc>
-              </a:tr>
-            </a:tbl>
-          </a:graphicData>
-        </a:graphic>
-      </p:graphicFrame>
-      <p:graphicFrame>
-        <p:nvGraphicFramePr>
-          <p:cNvPr id="9" name="Table 8"/>
-          <p:cNvGraphicFramePr>
-            <a:graphicFrameLocks noGrp="1"/>
-          </p:cNvGraphicFramePr>
-          <p:nvPr/>
-        </p:nvGraphicFramePr>
-        <p:xfrm>
-          <a:off x="365760" y="2602992"/>
-          <a:ext cx="8412479" cy="552704"/>
-        </p:xfrm>
-        <a:graphic>
-          <a:graphicData uri="http://schemas.openxmlformats.org/drawingml/2006/table">
-            <a:tbl>
-              <a:tblPr firstRow="1" bandRow="1">
-                <a:tableStyleId>{5C22544A-7EE6-4342-B048-85BDC9FD1C3A}</a:tableStyleId>
-              </a:tblPr>
-              <a:tblGrid>
-                <a:gridCol w="2271369"/>
-                <a:gridCol w="6141110"/>
-              </a:tblGrid>
-              <a:tr h="552704">
-                <a:tc>
-                  <a:txBody>
-                    <a:bodyPr wrap="none"/>
-                    <a:lstStyle/>
-                    <a:p>
-                      <a:pPr>
-                        <a:lnSpc>
-                          <a:spcPts val="1600"/>
-                        </a:lnSpc>
-                        <a:spcAft>
-                          <a:spcPts val="0"/>
-                        </a:spcAft>
-                        <a:defRPr sz="1200" b="0">
-                          <a:solidFill>
-                            <a:srgbClr val="21243A"/>
-                          </a:solidFill>
-                          <a:latin typeface="Arial"/>
-                        </a:defRPr>
-                      </a:pPr>
-                      <a:r>
-                        <a:t>3. verdict</a:t>
-                      </a:r>
-                    </a:p>
-                  </a:txBody>
-                  <a:tcPr marL="82296" marR="82296" marT="64008" marB="64008">
-                    <a:solidFill>
-                      <a:srgbClr val="F1F7F7"/>
-                    </a:solidFill>
-                  </a:tcPr>
-                </a:tc>
-                <a:tc>
-                  <a:txBody>
-                    <a:bodyPr wrap="none"/>
-                    <a:lstStyle/>
-                    <a:p>
-                      <a:pPr>
-                        <a:lnSpc>
-                          <a:spcPts val="1600"/>
-                        </a:lnSpc>
-                        <a:spcAft>
-                          <a:spcPts val="0"/>
-                        </a:spcAft>
-                        <a:defRPr sz="1200" b="0">
-                          <a:solidFill>
-                            <a:srgbClr val="21243A"/>
-                          </a:solidFill>
-                          <a:latin typeface="Arial"/>
-                        </a:defRPr>
-                      </a:pPr>
-                      <a:r>
-                        <a:t>value=inconclusive; confidence=low; reason=No vision model returned a usable</a:t>
-                      </a:r>
-                    </a:p>
-                    <a:p>
-                      <a:pPr>
-                        <a:lnSpc>
-                          <a:spcPts val="1600"/>
-                        </a:lnSpc>
-                        <a:spcAft>
-                          <a:spcPts val="0"/>
-                        </a:spcAft>
-                        <a:defRPr sz="1200" b="0">
-                          <a:solidFill>
-                            <a:srgbClr val="21243A"/>
-                          </a:solidFill>
-                          <a:latin typeface="Arial"/>
-                        </a:defRPr>
-                      </a:pPr>
-                      <a:r>
-                        <a:t>result. Check provider status in the table.</a:t>
+                        <a:t>No reviewed local C2PA trust snapshot installed. Provenance overrides are</a:t>
+                      </a:r>
+                    </a:p>
+                    <a:p>
+                      <a:pPr>
+                        <a:lnSpc>
+                          <a:spcPts val="1600"/>
+                        </a:lnSpc>
+                        <a:spcAft>
+                          <a:spcPts val="0"/>
+                        </a:spcAft>
+                        <a:defRPr sz="1200" b="0">
+                          <a:solidFill>
+                            <a:srgbClr val="21243A"/>
+                          </a:solidFill>
+                          <a:latin typeface="Arial"/>
+                        </a:defRPr>
+                      </a:pPr>
+                      <a:r>
+                        <a:t>disabled.</a:t>
                       </a:r>
                     </a:p>
                   </a:txBody>
@@ -6700,7 +8160,7 @@
               </a:defRPr>
             </a:pPr>
             <a:r>
-              <a:t>File and analysis record</a:t>
+              <a:t>Provider evidence / 5</a:t>
             </a:r>
           </a:p>
         </p:txBody>
@@ -6920,7 +8380,7 @@
                         </a:defRPr>
                       </a:pPr>
                       <a:r>
-                        <a:t>File</a:t>
+                        <a:t>Provider</a:t>
                       </a:r>
                     </a:p>
                   </a:txBody>
@@ -6950,7 +8410,7 @@
                         </a:defRPr>
                       </a:pPr>
                       <a:r>
-                        <a:t>journal-image.png</a:t>
+                        <a:t>Local forensic cues</a:t>
                       </a:r>
                     </a:p>
                   </a:txBody>
@@ -7008,7 +8468,7 @@
                         </a:defRPr>
                       </a:pPr>
                       <a:r>
-                        <a:t>Analysis ID</a:t>
+                        <a:t>Model</a:t>
                       </a:r>
                     </a:p>
                   </a:txBody>
@@ -7038,7 +8498,7 @@
                         </a:defRPr>
                       </a:pPr>
                       <a:r>
-                        <a:t>a275a269-8b2c-4442-bbd7-d03ff4ee7c91</a:t>
+                        <a:t>Not recorded</a:t>
                       </a:r>
                     </a:p>
                   </a:txBody>
@@ -7096,7 +8556,7 @@
                         </a:defRPr>
                       </a:pPr>
                       <a:r>
-                        <a:t>Generated</a:t>
+                        <a:t>Status</a:t>
                       </a:r>
                     </a:p>
                   </a:txBody>
@@ -7126,7 +8586,7 @@
                         </a:defRPr>
                       </a:pPr>
                       <a:r>
-                        <a:t>2026-09-26T18:37:47+00:00</a:t>
+                        <a:t>ok</a:t>
                       </a:r>
                     </a:p>
                   </a:txBody>
@@ -7184,7 +8644,7 @@
                         </a:defRPr>
                       </a:pPr>
                       <a:r>
-                        <a:t>Tool</a:t>
+                        <a:t>Assessment</a:t>
                       </a:r>
                     </a:p>
                   </a:txBody>
@@ -7214,7 +8674,7 @@
                         </a:defRPr>
                       </a:pPr>
                       <a:r>
-                        <a:t>SDA Vision 0.1.0</a:t>
+                        <a:t>partially synthetic</a:t>
                       </a:r>
                     </a:p>
                   </a:txBody>
@@ -7272,7 +8732,7 @@
                         </a:defRPr>
                       </a:pPr>
                       <a:r>
-                        <a:t>Models</a:t>
+                        <a:t>Confidence</a:t>
                       </a:r>
                     </a:p>
                   </a:txBody>
@@ -7302,7 +8762,7 @@
                         </a:defRPr>
                       </a:pPr>
                       <a:r>
-                        <a:t>Not recorded</a:t>
+                        <a:t>low</a:t>
                       </a:r>
                     </a:p>
                   </a:txBody>
@@ -7360,7 +8820,7 @@
                         </a:defRPr>
                       </a:pPr>
                       <a:r>
-                        <a:t>Method version</a:t>
+                        <a:t>Role in assessment</a:t>
                       </a:r>
                     </a:p>
                   </a:txBody>
@@ -7390,7 +8850,7 @@
                         </a:defRPr>
                       </a:pPr>
                       <a:r>
-                        <a:t>verdict-consistency-2026-09-26.1</a:t>
+                        <a:t>Additional finding</a:t>
                       </a:r>
                     </a:p>
                   </a:txBody>
@@ -7448,7 +8908,7 @@
                         </a:defRPr>
                       </a:pPr>
                       <a:r>
-                        <a:t>Analysis lens</a:t>
+                        <a:t>Provider summary</a:t>
                       </a:r>
                     </a:p>
                   </a:txBody>
@@ -7478,7 +8938,7 @@
                         </a:defRPr>
                       </a:pPr>
                       <a:r>
-                        <a:t>general</a:t>
+                        <a:t>Heuristic synthetic likelihood 41/100 from metadata + pixel statistics.</a:t>
                       </a:r>
                     </a:p>
                   </a:txBody>
@@ -7536,7 +8996,7 @@
                         </a:defRPr>
                       </a:pPr>
                       <a:r>
-                        <a:t>Original SHA-256</a:t>
+                        <a:t>Evidence 1</a:t>
                       </a:r>
                     </a:p>
                   </a:txBody>
@@ -7566,7 +9026,7 @@
                         </a:defRPr>
                       </a:pPr>
                       <a:r>
-                        <a:t>b11aa1e8c5c17a9496d362987bd4bf0c00a83bccd3a4a704f0f6ab7a7cf6fc8d</a:t>
+                        <a:t>No camera EXIF (common in AI exports, screenshots, and re-saves).</a:t>
                       </a:r>
                     </a:p>
                   </a:txBody>
@@ -7591,7 +9051,7 @@
         </p:nvGraphicFramePr>
         <p:xfrm>
           <a:off x="365760" y="4496816"/>
-          <a:ext cx="8412479" cy="755904"/>
+          <a:ext cx="8412479" cy="349504"/>
         </p:xfrm>
         <a:graphic>
           <a:graphicData uri="http://schemas.openxmlformats.org/drawingml/2006/table">
@@ -7603,28 +9063,28 @@
                 <a:gridCol w="2271369"/>
                 <a:gridCol w="6141110"/>
               </a:tblGrid>
-              <a:tr h="755904">
-                <a:tc>
-                  <a:txBody>
-                    <a:bodyPr wrap="none"/>
-                    <a:lstStyle/>
-                    <a:p>
-                      <a:pPr>
-                        <a:lnSpc>
-                          <a:spcPts val="1600"/>
-                        </a:lnSpc>
-                        <a:spcAft>
-                          <a:spcPts val="0"/>
-                        </a:spcAft>
-                        <a:defRPr sz="1200" b="0">
-                          <a:solidFill>
-                            <a:srgbClr val="21243A"/>
-                          </a:solidFill>
-                          <a:latin typeface="Arial"/>
-                        </a:defRPr>
-                      </a:pPr>
-                      <a:r>
-                        <a:t>Ingestion note 1</a:t>
+              <a:tr h="349504">
+                <a:tc>
+                  <a:txBody>
+                    <a:bodyPr wrap="none"/>
+                    <a:lstStyle/>
+                    <a:p>
+                      <a:pPr>
+                        <a:lnSpc>
+                          <a:spcPts val="1600"/>
+                        </a:lnSpc>
+                        <a:spcAft>
+                          <a:spcPts val="0"/>
+                        </a:spcAft>
+                        <a:defRPr sz="1200" b="0">
+                          <a:solidFill>
+                            <a:srgbClr val="21243A"/>
+                          </a:solidFill>
+                          <a:latin typeface="Arial"/>
+                        </a:defRPr>
+                      </a:pPr>
+                      <a:r>
+                        <a:t>Evidence 2</a:t>
                       </a:r>
                     </a:p>
                   </a:txBody>
@@ -7654,45 +9114,7 @@
                         </a:defRPr>
                       </a:pPr>
                       <a:r>
-                        <a:t>Local checks only. LLM visual checks have not been run for this example; no</a:t>
-                      </a:r>
-                    </a:p>
-                    <a:p>
-                      <a:pPr>
-                        <a:lnSpc>
-                          <a:spcPts val="1600"/>
-                        </a:lnSpc>
-                        <a:spcAft>
-                          <a:spcPts val="0"/>
-                        </a:spcAft>
-                        <a:defRPr sz="1200" b="0">
-                          <a:solidFill>
-                            <a:srgbClr val="21243A"/>
-                          </a:solidFill>
-                          <a:latin typeface="Arial"/>
-                        </a:defRPr>
-                      </a:pPr>
-                      <a:r>
-                        <a:t>provider requests or fees. An Inconclusive combined result here reflects</a:t>
-                      </a:r>
-                    </a:p>
-                    <a:p>
-                      <a:pPr>
-                        <a:lnSpc>
-                          <a:spcPts val="1600"/>
-                        </a:lnSpc>
-                        <a:spcAft>
-                          <a:spcPts val="0"/>
-                        </a:spcAft>
-                        <a:defRPr sz="1200" b="0">
-                          <a:solidFill>
-                            <a:srgbClr val="21243A"/>
-                          </a:solidFill>
-                          <a:latin typeface="Arial"/>
-                        </a:defRPr>
-                      </a:pPr>
-                      <a:r>
-                        <a:t>unavailable visual assessments, not three inconclusive model replies.</a:t>
+                        <a:t>ELA mean 1.8, peak 53 (uniform high ELA can indicate generation/heavy edit).</a:t>
                       </a:r>
                     </a:p>
                   </a:txBody>
@@ -7716,8 +9138,8 @@
           <p:nvPr/>
         </p:nvGraphicFramePr>
         <p:xfrm>
-          <a:off x="365760" y="5252720"/>
-          <a:ext cx="8412479" cy="755904"/>
+          <a:off x="365760" y="4846320"/>
+          <a:ext cx="8412479" cy="349504"/>
         </p:xfrm>
         <a:graphic>
           <a:graphicData uri="http://schemas.openxmlformats.org/drawingml/2006/table">
@@ -7729,28 +9151,28 @@
                 <a:gridCol w="2271369"/>
                 <a:gridCol w="6141110"/>
               </a:tblGrid>
-              <a:tr h="755904">
-                <a:tc>
-                  <a:txBody>
-                    <a:bodyPr wrap="none"/>
-                    <a:lstStyle/>
-                    <a:p>
-                      <a:pPr>
-                        <a:lnSpc>
-                          <a:spcPts val="1600"/>
-                        </a:lnSpc>
-                        <a:spcAft>
-                          <a:spcPts val="0"/>
-                        </a:spcAft>
-                        <a:defRPr sz="1200" b="0">
-                          <a:solidFill>
-                            <a:srgbClr val="21243A"/>
-                          </a:solidFill>
-                          <a:latin typeface="Arial"/>
-                        </a:defRPr>
-                      </a:pPr>
-                      <a:r>
-                        <a:t>Ingestion note 2</a:t>
+              <a:tr h="349504">
+                <a:tc>
+                  <a:txBody>
+                    <a:bodyPr wrap="none"/>
+                    <a:lstStyle/>
+                    <a:p>
+                      <a:pPr>
+                        <a:lnSpc>
+                          <a:spcPts val="1600"/>
+                        </a:lnSpc>
+                        <a:spcAft>
+                          <a:spcPts val="0"/>
+                        </a:spcAft>
+                        <a:defRPr sz="1200" b="0">
+                          <a:solidFill>
+                            <a:srgbClr val="21243A"/>
+                          </a:solidFill>
+                          <a:latin typeface="Arial"/>
+                        </a:defRPr>
+                      </a:pPr>
+                      <a:r>
+                        <a:t>Evidence 3</a:t>
                       </a:r>
                     </a:p>
                   </a:txBody>
@@ -7780,51 +9202,101 @@
                         </a:defRPr>
                       </a:pPr>
                       <a:r>
-                        <a:t>Presentation copy of saved report 51daff64-c246-46da-95b5-06bef3c925b8. The</a:t>
-                      </a:r>
-                    </a:p>
-                    <a:p>
-                      <a:pPr>
-                        <a:lnSpc>
-                          <a:spcPts val="1600"/>
-                        </a:lnSpc>
-                        <a:spcAft>
-                          <a:spcPts val="0"/>
-                        </a:spcAft>
-                        <a:defRPr sz="1200" b="0">
-                          <a:solidFill>
-                            <a:srgbClr val="21243A"/>
-                          </a:solidFill>
-                          <a:latin typeface="Arial"/>
-                        </a:defRPr>
-                      </a:pPr>
-                      <a:r>
-                        <a:t>descriptive filename replaces the earlier example ID for navigation. Original</a:t>
-                      </a:r>
-                    </a:p>
-                    <a:p>
-                      <a:pPr>
-                        <a:lnSpc>
-                          <a:spcPts val="1600"/>
-                        </a:lnSpc>
-                        <a:spcAft>
-                          <a:spcPts val="0"/>
-                        </a:spcAft>
-                        <a:defRPr sz="1200" b="0">
-                          <a:solidFill>
-                            <a:srgbClr val="21243A"/>
-                          </a:solidFill>
-                          <a:latin typeface="Arial"/>
-                        </a:defRPr>
-                      </a:pPr>
-                      <a:r>
-                        <a:t>analysis dates, provider replies, scores and acquisition context are retained; no</a:t>
+                        <a:t>High-frequency noise std 10.42 (very low/very uniform noise is a synthesis cue).</a:t>
                       </a:r>
                     </a:p>
                   </a:txBody>
                   <a:tcPr marL="82296" marR="82296" marT="64008" marB="64008">
                     <a:solidFill>
                       <a:srgbClr val="FFFFFF"/>
+                    </a:solidFill>
+                  </a:tcPr>
+                </a:tc>
+              </a:tr>
+            </a:tbl>
+          </a:graphicData>
+        </a:graphic>
+      </p:graphicFrame>
+      <p:graphicFrame>
+        <p:nvGraphicFramePr>
+          <p:cNvPr id="17" name="Table 16"/>
+          <p:cNvGraphicFramePr>
+            <a:graphicFrameLocks noGrp="1"/>
+          </p:cNvGraphicFramePr>
+          <p:nvPr/>
+        </p:nvGraphicFramePr>
+        <p:xfrm>
+          <a:off x="365760" y="5195824"/>
+          <a:ext cx="8412479" cy="349504"/>
+        </p:xfrm>
+        <a:graphic>
+          <a:graphicData uri="http://schemas.openxmlformats.org/drawingml/2006/table">
+            <a:tbl>
+              <a:tblPr firstRow="1" bandRow="1">
+                <a:tableStyleId>{5C22544A-7EE6-4342-B048-85BDC9FD1C3A}</a:tableStyleId>
+              </a:tblPr>
+              <a:tblGrid>
+                <a:gridCol w="2271369"/>
+                <a:gridCol w="6141110"/>
+              </a:tblGrid>
+              <a:tr h="349504">
+                <a:tc>
+                  <a:txBody>
+                    <a:bodyPr wrap="none"/>
+                    <a:lstStyle/>
+                    <a:p>
+                      <a:pPr>
+                        <a:lnSpc>
+                          <a:spcPts val="1600"/>
+                        </a:lnSpc>
+                        <a:spcAft>
+                          <a:spcPts val="0"/>
+                        </a:spcAft>
+                        <a:defRPr sz="1200" b="0">
+                          <a:solidFill>
+                            <a:srgbClr val="21243A"/>
+                          </a:solidFill>
+                          <a:latin typeface="Arial"/>
+                        </a:defRPr>
+                      </a:pPr>
+                      <a:r>
+                        <a:t>Evidence 4</a:t>
+                      </a:r>
+                    </a:p>
+                  </a:txBody>
+                  <a:tcPr marL="82296" marR="82296" marT="64008" marB="64008">
+                    <a:solidFill>
+                      <a:srgbClr val="F1F7F7"/>
+                    </a:solidFill>
+                  </a:tcPr>
+                </a:tc>
+                <a:tc>
+                  <a:txBody>
+                    <a:bodyPr wrap="none"/>
+                    <a:lstStyle/>
+                    <a:p>
+                      <a:pPr>
+                        <a:lnSpc>
+                          <a:spcPts val="1600"/>
+                        </a:lnSpc>
+                        <a:spcAft>
+                          <a:spcPts val="0"/>
+                        </a:spcAft>
+                        <a:defRPr sz="1200" b="0">
+                          <a:solidFill>
+                            <a:srgbClr val="21243A"/>
+                          </a:solidFill>
+                          <a:latin typeface="Arial"/>
+                        </a:defRPr>
+                      </a:pPr>
+                      <a:r>
+                        <a:t>Spectral peakiness 24.85 (periodic frequency peaks can mark generated textures).</a:t>
+                      </a:r>
+                    </a:p>
+                  </a:txBody>
+                  <a:tcPr marL="82296" marR="82296" marT="64008" marB="64008">
+                    <a:solidFill>
+                      <a:srgbClr val="F1F7F7"/>
                     </a:solidFill>
                   </a:tcPr>
                 </a:tc>
@@ -7930,7 +9402,7 @@
               </a:defRPr>
             </a:pPr>
             <a:r>
-              <a:t>File and analysis record (continued)</a:t>
+              <a:t>Evidence supporting this verdict</a:t>
             </a:r>
           </a:p>
         </p:txBody>
@@ -8015,6 +9487,791 @@
             </a:pPr>
             <a:r>
               <a:t>14</a:t>
+            </a:r>
+          </a:p>
+        </p:txBody>
+      </p:sp>
+      <p:graphicFrame>
+        <p:nvGraphicFramePr>
+          <p:cNvPr id="6" name="Table 5"/>
+          <p:cNvGraphicFramePr>
+            <a:graphicFrameLocks noGrp="1"/>
+          </p:cNvGraphicFramePr>
+          <p:nvPr/>
+        </p:nvGraphicFramePr>
+        <p:xfrm>
+          <a:off x="365760" y="1353312"/>
+          <a:ext cx="8412479" cy="347472"/>
+        </p:xfrm>
+        <a:graphic>
+          <a:graphicData uri="http://schemas.openxmlformats.org/drawingml/2006/table">
+            <a:tbl>
+              <a:tblPr firstRow="1" bandRow="1">
+                <a:tableStyleId>{5C22544A-7EE6-4342-B048-85BDC9FD1C3A}</a:tableStyleId>
+              </a:tblPr>
+              <a:tblGrid>
+                <a:gridCol w="2271369"/>
+                <a:gridCol w="6141110"/>
+              </a:tblGrid>
+              <a:tr h="347472">
+                <a:tc>
+                  <a:txBody>
+                    <a:bodyPr wrap="none"/>
+                    <a:lstStyle/>
+                    <a:p>
+                      <a:pPr>
+                        <a:lnSpc>
+                          <a:spcPts val="1600"/>
+                        </a:lnSpc>
+                        <a:spcAft>
+                          <a:spcPts val="0"/>
+                        </a:spcAft>
+                        <a:defRPr sz="1200" b="1">
+                          <a:solidFill>
+                            <a:srgbClr val="FFFFFF"/>
+                          </a:solidFill>
+                          <a:latin typeface="Arial"/>
+                        </a:defRPr>
+                      </a:pPr>
+                      <a:r>
+                        <a:t>Field</a:t>
+                      </a:r>
+                    </a:p>
+                  </a:txBody>
+                  <a:tcPr marL="82296" marR="82296" marT="64008" marB="64008">
+                    <a:solidFill>
+                      <a:srgbClr val="16787C"/>
+                    </a:solidFill>
+                  </a:tcPr>
+                </a:tc>
+                <a:tc>
+                  <a:txBody>
+                    <a:bodyPr wrap="none"/>
+                    <a:lstStyle/>
+                    <a:p>
+                      <a:pPr>
+                        <a:lnSpc>
+                          <a:spcPts val="1600"/>
+                        </a:lnSpc>
+                        <a:spcAft>
+                          <a:spcPts val="0"/>
+                        </a:spcAft>
+                        <a:defRPr sz="1200" b="1">
+                          <a:solidFill>
+                            <a:srgbClr val="FFFFFF"/>
+                          </a:solidFill>
+                          <a:latin typeface="Arial"/>
+                        </a:defRPr>
+                      </a:pPr>
+                      <a:r>
+                        <a:t>Recorded detail</a:t>
+                      </a:r>
+                    </a:p>
+                  </a:txBody>
+                  <a:tcPr marL="82296" marR="82296" marT="64008" marB="64008">
+                    <a:solidFill>
+                      <a:srgbClr val="16787C"/>
+                    </a:solidFill>
+                  </a:tcPr>
+                </a:tc>
+              </a:tr>
+            </a:tbl>
+          </a:graphicData>
+        </a:graphic>
+      </p:graphicFrame>
+      <p:graphicFrame>
+        <p:nvGraphicFramePr>
+          <p:cNvPr id="7" name="Table 6"/>
+          <p:cNvGraphicFramePr>
+            <a:graphicFrameLocks noGrp="1"/>
+          </p:cNvGraphicFramePr>
+          <p:nvPr/>
+        </p:nvGraphicFramePr>
+        <p:xfrm>
+          <a:off x="365760" y="1700784"/>
+          <a:ext cx="8412479" cy="1568704"/>
+        </p:xfrm>
+        <a:graphic>
+          <a:graphicData uri="http://schemas.openxmlformats.org/drawingml/2006/table">
+            <a:tbl>
+              <a:tblPr firstRow="1" bandRow="1">
+                <a:tableStyleId>{5C22544A-7EE6-4342-B048-85BDC9FD1C3A}</a:tableStyleId>
+              </a:tblPr>
+              <a:tblGrid>
+                <a:gridCol w="2271369"/>
+                <a:gridCol w="6141110"/>
+              </a:tblGrid>
+              <a:tr h="1568704">
+                <a:tc>
+                  <a:txBody>
+                    <a:bodyPr wrap="none"/>
+                    <a:lstStyle/>
+                    <a:p>
+                      <a:pPr>
+                        <a:lnSpc>
+                          <a:spcPts val="1600"/>
+                        </a:lnSpc>
+                        <a:spcAft>
+                          <a:spcPts val="0"/>
+                        </a:spcAft>
+                        <a:defRPr sz="1200" b="0">
+                          <a:solidFill>
+                            <a:srgbClr val="21243A"/>
+                          </a:solidFill>
+                          <a:latin typeface="Arial"/>
+                        </a:defRPr>
+                      </a:pPr>
+                      <a:r>
+                        <a:t>Claude Vision</a:t>
+                      </a:r>
+                    </a:p>
+                  </a:txBody>
+                  <a:tcPr marL="82296" marR="82296" marT="64008" marB="64008">
+                    <a:solidFill>
+                      <a:srgbClr val="F1F7F7"/>
+                    </a:solidFill>
+                  </a:tcPr>
+                </a:tc>
+                <a:tc>
+                  <a:txBody>
+                    <a:bodyPr wrap="none"/>
+                    <a:lstStyle/>
+                    <a:p>
+                      <a:pPr>
+                        <a:lnSpc>
+                          <a:spcPts val="1600"/>
+                        </a:lnSpc>
+                        <a:spcAft>
+                          <a:spcPts val="0"/>
+                        </a:spcAft>
+                        <a:defRPr sz="1200" b="0">
+                          <a:solidFill>
+                            <a:srgbClr val="21243A"/>
+                          </a:solidFill>
+                          <a:latin typeface="Arial"/>
+                        </a:defRPr>
+                      </a:pPr>
+                      <a:r>
+                        <a:t>synthetic likelihood 90/100; tells: uniform painterly-photoreal rendering style</a:t>
+                      </a:r>
+                    </a:p>
+                    <a:p>
+                      <a:pPr>
+                        <a:lnSpc>
+                          <a:spcPts val="1600"/>
+                        </a:lnSpc>
+                        <a:spcAft>
+                          <a:spcPts val="0"/>
+                        </a:spcAft>
+                        <a:defRPr sz="1200" b="0">
+                          <a:solidFill>
+                            <a:srgbClr val="21243A"/>
+                          </a:solidFill>
+                          <a:latin typeface="Arial"/>
+                        </a:defRPr>
+                      </a:pPr>
+                      <a:r>
+                        <a:t>shared across the main scene and all six portrait tiles, typical of a single</a:t>
+                      </a:r>
+                    </a:p>
+                    <a:p>
+                      <a:pPr>
+                        <a:lnSpc>
+                          <a:spcPts val="1600"/>
+                        </a:lnSpc>
+                        <a:spcAft>
+                          <a:spcPts val="0"/>
+                        </a:spcAft>
+                        <a:defRPr sz="1200" b="0">
+                          <a:solidFill>
+                            <a:srgbClr val="21243A"/>
+                          </a:solidFill>
+                          <a:latin typeface="Arial"/>
+                        </a:defRPr>
+                      </a:pPr>
+                      <a:r>
+                        <a:t>image-generation pass, stock-archetype faces with exaggerated, near-identical</a:t>
+                      </a:r>
+                    </a:p>
+                    <a:p>
+                      <a:pPr>
+                        <a:lnSpc>
+                          <a:spcPts val="1600"/>
+                        </a:lnSpc>
+                        <a:spcAft>
+                          <a:spcPts val="0"/>
+                        </a:spcAft>
+                        <a:defRPr sz="1200" b="0">
+                          <a:solidFill>
+                            <a:srgbClr val="21243A"/>
+                          </a:solidFill>
+                          <a:latin typeface="Arial"/>
+                        </a:defRPr>
+                      </a:pPr>
+                      <a:r>
+                        <a:t>'distressed' expressions and similar desaturated grading, over-smooth yet</a:t>
+                      </a:r>
+                    </a:p>
+                    <a:p>
+                      <a:pPr>
+                        <a:lnSpc>
+                          <a:spcPts val="1600"/>
+                        </a:lnSpc>
+                        <a:spcAft>
+                          <a:spcPts val="0"/>
+                        </a:spcAft>
+                        <a:defRPr sz="1200" b="0">
+                          <a:solidFill>
+                            <a:srgbClr val="21243A"/>
+                          </a:solidFill>
+                          <a:latin typeface="Arial"/>
+                        </a:defRPr>
+                      </a:pPr>
+                      <a:r>
+                        <a:t>hyper-detailed skin texture (pores and stubble rendered evenly, slightly waxy</a:t>
+                      </a:r>
+                    </a:p>
+                    <a:p>
+                      <a:pPr>
+                        <a:lnSpc>
+                          <a:spcPts val="1600"/>
+                        </a:lnSpc>
+                        <a:spcAft>
+                          <a:spcPts val="0"/>
+                        </a:spcAft>
+                        <a:defRPr sz="1200" b="0">
+                          <a:solidFill>
+                            <a:srgbClr val="21243A"/>
+                          </a:solidFill>
+                          <a:latin typeface="Arial"/>
+                        </a:defRPr>
+                      </a:pPr>
+                      <a:r>
+                        <a:t>highlights), syringe and gloved-hand geometry ambiguous: needle entry point</a:t>
+                      </a:r>
+                    </a:p>
+                    <a:p>
+                      <a:pPr>
+                        <a:lnSpc>
+                          <a:spcPts val="1600"/>
+                        </a:lnSpc>
+                        <a:spcAft>
+                          <a:spcPts val="0"/>
+                        </a:spcAft>
+                        <a:defRPr sz="1200" b="0">
+                          <a:solidFill>
+                            <a:srgbClr val="21243A"/>
+                          </a:solidFill>
+                          <a:latin typeface="Arial"/>
+                        </a:defRPr>
+                      </a:pPr>
+                      <a:r>
+                        <a:t>and grip read loosely, with fingers merging around the barrel</a:t>
+                      </a:r>
+                    </a:p>
+                  </a:txBody>
+                  <a:tcPr marL="82296" marR="82296" marT="64008" marB="64008">
+                    <a:solidFill>
+                      <a:srgbClr val="F1F7F7"/>
+                    </a:solidFill>
+                  </a:tcPr>
+                </a:tc>
+              </a:tr>
+            </a:tbl>
+          </a:graphicData>
+        </a:graphic>
+      </p:graphicFrame>
+      <p:graphicFrame>
+        <p:nvGraphicFramePr>
+          <p:cNvPr id="8" name="Table 7"/>
+          <p:cNvGraphicFramePr>
+            <a:graphicFrameLocks noGrp="1"/>
+          </p:cNvGraphicFramePr>
+          <p:nvPr/>
+        </p:nvGraphicFramePr>
+        <p:xfrm>
+          <a:off x="365760" y="3269488"/>
+          <a:ext cx="8412479" cy="1365503"/>
+        </p:xfrm>
+        <a:graphic>
+          <a:graphicData uri="http://schemas.openxmlformats.org/drawingml/2006/table">
+            <a:tbl>
+              <a:tblPr firstRow="1" bandRow="1">
+                <a:tableStyleId>{5C22544A-7EE6-4342-B048-85BDC9FD1C3A}</a:tableStyleId>
+              </a:tblPr>
+              <a:tblGrid>
+                <a:gridCol w="2271369"/>
+                <a:gridCol w="6141110"/>
+              </a:tblGrid>
+              <a:tr h="1365503">
+                <a:tc>
+                  <a:txBody>
+                    <a:bodyPr wrap="none"/>
+                    <a:lstStyle/>
+                    <a:p>
+                      <a:pPr>
+                        <a:lnSpc>
+                          <a:spcPts val="1600"/>
+                        </a:lnSpc>
+                        <a:spcAft>
+                          <a:spcPts val="0"/>
+                        </a:spcAft>
+                        <a:defRPr sz="1200" b="0">
+                          <a:solidFill>
+                            <a:srgbClr val="21243A"/>
+                          </a:solidFill>
+                          <a:latin typeface="Arial"/>
+                        </a:defRPr>
+                      </a:pPr>
+                      <a:r>
+                        <a:t>OpenAI Vision</a:t>
+                      </a:r>
+                    </a:p>
+                  </a:txBody>
+                  <a:tcPr marL="82296" marR="82296" marT="64008" marB="64008">
+                    <a:solidFill>
+                      <a:srgbClr val="FFFFFF"/>
+                    </a:solidFill>
+                  </a:tcPr>
+                </a:tc>
+                <a:tc>
+                  <a:txBody>
+                    <a:bodyPr wrap="none"/>
+                    <a:lstStyle/>
+                    <a:p>
+                      <a:pPr>
+                        <a:lnSpc>
+                          <a:spcPts val="1600"/>
+                        </a:lnSpc>
+                        <a:spcAft>
+                          <a:spcPts val="0"/>
+                        </a:spcAft>
+                        <a:defRPr sz="1200" b="0">
+                          <a:solidFill>
+                            <a:srgbClr val="21243A"/>
+                          </a:solidFill>
+                          <a:latin typeface="Arial"/>
+                        </a:defRPr>
+                      </a:pPr>
+                      <a:r>
+                        <a:t>synthetic likelihood 78/100; tells: Main vaccination scene and six inset portraits</a:t>
+                      </a:r>
+                    </a:p>
+                    <a:p>
+                      <a:pPr>
+                        <a:lnSpc>
+                          <a:spcPts val="1600"/>
+                        </a:lnSpc>
+                        <a:spcAft>
+                          <a:spcPts val="0"/>
+                        </a:spcAft>
+                        <a:defRPr sz="1200" b="0">
+                          <a:solidFill>
+                            <a:srgbClr val="21243A"/>
+                          </a:solidFill>
+                          <a:latin typeface="Arial"/>
+                        </a:defRPr>
+                      </a:pPr>
+                      <a:r>
+                        <a:t>share unusually uniform cinematic lighting and textured skin rendering., Syringe</a:t>
+                      </a:r>
+                    </a:p>
+                    <a:p>
+                      <a:pPr>
+                        <a:lnSpc>
+                          <a:spcPts val="1600"/>
+                        </a:lnSpc>
+                        <a:spcAft>
+                          <a:spcPts val="0"/>
+                        </a:spcAft>
+                        <a:defRPr sz="1200" b="0">
+                          <a:solidFill>
+                            <a:srgbClr val="21243A"/>
+                          </a:solidFill>
+                          <a:latin typeface="Arial"/>
+                        </a:defRPr>
+                      </a:pPr>
+                      <a:r>
+                        <a:t>barrel, plunger, and gloved grip have indistinct, difficult-to-reconcile geometry.,</a:t>
+                      </a:r>
+                    </a:p>
+                    <a:p>
+                      <a:pPr>
+                        <a:lnSpc>
+                          <a:spcPts val="1600"/>
+                        </a:lnSpc>
+                        <a:spcAft>
+                          <a:spcPts val="0"/>
+                        </a:spcAft>
+                        <a:defRPr sz="1200" b="0">
+                          <a:solidFill>
+                            <a:srgbClr val="21243A"/>
+                          </a:solidFill>
+                          <a:latin typeface="Arial"/>
+                        </a:defRPr>
+                      </a:pPr>
+                      <a:r>
+                        <a:t>Hair and facial creases in several portraits appear unusually densely sharpened</a:t>
+                      </a:r>
+                    </a:p>
+                    <a:p>
+                      <a:pPr>
+                        <a:lnSpc>
+                          <a:spcPts val="1600"/>
+                        </a:lnSpc>
+                        <a:spcAft>
+                          <a:spcPts val="0"/>
+                        </a:spcAft>
+                        <a:defRPr sz="1200" b="0">
+                          <a:solidFill>
+                            <a:srgbClr val="21243A"/>
+                          </a:solidFill>
+                          <a:latin typeface="Arial"/>
+                        </a:defRPr>
+                      </a:pPr>
+                      <a:r>
+                        <a:t>against smooth backgrounds., Crisp, coherent typography and neatly aligned</a:t>
+                      </a:r>
+                    </a:p>
+                    <a:p>
+                      <a:pPr>
+                        <a:lnSpc>
+                          <a:spcPts val="1600"/>
+                        </a:lnSpc>
+                        <a:spcAft>
+                          <a:spcPts val="0"/>
+                        </a:spcAft>
+                        <a:defRPr sz="1200" b="0">
+                          <a:solidFill>
+                            <a:srgbClr val="21243A"/>
+                          </a:solidFill>
+                          <a:latin typeface="Arial"/>
+                        </a:defRPr>
+                      </a:pPr>
+                      <a:r>
+                        <a:t>panels indicate a designed graphic but do not independently establish AI use.</a:t>
+                      </a:r>
+                    </a:p>
+                  </a:txBody>
+                  <a:tcPr marL="82296" marR="82296" marT="64008" marB="64008">
+                    <a:solidFill>
+                      <a:srgbClr val="FFFFFF"/>
+                    </a:solidFill>
+                  </a:tcPr>
+                </a:tc>
+              </a:tr>
+            </a:tbl>
+          </a:graphicData>
+        </a:graphic>
+      </p:graphicFrame>
+      <p:graphicFrame>
+        <p:nvGraphicFramePr>
+          <p:cNvPr id="9" name="Table 8"/>
+          <p:cNvGraphicFramePr>
+            <a:graphicFrameLocks noGrp="1"/>
+          </p:cNvGraphicFramePr>
+          <p:nvPr/>
+        </p:nvGraphicFramePr>
+        <p:xfrm>
+          <a:off x="365760" y="4634992"/>
+          <a:ext cx="8412479" cy="755904"/>
+        </p:xfrm>
+        <a:graphic>
+          <a:graphicData uri="http://schemas.openxmlformats.org/drawingml/2006/table">
+            <a:tbl>
+              <a:tblPr firstRow="1" bandRow="1">
+                <a:tableStyleId>{5C22544A-7EE6-4342-B048-85BDC9FD1C3A}</a:tableStyleId>
+              </a:tblPr>
+              <a:tblGrid>
+                <a:gridCol w="2271369"/>
+                <a:gridCol w="6141110"/>
+              </a:tblGrid>
+              <a:tr h="755904">
+                <a:tc>
+                  <a:txBody>
+                    <a:bodyPr wrap="none"/>
+                    <a:lstStyle/>
+                    <a:p>
+                      <a:pPr>
+                        <a:lnSpc>
+                          <a:spcPts val="1600"/>
+                        </a:lnSpc>
+                        <a:spcAft>
+                          <a:spcPts val="0"/>
+                        </a:spcAft>
+                        <a:defRPr sz="1200" b="0">
+                          <a:solidFill>
+                            <a:srgbClr val="21243A"/>
+                          </a:solidFill>
+                          <a:latin typeface="Arial"/>
+                        </a:defRPr>
+                      </a:pPr>
+                      <a:r>
+                        <a:t>Gemini Vision</a:t>
+                      </a:r>
+                    </a:p>
+                  </a:txBody>
+                  <a:tcPr marL="82296" marR="82296" marT="64008" marB="64008">
+                    <a:solidFill>
+                      <a:srgbClr val="F1F7F7"/>
+                    </a:solidFill>
+                  </a:tcPr>
+                </a:tc>
+                <a:tc>
+                  <a:txBody>
+                    <a:bodyPr wrap="none"/>
+                    <a:lstStyle/>
+                    <a:p>
+                      <a:pPr>
+                        <a:lnSpc>
+                          <a:spcPts val="1600"/>
+                        </a:lnSpc>
+                        <a:spcAft>
+                          <a:spcPts val="0"/>
+                        </a:spcAft>
+                        <a:defRPr sz="1200" b="0">
+                          <a:solidFill>
+                            <a:srgbClr val="21243A"/>
+                          </a:solidFill>
+                          <a:latin typeface="Arial"/>
+                        </a:defRPr>
+                      </a:pPr>
+                      <a:r>
+                        <a:t>synthetic likelihood 72/100; tells: model read this as AI editing over a</a:t>
+                      </a:r>
+                    </a:p>
+                    <a:p>
+                      <a:pPr>
+                        <a:lnSpc>
+                          <a:spcPts val="1600"/>
+                        </a:lnSpc>
+                        <a:spcAft>
+                          <a:spcPts val="0"/>
+                        </a:spcAft>
+                        <a:defRPr sz="1200" b="0">
+                          <a:solidFill>
+                            <a:srgbClr val="21243A"/>
+                          </a:solidFill>
+                          <a:latin typeface="Arial"/>
+                        </a:defRPr>
+                      </a:pPr>
+                      <a:r>
+                        <a:t>photographic base image, hyper-rendered skin textures, characteristic AI portrait</a:t>
+                      </a:r>
+                    </a:p>
+                    <a:p>
+                      <a:pPr>
+                        <a:lnSpc>
+                          <a:spcPts val="1600"/>
+                        </a:lnSpc>
+                        <a:spcAft>
+                          <a:spcPts val="0"/>
+                        </a:spcAft>
+                        <a:defRPr sz="1200" b="0">
+                          <a:solidFill>
+                            <a:srgbClr val="21243A"/>
+                          </a:solidFill>
+                          <a:latin typeface="Arial"/>
+                        </a:defRPr>
+                      </a:pPr>
+                      <a:r>
+                        <a:t>lighting across multiple subjects, slightly unnatural finger and needle interaction</a:t>
+                      </a:r>
+                    </a:p>
+                  </a:txBody>
+                  <a:tcPr marL="82296" marR="82296" marT="64008" marB="64008">
+                    <a:solidFill>
+                      <a:srgbClr val="F1F7F7"/>
+                    </a:solidFill>
+                  </a:tcPr>
+                </a:tc>
+              </a:tr>
+            </a:tbl>
+          </a:graphicData>
+        </a:graphic>
+      </p:graphicFrame>
+    </p:spTree>
+  </p:cSld>
+  <p:clrMapOvr>
+    <a:masterClrMapping/>
+  </p:clrMapOvr>
+</p:sld>
+</file>
+
+<file path=ppt/slides/slide15.xml><?xml version="1.0" encoding="utf-8"?>
+<p:sld xmlns:a="http://schemas.openxmlformats.org/drawingml/2006/main" xmlns:p="http://schemas.openxmlformats.org/presentationml/2006/main" xmlns:r="http://schemas.openxmlformats.org/officeDocument/2006/relationships">
+  <p:cSld>
+    <p:spTree>
+      <p:nvGrpSpPr>
+        <p:cNvPr id="1" name=""/>
+        <p:cNvGrpSpPr/>
+        <p:nvPr/>
+      </p:nvGrpSpPr>
+      <p:grpSpPr/>
+      <p:sp>
+        <p:nvSpPr>
+          <p:cNvPr id="2" name="TextBox 1"/>
+          <p:cNvSpPr txBox="1"/>
+          <p:nvPr/>
+        </p:nvSpPr>
+        <p:spPr>
+          <a:xfrm>
+            <a:off x="365760" y="219456"/>
+            <a:ext cx="8412480" cy="228600"/>
+          </a:xfrm>
+          <a:prstGeom prst="rect">
+            <a:avLst/>
+          </a:prstGeom>
+          <a:noFill/>
+        </p:spPr>
+        <p:txBody>
+          <a:bodyPr wrap="square" lIns="0" rIns="0" tIns="0" bIns="0">
+            <a:spAutoFit/>
+          </a:bodyPr>
+          <a:lstStyle/>
+          <a:p>
+            <a:pPr>
+              <a:lnSpc>
+                <a:spcPct val="115000"/>
+              </a:lnSpc>
+              <a:spcAft>
+                <a:spcPts val="0"/>
+              </a:spcAft>
+              <a:defRPr sz="1100" b="1">
+                <a:solidFill>
+                  <a:srgbClr val="C5006A"/>
+                </a:solidFill>
+                <a:latin typeface="Arial"/>
+              </a:defRPr>
+            </a:pPr>
+            <a:r>
+              <a:t>SDA VISION / RESEARCH REPORT</a:t>
+            </a:r>
+          </a:p>
+        </p:txBody>
+      </p:sp>
+      <p:sp>
+        <p:nvSpPr>
+          <p:cNvPr id="3" name="TextBox 2"/>
+          <p:cNvSpPr txBox="1"/>
+          <p:nvPr/>
+        </p:nvSpPr>
+        <p:spPr>
+          <a:xfrm>
+            <a:off x="365760" y="658368"/>
+            <a:ext cx="8412480" cy="612648"/>
+          </a:xfrm>
+          <a:prstGeom prst="rect">
+            <a:avLst/>
+          </a:prstGeom>
+          <a:noFill/>
+        </p:spPr>
+        <p:txBody>
+          <a:bodyPr wrap="square" lIns="0" rIns="0" tIns="0" bIns="0">
+            <a:spAutoFit/>
+          </a:bodyPr>
+          <a:lstStyle/>
+          <a:p>
+            <a:pPr>
+              <a:lnSpc>
+                <a:spcPct val="115000"/>
+              </a:lnSpc>
+              <a:spcAft>
+                <a:spcPts val="0"/>
+              </a:spcAft>
+              <a:defRPr sz="2200" b="1">
+                <a:solidFill>
+                  <a:srgbClr val="21243A"/>
+                </a:solidFill>
+                <a:latin typeface="Arial"/>
+              </a:defRPr>
+            </a:pPr>
+            <a:r>
+              <a:t>Additional findings</a:t>
+            </a:r>
+          </a:p>
+        </p:txBody>
+      </p:sp>
+      <p:sp>
+        <p:nvSpPr>
+          <p:cNvPr id="4" name="TextBox 3"/>
+          <p:cNvSpPr txBox="1"/>
+          <p:nvPr/>
+        </p:nvSpPr>
+        <p:spPr>
+          <a:xfrm>
+            <a:off x="365760" y="6291072"/>
+            <a:ext cx="8001000" cy="365760"/>
+          </a:xfrm>
+          <a:prstGeom prst="rect">
+            <a:avLst/>
+          </a:prstGeom>
+          <a:noFill/>
+        </p:spPr>
+        <p:txBody>
+          <a:bodyPr wrap="square" lIns="0" rIns="0" tIns="0" bIns="0">
+            <a:spAutoFit/>
+          </a:bodyPr>
+          <a:lstStyle/>
+          <a:p>
+            <a:pPr>
+              <a:lnSpc>
+                <a:spcPct val="115000"/>
+              </a:lnSpc>
+              <a:spcAft>
+                <a:spcPts val="0"/>
+              </a:spcAft>
+              <a:defRPr sz="800" b="0">
+                <a:solidFill>
+                  <a:srgbClr val="545B6D"/>
+                </a:solidFill>
+                <a:latin typeface="Arial"/>
+              </a:defRPr>
+            </a:pPr>
+            <a:r>
+              <a:t>Research assessment. Ratings are not calibrated probabilities.</a:t>
+            </a:r>
+          </a:p>
+        </p:txBody>
+      </p:sp>
+      <p:sp>
+        <p:nvSpPr>
+          <p:cNvPr id="5" name="TextBox 4"/>
+          <p:cNvSpPr txBox="1"/>
+          <p:nvPr/>
+        </p:nvSpPr>
+        <p:spPr>
+          <a:xfrm>
+            <a:off x="8394192" y="6318504"/>
+            <a:ext cx="365760" cy="228600"/>
+          </a:xfrm>
+          <a:prstGeom prst="rect">
+            <a:avLst/>
+          </a:prstGeom>
+          <a:noFill/>
+        </p:spPr>
+        <p:txBody>
+          <a:bodyPr wrap="square" lIns="0" rIns="0" tIns="0" bIns="0">
+            <a:spAutoFit/>
+          </a:bodyPr>
+          <a:lstStyle/>
+          <a:p>
+            <a:pPr>
+              <a:lnSpc>
+                <a:spcPct val="115000"/>
+              </a:lnSpc>
+              <a:spcAft>
+                <a:spcPts val="0"/>
+              </a:spcAft>
+              <a:defRPr sz="900" b="0">
+                <a:solidFill>
+                  <a:srgbClr val="545B6D"/>
+                </a:solidFill>
+                <a:latin typeface="Arial"/>
+              </a:defRPr>
+            </a:pPr>
+            <a:r>
+              <a:t>15</a:t>
             </a:r>
           </a:p>
         </p:txBody>
@@ -8150,7 +10407,95 @@
                         </a:defRPr>
                       </a:pPr>
                       <a:r>
-                        <a:t>Continued</a:t>
+                        <a:t>Local forensic cues</a:t>
+                      </a:r>
+                    </a:p>
+                  </a:txBody>
+                  <a:tcPr marL="82296" marR="82296" marT="64008" marB="64008">
+                    <a:solidFill>
+                      <a:srgbClr val="F1F7F7"/>
+                    </a:solidFill>
+                  </a:tcPr>
+                </a:tc>
+                <a:tc>
+                  <a:txBody>
+                    <a:bodyPr wrap="none"/>
+                    <a:lstStyle/>
+                    <a:p>
+                      <a:pPr>
+                        <a:lnSpc>
+                          <a:spcPts val="1600"/>
+                        </a:lnSpc>
+                        <a:spcAft>
+                          <a:spcPts val="0"/>
+                        </a:spcAft>
+                        <a:defRPr sz="1200" b="0">
+                          <a:solidFill>
+                            <a:srgbClr val="21243A"/>
+                          </a:solidFill>
+                          <a:latin typeface="Arial"/>
+                        </a:defRPr>
+                      </a:pPr>
+                      <a:r>
+                        <a:t>Supporting observation; considered alongside the model assessments.</a:t>
+                      </a:r>
+                    </a:p>
+                  </a:txBody>
+                  <a:tcPr marL="82296" marR="82296" marT="64008" marB="64008">
+                    <a:solidFill>
+                      <a:srgbClr val="F1F7F7"/>
+                    </a:solidFill>
+                  </a:tcPr>
+                </a:tc>
+              </a:tr>
+            </a:tbl>
+          </a:graphicData>
+        </a:graphic>
+      </p:graphicFrame>
+      <p:graphicFrame>
+        <p:nvGraphicFramePr>
+          <p:cNvPr id="8" name="Table 7"/>
+          <p:cNvGraphicFramePr>
+            <a:graphicFrameLocks noGrp="1"/>
+          </p:cNvGraphicFramePr>
+          <p:nvPr/>
+        </p:nvGraphicFramePr>
+        <p:xfrm>
+          <a:off x="365760" y="2050288"/>
+          <a:ext cx="8412479" cy="349504"/>
+        </p:xfrm>
+        <a:graphic>
+          <a:graphicData uri="http://schemas.openxmlformats.org/drawingml/2006/table">
+            <a:tbl>
+              <a:tblPr firstRow="1" bandRow="1">
+                <a:tableStyleId>{5C22544A-7EE6-4342-B048-85BDC9FD1C3A}</a:tableStyleId>
+              </a:tblPr>
+              <a:tblGrid>
+                <a:gridCol w="2271369"/>
+                <a:gridCol w="6141110"/>
+              </a:tblGrid>
+              <a:tr h="349504">
+                <a:tc>
+                  <a:txBody>
+                    <a:bodyPr wrap="none"/>
+                    <a:lstStyle/>
+                    <a:p>
+                      <a:pPr>
+                        <a:lnSpc>
+                          <a:spcPts val="1600"/>
+                        </a:lnSpc>
+                        <a:spcAft>
+                          <a:spcPts val="0"/>
+                        </a:spcAft>
+                        <a:defRPr sz="1200" b="0">
+                          <a:solidFill>
+                            <a:srgbClr val="21243A"/>
+                          </a:solidFill>
+                          <a:latin typeface="Arial"/>
+                        </a:defRPr>
+                      </a:pPr>
+                      <a:r>
+                        <a:t>C2PA Content Credentials</a:t>
                       </a:r>
                     </a:p>
                   </a:txBody>
@@ -8180,7 +10525,2346 @@
                         </a:defRPr>
                       </a:pPr>
                       <a:r>
-                        <a:t>new model analysis.</a:t>
+                        <a:t>Embedded credentials: none found. Origin remains unresolved by this check.</a:t>
+                      </a:r>
+                    </a:p>
+                  </a:txBody>
+                  <a:tcPr marL="82296" marR="82296" marT="64008" marB="64008">
+                    <a:solidFill>
+                      <a:srgbClr val="FFFFFF"/>
+                    </a:solidFill>
+                  </a:tcPr>
+                </a:tc>
+              </a:tr>
+            </a:tbl>
+          </a:graphicData>
+        </a:graphic>
+      </p:graphicFrame>
+    </p:spTree>
+  </p:cSld>
+  <p:clrMapOvr>
+    <a:masterClrMapping/>
+  </p:clrMapOvr>
+</p:sld>
+</file>
+
+<file path=ppt/slides/slide16.xml><?xml version="1.0" encoding="utf-8"?>
+<p:sld xmlns:a="http://schemas.openxmlformats.org/drawingml/2006/main" xmlns:p="http://schemas.openxmlformats.org/presentationml/2006/main" xmlns:r="http://schemas.openxmlformats.org/officeDocument/2006/relationships">
+  <p:cSld>
+    <p:spTree>
+      <p:nvGrpSpPr>
+        <p:cNvPr id="1" name=""/>
+        <p:cNvGrpSpPr/>
+        <p:nvPr/>
+      </p:nvGrpSpPr>
+      <p:grpSpPr/>
+      <p:sp>
+        <p:nvSpPr>
+          <p:cNvPr id="2" name="TextBox 1"/>
+          <p:cNvSpPr txBox="1"/>
+          <p:nvPr/>
+        </p:nvSpPr>
+        <p:spPr>
+          <a:xfrm>
+            <a:off x="365760" y="219456"/>
+            <a:ext cx="8412480" cy="228600"/>
+          </a:xfrm>
+          <a:prstGeom prst="rect">
+            <a:avLst/>
+          </a:prstGeom>
+          <a:noFill/>
+        </p:spPr>
+        <p:txBody>
+          <a:bodyPr wrap="square" lIns="0" rIns="0" tIns="0" bIns="0">
+            <a:spAutoFit/>
+          </a:bodyPr>
+          <a:lstStyle/>
+          <a:p>
+            <a:pPr>
+              <a:lnSpc>
+                <a:spcPct val="115000"/>
+              </a:lnSpc>
+              <a:spcAft>
+                <a:spcPts val="0"/>
+              </a:spcAft>
+              <a:defRPr sz="1100" b="1">
+                <a:solidFill>
+                  <a:srgbClr val="C5006A"/>
+                </a:solidFill>
+                <a:latin typeface="Arial"/>
+              </a:defRPr>
+            </a:pPr>
+            <a:r>
+              <a:t>SDA VISION / RESEARCH REPORT</a:t>
+            </a:r>
+          </a:p>
+        </p:txBody>
+      </p:sp>
+      <p:sp>
+        <p:nvSpPr>
+          <p:cNvPr id="3" name="TextBox 2"/>
+          <p:cNvSpPr txBox="1"/>
+          <p:nvPr/>
+        </p:nvSpPr>
+        <p:spPr>
+          <a:xfrm>
+            <a:off x="365760" y="658368"/>
+            <a:ext cx="8412480" cy="612648"/>
+          </a:xfrm>
+          <a:prstGeom prst="rect">
+            <a:avLst/>
+          </a:prstGeom>
+          <a:noFill/>
+        </p:spPr>
+        <p:txBody>
+          <a:bodyPr wrap="square" lIns="0" rIns="0" tIns="0" bIns="0">
+            <a:spAutoFit/>
+          </a:bodyPr>
+          <a:lstStyle/>
+          <a:p>
+            <a:pPr>
+              <a:lnSpc>
+                <a:spcPct val="115000"/>
+              </a:lnSpc>
+              <a:spcAft>
+                <a:spcPts val="0"/>
+              </a:spcAft>
+              <a:defRPr sz="2200" b="1">
+                <a:solidFill>
+                  <a:srgbClr val="21243A"/>
+                </a:solidFill>
+                <a:latin typeface="Arial"/>
+              </a:defRPr>
+            </a:pPr>
+            <a:r>
+              <a:t>Visible text</a:t>
+            </a:r>
+          </a:p>
+        </p:txBody>
+      </p:sp>
+      <p:sp>
+        <p:nvSpPr>
+          <p:cNvPr id="4" name="TextBox 3"/>
+          <p:cNvSpPr txBox="1"/>
+          <p:nvPr/>
+        </p:nvSpPr>
+        <p:spPr>
+          <a:xfrm>
+            <a:off x="365760" y="6291072"/>
+            <a:ext cx="8001000" cy="365760"/>
+          </a:xfrm>
+          <a:prstGeom prst="rect">
+            <a:avLst/>
+          </a:prstGeom>
+          <a:noFill/>
+        </p:spPr>
+        <p:txBody>
+          <a:bodyPr wrap="square" lIns="0" rIns="0" tIns="0" bIns="0">
+            <a:spAutoFit/>
+          </a:bodyPr>
+          <a:lstStyle/>
+          <a:p>
+            <a:pPr>
+              <a:lnSpc>
+                <a:spcPct val="115000"/>
+              </a:lnSpc>
+              <a:spcAft>
+                <a:spcPts val="0"/>
+              </a:spcAft>
+              <a:defRPr sz="800" b="0">
+                <a:solidFill>
+                  <a:srgbClr val="545B6D"/>
+                </a:solidFill>
+                <a:latin typeface="Arial"/>
+              </a:defRPr>
+            </a:pPr>
+            <a:r>
+              <a:t>Research assessment. Ratings are not calibrated probabilities.</a:t>
+            </a:r>
+          </a:p>
+        </p:txBody>
+      </p:sp>
+      <p:sp>
+        <p:nvSpPr>
+          <p:cNvPr id="5" name="TextBox 4"/>
+          <p:cNvSpPr txBox="1"/>
+          <p:nvPr/>
+        </p:nvSpPr>
+        <p:spPr>
+          <a:xfrm>
+            <a:off x="8394192" y="6318504"/>
+            <a:ext cx="365760" cy="228600"/>
+          </a:xfrm>
+          <a:prstGeom prst="rect">
+            <a:avLst/>
+          </a:prstGeom>
+          <a:noFill/>
+        </p:spPr>
+        <p:txBody>
+          <a:bodyPr wrap="square" lIns="0" rIns="0" tIns="0" bIns="0">
+            <a:spAutoFit/>
+          </a:bodyPr>
+          <a:lstStyle/>
+          <a:p>
+            <a:pPr>
+              <a:lnSpc>
+                <a:spcPct val="115000"/>
+              </a:lnSpc>
+              <a:spcAft>
+                <a:spcPts val="0"/>
+              </a:spcAft>
+              <a:defRPr sz="900" b="0">
+                <a:solidFill>
+                  <a:srgbClr val="545B6D"/>
+                </a:solidFill>
+                <a:latin typeface="Arial"/>
+              </a:defRPr>
+            </a:pPr>
+            <a:r>
+              <a:t>16</a:t>
+            </a:r>
+          </a:p>
+        </p:txBody>
+      </p:sp>
+      <p:graphicFrame>
+        <p:nvGraphicFramePr>
+          <p:cNvPr id="6" name="Table 5"/>
+          <p:cNvGraphicFramePr>
+            <a:graphicFrameLocks noGrp="1"/>
+          </p:cNvGraphicFramePr>
+          <p:nvPr/>
+        </p:nvGraphicFramePr>
+        <p:xfrm>
+          <a:off x="365760" y="1353312"/>
+          <a:ext cx="8412479" cy="347472"/>
+        </p:xfrm>
+        <a:graphic>
+          <a:graphicData uri="http://schemas.openxmlformats.org/drawingml/2006/table">
+            <a:tbl>
+              <a:tblPr firstRow="1" bandRow="1">
+                <a:tableStyleId>{5C22544A-7EE6-4342-B048-85BDC9FD1C3A}</a:tableStyleId>
+              </a:tblPr>
+              <a:tblGrid>
+                <a:gridCol w="2271369"/>
+                <a:gridCol w="6141110"/>
+              </a:tblGrid>
+              <a:tr h="347472">
+                <a:tc>
+                  <a:txBody>
+                    <a:bodyPr wrap="none"/>
+                    <a:lstStyle/>
+                    <a:p>
+                      <a:pPr>
+                        <a:lnSpc>
+                          <a:spcPts val="1600"/>
+                        </a:lnSpc>
+                        <a:spcAft>
+                          <a:spcPts val="0"/>
+                        </a:spcAft>
+                        <a:defRPr sz="1200" b="1">
+                          <a:solidFill>
+                            <a:srgbClr val="FFFFFF"/>
+                          </a:solidFill>
+                          <a:latin typeface="Arial"/>
+                        </a:defRPr>
+                      </a:pPr>
+                      <a:r>
+                        <a:t>Field</a:t>
+                      </a:r>
+                    </a:p>
+                  </a:txBody>
+                  <a:tcPr marL="82296" marR="82296" marT="64008" marB="64008">
+                    <a:solidFill>
+                      <a:srgbClr val="16787C"/>
+                    </a:solidFill>
+                  </a:tcPr>
+                </a:tc>
+                <a:tc>
+                  <a:txBody>
+                    <a:bodyPr wrap="none"/>
+                    <a:lstStyle/>
+                    <a:p>
+                      <a:pPr>
+                        <a:lnSpc>
+                          <a:spcPts val="1600"/>
+                        </a:lnSpc>
+                        <a:spcAft>
+                          <a:spcPts val="0"/>
+                        </a:spcAft>
+                        <a:defRPr sz="1200" b="1">
+                          <a:solidFill>
+                            <a:srgbClr val="FFFFFF"/>
+                          </a:solidFill>
+                          <a:latin typeface="Arial"/>
+                        </a:defRPr>
+                      </a:pPr>
+                      <a:r>
+                        <a:t>Recorded detail</a:t>
+                      </a:r>
+                    </a:p>
+                  </a:txBody>
+                  <a:tcPr marL="82296" marR="82296" marT="64008" marB="64008">
+                    <a:solidFill>
+                      <a:srgbClr val="16787C"/>
+                    </a:solidFill>
+                  </a:tcPr>
+                </a:tc>
+              </a:tr>
+            </a:tbl>
+          </a:graphicData>
+        </a:graphic>
+      </p:graphicFrame>
+      <p:graphicFrame>
+        <p:nvGraphicFramePr>
+          <p:cNvPr id="7" name="Table 6"/>
+          <p:cNvGraphicFramePr>
+            <a:graphicFrameLocks noGrp="1"/>
+          </p:cNvGraphicFramePr>
+          <p:nvPr/>
+        </p:nvGraphicFramePr>
+        <p:xfrm>
+          <a:off x="365760" y="1700784"/>
+          <a:ext cx="8412479" cy="2178304"/>
+        </p:xfrm>
+        <a:graphic>
+          <a:graphicData uri="http://schemas.openxmlformats.org/drawingml/2006/table">
+            <a:tbl>
+              <a:tblPr firstRow="1" bandRow="1">
+                <a:tableStyleId>{5C22544A-7EE6-4342-B048-85BDC9FD1C3A}</a:tableStyleId>
+              </a:tblPr>
+              <a:tblGrid>
+                <a:gridCol w="2271369"/>
+                <a:gridCol w="6141110"/>
+              </a:tblGrid>
+              <a:tr h="2178304">
+                <a:tc>
+                  <a:txBody>
+                    <a:bodyPr wrap="none"/>
+                    <a:lstStyle/>
+                    <a:p>
+                      <a:pPr>
+                        <a:lnSpc>
+                          <a:spcPts val="1600"/>
+                        </a:lnSpc>
+                        <a:spcAft>
+                          <a:spcPts val="0"/>
+                        </a:spcAft>
+                        <a:defRPr sz="1200" b="0">
+                          <a:solidFill>
+                            <a:srgbClr val="21243A"/>
+                          </a:solidFill>
+                          <a:latin typeface="Arial"/>
+                        </a:defRPr>
+                      </a:pPr>
+                      <a:r>
+                        <a:t>Recorded text</a:t>
+                      </a:r>
+                    </a:p>
+                  </a:txBody>
+                  <a:tcPr marL="82296" marR="82296" marT="64008" marB="64008">
+                    <a:solidFill>
+                      <a:srgbClr val="F1F7F7"/>
+                    </a:solidFill>
+                  </a:tcPr>
+                </a:tc>
+                <a:tc>
+                  <a:txBody>
+                    <a:bodyPr wrap="none"/>
+                    <a:lstStyle/>
+                    <a:p>
+                      <a:pPr>
+                        <a:lnSpc>
+                          <a:spcPts val="1600"/>
+                        </a:lnSpc>
+                        <a:spcAft>
+                          <a:spcPts val="0"/>
+                        </a:spcAft>
+                        <a:defRPr sz="1200" b="0">
+                          <a:solidFill>
+                            <a:srgbClr val="21243A"/>
+                          </a:solidFill>
+                          <a:latin typeface="Arial"/>
+                        </a:defRPr>
+                      </a:pPr>
+                      <a:r>
+                        <a:t>Research Brief • 2025</a:t>
+                      </a:r>
+                    </a:p>
+                    <a:p>
+                      <a:pPr>
+                        <a:lnSpc>
+                          <a:spcPts val="1600"/>
+                        </a:lnSpc>
+                        <a:spcAft>
+                          <a:spcPts val="0"/>
+                        </a:spcAft>
+                        <a:defRPr sz="1200" b="0">
+                          <a:solidFill>
+                            <a:srgbClr val="21243A"/>
+                          </a:solidFill>
+                          <a:latin typeface="Arial"/>
+                        </a:defRPr>
+                      </a:pPr>
+                      <a:r>
+                        <a:t>Neurological Reports Following</a:t>
+                      </a:r>
+                    </a:p>
+                    <a:p>
+                      <a:pPr>
+                        <a:lnSpc>
+                          <a:spcPts val="1600"/>
+                        </a:lnSpc>
+                        <a:spcAft>
+                          <a:spcPts val="0"/>
+                        </a:spcAft>
+                        <a:defRPr sz="1200" b="0">
+                          <a:solidFill>
+                            <a:srgbClr val="21243A"/>
+                          </a:solidFill>
+                          <a:latin typeface="Arial"/>
+                        </a:defRPr>
+                      </a:pPr>
+                      <a:r>
+                        <a:t>Immunisation: A Preliminary Review</a:t>
+                      </a:r>
+                    </a:p>
+                    <a:p>
+                      <a:pPr>
+                        <a:lnSpc>
+                          <a:spcPts val="1600"/>
+                        </a:lnSpc>
+                        <a:spcAft>
+                          <a:spcPts val="0"/>
+                        </a:spcAft>
+                        <a:defRPr sz="1200" b="0">
+                          <a:solidFill>
+                            <a:srgbClr val="21243A"/>
+                          </a:solidFill>
+                          <a:latin typeface="Arial"/>
+                        </a:defRPr>
+                      </a:pPr>
+                      <a:r>
+                        <a:t>NEW REVIEW RAISES QUESTIONS</a:t>
+                      </a:r>
+                    </a:p>
+                    <a:p>
+                      <a:pPr>
+                        <a:lnSpc>
+                          <a:spcPts val="1600"/>
+                        </a:lnSpc>
+                        <a:spcAft>
+                          <a:spcPts val="0"/>
+                        </a:spcAft>
+                        <a:defRPr sz="1200" b="0">
+                          <a:solidFill>
+                            <a:srgbClr val="21243A"/>
+                          </a:solidFill>
+                          <a:latin typeface="Arial"/>
+                        </a:defRPr>
+                      </a:pPr>
+                      <a:r>
+                        <a:t>ABOUT mRNA SHOTS</a:t>
+                      </a:r>
+                    </a:p>
+                    <a:p>
+                      <a:pPr>
+                        <a:lnSpc>
+                          <a:spcPts val="1600"/>
+                        </a:lnSpc>
+                        <a:spcAft>
+                          <a:spcPts val="0"/>
+                        </a:spcAft>
+                        <a:defRPr sz="1200" b="0">
+                          <a:solidFill>
+                            <a:srgbClr val="21243A"/>
+                          </a:solidFill>
+                          <a:latin typeface="Arial"/>
+                        </a:defRPr>
+                      </a:pPr>
+                      <a:r>
+                        <a:t>Z</a:t>
+                      </a:r>
+                    </a:p>
+                    <a:p>
+                      <a:pPr>
+                        <a:lnSpc>
+                          <a:spcPts val="1600"/>
+                        </a:lnSpc>
+                        <a:spcAft>
+                          <a:spcPts val="0"/>
+                        </a:spcAft>
+                        <a:defRPr sz="1200" b="0">
+                          <a:solidFill>
+                            <a:srgbClr val="21243A"/>
+                          </a:solidFill>
+                          <a:latin typeface="Arial"/>
+                        </a:defRPr>
+                      </a:pPr>
+                      <a:r>
+                        <a:t>Z</a:t>
+                      </a:r>
+                    </a:p>
+                    <a:p>
+                      <a:pPr>
+                        <a:lnSpc>
+                          <a:spcPts val="1600"/>
+                        </a:lnSpc>
+                        <a:spcAft>
+                          <a:spcPts val="0"/>
+                        </a:spcAft>
+                        <a:defRPr sz="1200" b="0">
+                          <a:solidFill>
+                            <a:srgbClr val="21243A"/>
+                          </a:solidFill>
+                          <a:latin typeface="Arial"/>
+                        </a:defRPr>
+                      </a:pPr>
+                      <a:r>
+                        <a:t>MOOD</a:t>
+                      </a:r>
+                    </a:p>
+                    <a:p>
+                      <a:pPr>
+                        <a:lnSpc>
+                          <a:spcPts val="1600"/>
+                        </a:lnSpc>
+                        <a:spcAft>
+                          <a:spcPts val="0"/>
+                        </a:spcAft>
+                        <a:defRPr sz="1200" b="0">
+                          <a:solidFill>
+                            <a:srgbClr val="21243A"/>
+                          </a:solidFill>
+                          <a:latin typeface="Arial"/>
+                        </a:defRPr>
+                      </a:pPr>
+                      <a:r>
+                        <a:t>MEMORY</a:t>
+                      </a:r>
+                    </a:p>
+                    <a:p>
+                      <a:pPr>
+                        <a:lnSpc>
+                          <a:spcPts val="1600"/>
+                        </a:lnSpc>
+                        <a:spcAft>
+                          <a:spcPts val="0"/>
+                        </a:spcAft>
+                        <a:defRPr sz="1200" b="0">
+                          <a:solidFill>
+                            <a:srgbClr val="21243A"/>
+                          </a:solidFill>
+                          <a:latin typeface="Arial"/>
+                        </a:defRPr>
+                      </a:pPr>
+                      <a:r>
+                        <a:t>SLEEP</a:t>
+                      </a:r>
+                    </a:p>
+                  </a:txBody>
+                  <a:tcPr marL="82296" marR="82296" marT="64008" marB="64008">
+                    <a:solidFill>
+                      <a:srgbClr val="F1F7F7"/>
+                    </a:solidFill>
+                  </a:tcPr>
+                </a:tc>
+              </a:tr>
+            </a:tbl>
+          </a:graphicData>
+        </a:graphic>
+      </p:graphicFrame>
+    </p:spTree>
+  </p:cSld>
+  <p:clrMapOvr>
+    <a:masterClrMapping/>
+  </p:clrMapOvr>
+</p:sld>
+</file>
+
+<file path=ppt/slides/slide17.xml><?xml version="1.0" encoding="utf-8"?>
+<p:sld xmlns:a="http://schemas.openxmlformats.org/drawingml/2006/main" xmlns:p="http://schemas.openxmlformats.org/presentationml/2006/main" xmlns:r="http://schemas.openxmlformats.org/officeDocument/2006/relationships">
+  <p:cSld>
+    <p:spTree>
+      <p:nvGrpSpPr>
+        <p:cNvPr id="1" name=""/>
+        <p:cNvGrpSpPr/>
+        <p:nvPr/>
+      </p:nvGrpSpPr>
+      <p:grpSpPr/>
+      <p:sp>
+        <p:nvSpPr>
+          <p:cNvPr id="2" name="TextBox 1"/>
+          <p:cNvSpPr txBox="1"/>
+          <p:nvPr/>
+        </p:nvSpPr>
+        <p:spPr>
+          <a:xfrm>
+            <a:off x="365760" y="219456"/>
+            <a:ext cx="8412480" cy="228600"/>
+          </a:xfrm>
+          <a:prstGeom prst="rect">
+            <a:avLst/>
+          </a:prstGeom>
+          <a:noFill/>
+        </p:spPr>
+        <p:txBody>
+          <a:bodyPr wrap="square" lIns="0" rIns="0" tIns="0" bIns="0">
+            <a:spAutoFit/>
+          </a:bodyPr>
+          <a:lstStyle/>
+          <a:p>
+            <a:pPr>
+              <a:lnSpc>
+                <a:spcPct val="115000"/>
+              </a:lnSpc>
+              <a:spcAft>
+                <a:spcPts val="0"/>
+              </a:spcAft>
+              <a:defRPr sz="1100" b="1">
+                <a:solidFill>
+                  <a:srgbClr val="C5006A"/>
+                </a:solidFill>
+                <a:latin typeface="Arial"/>
+              </a:defRPr>
+            </a:pPr>
+            <a:r>
+              <a:t>SDA VISION / RESEARCH REPORT</a:t>
+            </a:r>
+          </a:p>
+        </p:txBody>
+      </p:sp>
+      <p:sp>
+        <p:nvSpPr>
+          <p:cNvPr id="3" name="TextBox 2"/>
+          <p:cNvSpPr txBox="1"/>
+          <p:nvPr/>
+        </p:nvSpPr>
+        <p:spPr>
+          <a:xfrm>
+            <a:off x="365760" y="658368"/>
+            <a:ext cx="8412480" cy="612648"/>
+          </a:xfrm>
+          <a:prstGeom prst="rect">
+            <a:avLst/>
+          </a:prstGeom>
+          <a:noFill/>
+        </p:spPr>
+        <p:txBody>
+          <a:bodyPr wrap="square" lIns="0" rIns="0" tIns="0" bIns="0">
+            <a:spAutoFit/>
+          </a:bodyPr>
+          <a:lstStyle/>
+          <a:p>
+            <a:pPr>
+              <a:lnSpc>
+                <a:spcPct val="115000"/>
+              </a:lnSpc>
+              <a:spcAft>
+                <a:spcPts val="0"/>
+              </a:spcAft>
+              <a:defRPr sz="2200" b="1">
+                <a:solidFill>
+                  <a:srgbClr val="21243A"/>
+                </a:solidFill>
+                <a:latin typeface="Arial"/>
+              </a:defRPr>
+            </a:pPr>
+            <a:r>
+              <a:t>How this assessment was reached</a:t>
+            </a:r>
+          </a:p>
+        </p:txBody>
+      </p:sp>
+      <p:sp>
+        <p:nvSpPr>
+          <p:cNvPr id="4" name="TextBox 3"/>
+          <p:cNvSpPr txBox="1"/>
+          <p:nvPr/>
+        </p:nvSpPr>
+        <p:spPr>
+          <a:xfrm>
+            <a:off x="365760" y="6291072"/>
+            <a:ext cx="8001000" cy="365760"/>
+          </a:xfrm>
+          <a:prstGeom prst="rect">
+            <a:avLst/>
+          </a:prstGeom>
+          <a:noFill/>
+        </p:spPr>
+        <p:txBody>
+          <a:bodyPr wrap="square" lIns="0" rIns="0" tIns="0" bIns="0">
+            <a:spAutoFit/>
+          </a:bodyPr>
+          <a:lstStyle/>
+          <a:p>
+            <a:pPr>
+              <a:lnSpc>
+                <a:spcPct val="115000"/>
+              </a:lnSpc>
+              <a:spcAft>
+                <a:spcPts val="0"/>
+              </a:spcAft>
+              <a:defRPr sz="800" b="0">
+                <a:solidFill>
+                  <a:srgbClr val="545B6D"/>
+                </a:solidFill>
+                <a:latin typeface="Arial"/>
+              </a:defRPr>
+            </a:pPr>
+            <a:r>
+              <a:t>Research assessment. Ratings are not calibrated probabilities.</a:t>
+            </a:r>
+          </a:p>
+        </p:txBody>
+      </p:sp>
+      <p:sp>
+        <p:nvSpPr>
+          <p:cNvPr id="5" name="TextBox 4"/>
+          <p:cNvSpPr txBox="1"/>
+          <p:nvPr/>
+        </p:nvSpPr>
+        <p:spPr>
+          <a:xfrm>
+            <a:off x="8394192" y="6318504"/>
+            <a:ext cx="365760" cy="228600"/>
+          </a:xfrm>
+          <a:prstGeom prst="rect">
+            <a:avLst/>
+          </a:prstGeom>
+          <a:noFill/>
+        </p:spPr>
+        <p:txBody>
+          <a:bodyPr wrap="square" lIns="0" rIns="0" tIns="0" bIns="0">
+            <a:spAutoFit/>
+          </a:bodyPr>
+          <a:lstStyle/>
+          <a:p>
+            <a:pPr>
+              <a:lnSpc>
+                <a:spcPct val="115000"/>
+              </a:lnSpc>
+              <a:spcAft>
+                <a:spcPts val="0"/>
+              </a:spcAft>
+              <a:defRPr sz="900" b="0">
+                <a:solidFill>
+                  <a:srgbClr val="545B6D"/>
+                </a:solidFill>
+                <a:latin typeface="Arial"/>
+              </a:defRPr>
+            </a:pPr>
+            <a:r>
+              <a:t>17</a:t>
+            </a:r>
+          </a:p>
+        </p:txBody>
+      </p:sp>
+      <p:graphicFrame>
+        <p:nvGraphicFramePr>
+          <p:cNvPr id="6" name="Table 5"/>
+          <p:cNvGraphicFramePr>
+            <a:graphicFrameLocks noGrp="1"/>
+          </p:cNvGraphicFramePr>
+          <p:nvPr/>
+        </p:nvGraphicFramePr>
+        <p:xfrm>
+          <a:off x="365760" y="1353312"/>
+          <a:ext cx="8412479" cy="347472"/>
+        </p:xfrm>
+        <a:graphic>
+          <a:graphicData uri="http://schemas.openxmlformats.org/drawingml/2006/table">
+            <a:tbl>
+              <a:tblPr firstRow="1" bandRow="1">
+                <a:tableStyleId>{5C22544A-7EE6-4342-B048-85BDC9FD1C3A}</a:tableStyleId>
+              </a:tblPr>
+              <a:tblGrid>
+                <a:gridCol w="2271369"/>
+                <a:gridCol w="6141110"/>
+              </a:tblGrid>
+              <a:tr h="347472">
+                <a:tc>
+                  <a:txBody>
+                    <a:bodyPr wrap="none"/>
+                    <a:lstStyle/>
+                    <a:p>
+                      <a:pPr>
+                        <a:lnSpc>
+                          <a:spcPts val="1600"/>
+                        </a:lnSpc>
+                        <a:spcAft>
+                          <a:spcPts val="0"/>
+                        </a:spcAft>
+                        <a:defRPr sz="1200" b="1">
+                          <a:solidFill>
+                            <a:srgbClr val="FFFFFF"/>
+                          </a:solidFill>
+                          <a:latin typeface="Arial"/>
+                        </a:defRPr>
+                      </a:pPr>
+                      <a:r>
+                        <a:t>Field</a:t>
+                      </a:r>
+                    </a:p>
+                  </a:txBody>
+                  <a:tcPr marL="82296" marR="82296" marT="64008" marB="64008">
+                    <a:solidFill>
+                      <a:srgbClr val="16787C"/>
+                    </a:solidFill>
+                  </a:tcPr>
+                </a:tc>
+                <a:tc>
+                  <a:txBody>
+                    <a:bodyPr wrap="none"/>
+                    <a:lstStyle/>
+                    <a:p>
+                      <a:pPr>
+                        <a:lnSpc>
+                          <a:spcPts val="1600"/>
+                        </a:lnSpc>
+                        <a:spcAft>
+                          <a:spcPts val="0"/>
+                        </a:spcAft>
+                        <a:defRPr sz="1200" b="1">
+                          <a:solidFill>
+                            <a:srgbClr val="FFFFFF"/>
+                          </a:solidFill>
+                          <a:latin typeface="Arial"/>
+                        </a:defRPr>
+                      </a:pPr>
+                      <a:r>
+                        <a:t>Recorded detail</a:t>
+                      </a:r>
+                    </a:p>
+                  </a:txBody>
+                  <a:tcPr marL="82296" marR="82296" marT="64008" marB="64008">
+                    <a:solidFill>
+                      <a:srgbClr val="16787C"/>
+                    </a:solidFill>
+                  </a:tcPr>
+                </a:tc>
+              </a:tr>
+            </a:tbl>
+          </a:graphicData>
+        </a:graphic>
+      </p:graphicFrame>
+      <p:graphicFrame>
+        <p:nvGraphicFramePr>
+          <p:cNvPr id="7" name="Table 6"/>
+          <p:cNvGraphicFramePr>
+            <a:graphicFrameLocks noGrp="1"/>
+          </p:cNvGraphicFramePr>
+          <p:nvPr/>
+        </p:nvGraphicFramePr>
+        <p:xfrm>
+          <a:off x="365760" y="1700784"/>
+          <a:ext cx="8412479" cy="552704"/>
+        </p:xfrm>
+        <a:graphic>
+          <a:graphicData uri="http://schemas.openxmlformats.org/drawingml/2006/table">
+            <a:tbl>
+              <a:tblPr firstRow="1" bandRow="1">
+                <a:tableStyleId>{5C22544A-7EE6-4342-B048-85BDC9FD1C3A}</a:tableStyleId>
+              </a:tblPr>
+              <a:tblGrid>
+                <a:gridCol w="2271369"/>
+                <a:gridCol w="6141110"/>
+              </a:tblGrid>
+              <a:tr h="552704">
+                <a:tc>
+                  <a:txBody>
+                    <a:bodyPr wrap="none"/>
+                    <a:lstStyle/>
+                    <a:p>
+                      <a:pPr>
+                        <a:lnSpc>
+                          <a:spcPts val="1600"/>
+                        </a:lnSpc>
+                        <a:spcAft>
+                          <a:spcPts val="0"/>
+                        </a:spcAft>
+                        <a:defRPr sz="1200" b="0">
+                          <a:solidFill>
+                            <a:srgbClr val="21243A"/>
+                          </a:solidFill>
+                          <a:latin typeface="Arial"/>
+                        </a:defRPr>
+                      </a:pPr>
+                      <a:r>
+                        <a:t>1. override</a:t>
+                      </a:r>
+                    </a:p>
+                  </a:txBody>
+                  <a:tcPr marL="82296" marR="82296" marT="64008" marB="64008">
+                    <a:solidFill>
+                      <a:srgbClr val="F1F7F7"/>
+                    </a:solidFill>
+                  </a:tcPr>
+                </a:tc>
+                <a:tc>
+                  <a:txBody>
+                    <a:bodyPr wrap="none"/>
+                    <a:lstStyle/>
+                    <a:p>
+                      <a:pPr>
+                        <a:lnSpc>
+                          <a:spcPts val="1600"/>
+                        </a:lnSpc>
+                        <a:spcAft>
+                          <a:spcPts val="0"/>
+                        </a:spcAft>
+                        <a:defRPr sz="1200" b="0">
+                          <a:solidFill>
+                            <a:srgbClr val="21243A"/>
+                          </a:solidFill>
+                          <a:latin typeface="Arial"/>
+                        </a:defRPr>
+                      </a:pPr>
+                      <a:r>
+                        <a:t>outcome=none; detail=No confirmed C2PA AI assertion or SynthID watermark.</a:t>
+                      </a:r>
+                    </a:p>
+                    <a:p>
+                      <a:pPr>
+                        <a:lnSpc>
+                          <a:spcPts val="1600"/>
+                        </a:lnSpc>
+                        <a:spcAft>
+                          <a:spcPts val="0"/>
+                        </a:spcAft>
+                        <a:defRPr sz="1200" b="0">
+                          <a:solidFill>
+                            <a:srgbClr val="21243A"/>
+                          </a:solidFill>
+                          <a:latin typeface="Arial"/>
+                        </a:defRPr>
+                      </a:pPr>
+                      <a:r>
+                        <a:t>Origin remains unresolved by these checks.</a:t>
+                      </a:r>
+                    </a:p>
+                  </a:txBody>
+                  <a:tcPr marL="82296" marR="82296" marT="64008" marB="64008">
+                    <a:solidFill>
+                      <a:srgbClr val="F1F7F7"/>
+                    </a:solidFill>
+                  </a:tcPr>
+                </a:tc>
+              </a:tr>
+            </a:tbl>
+          </a:graphicData>
+        </a:graphic>
+      </p:graphicFrame>
+      <p:graphicFrame>
+        <p:nvGraphicFramePr>
+          <p:cNvPr id="8" name="Table 7"/>
+          <p:cNvGraphicFramePr>
+            <a:graphicFrameLocks noGrp="1"/>
+          </p:cNvGraphicFramePr>
+          <p:nvPr/>
+        </p:nvGraphicFramePr>
+        <p:xfrm>
+          <a:off x="365760" y="2253488"/>
+          <a:ext cx="8412479" cy="552704"/>
+        </p:xfrm>
+        <a:graphic>
+          <a:graphicData uri="http://schemas.openxmlformats.org/drawingml/2006/table">
+            <a:tbl>
+              <a:tblPr firstRow="1" bandRow="1">
+                <a:tableStyleId>{5C22544A-7EE6-4342-B048-85BDC9FD1C3A}</a:tableStyleId>
+              </a:tblPr>
+              <a:tblGrid>
+                <a:gridCol w="2271369"/>
+                <a:gridCol w="6141110"/>
+              </a:tblGrid>
+              <a:tr h="552704">
+                <a:tc>
+                  <a:txBody>
+                    <a:bodyPr wrap="none"/>
+                    <a:lstStyle/>
+                    <a:p>
+                      <a:pPr>
+                        <a:lnSpc>
+                          <a:spcPts val="1600"/>
+                        </a:lnSpc>
+                        <a:spcAft>
+                          <a:spcPts val="0"/>
+                        </a:spcAft>
+                        <a:defRPr sz="1200" b="0">
+                          <a:solidFill>
+                            <a:srgbClr val="21243A"/>
+                          </a:solidFill>
+                          <a:latin typeface="Arial"/>
+                        </a:defRPr>
+                      </a:pPr>
+                      <a:r>
+                        <a:t>2. model_agreement</a:t>
+                      </a:r>
+                    </a:p>
+                  </a:txBody>
+                  <a:tcPr marL="82296" marR="82296" marT="64008" marB="64008">
+                    <a:solidFill>
+                      <a:srgbClr val="FFFFFF"/>
+                    </a:solidFill>
+                  </a:tcPr>
+                </a:tc>
+                <a:tc>
+                  <a:txBody>
+                    <a:bodyPr wrap="none"/>
+                    <a:lstStyle/>
+                    <a:p>
+                      <a:pPr>
+                        <a:lnSpc>
+                          <a:spcPts val="1600"/>
+                        </a:lnSpc>
+                        <a:spcAft>
+                          <a:spcPts val="0"/>
+                        </a:spcAft>
+                        <a:defRPr sz="1200" b="0">
+                          <a:solidFill>
+                            <a:srgbClr val="21243A"/>
+                          </a:solidFill>
+                          <a:latin typeface="Arial"/>
+                        </a:defRPr>
+                      </a:pPr>
+                      <a:r>
+                        <a:t>synthetic=['Claude Vision', 'OpenAI Vision', 'Gemini Vision']; authentic=[];</a:t>
+                      </a:r>
+                    </a:p>
+                    <a:p>
+                      <a:pPr>
+                        <a:lnSpc>
+                          <a:spcPts val="1600"/>
+                        </a:lnSpc>
+                        <a:spcAft>
+                          <a:spcPts val="0"/>
+                        </a:spcAft>
+                        <a:defRPr sz="1200" b="0">
+                          <a:solidFill>
+                            <a:srgbClr val="21243A"/>
+                          </a:solidFill>
+                          <a:latin typeface="Arial"/>
+                        </a:defRPr>
+                      </a:pPr>
+                      <a:r>
+                        <a:t>uncertain=[]; forensic_supports_synthetic=False</a:t>
+                      </a:r>
+                    </a:p>
+                  </a:txBody>
+                  <a:tcPr marL="82296" marR="82296" marT="64008" marB="64008">
+                    <a:solidFill>
+                      <a:srgbClr val="FFFFFF"/>
+                    </a:solidFill>
+                  </a:tcPr>
+                </a:tc>
+              </a:tr>
+            </a:tbl>
+          </a:graphicData>
+        </a:graphic>
+      </p:graphicFrame>
+      <p:graphicFrame>
+        <p:nvGraphicFramePr>
+          <p:cNvPr id="9" name="Table 8"/>
+          <p:cNvGraphicFramePr>
+            <a:graphicFrameLocks noGrp="1"/>
+          </p:cNvGraphicFramePr>
+          <p:nvPr/>
+        </p:nvGraphicFramePr>
+        <p:xfrm>
+          <a:off x="365760" y="2806192"/>
+          <a:ext cx="8412479" cy="552704"/>
+        </p:xfrm>
+        <a:graphic>
+          <a:graphicData uri="http://schemas.openxmlformats.org/drawingml/2006/table">
+            <a:tbl>
+              <a:tblPr firstRow="1" bandRow="1">
+                <a:tableStyleId>{5C22544A-7EE6-4342-B048-85BDC9FD1C3A}</a:tableStyleId>
+              </a:tblPr>
+              <a:tblGrid>
+                <a:gridCol w="2271369"/>
+                <a:gridCol w="6141110"/>
+              </a:tblGrid>
+              <a:tr h="552704">
+                <a:tc>
+                  <a:txBody>
+                    <a:bodyPr wrap="none"/>
+                    <a:lstStyle/>
+                    <a:p>
+                      <a:pPr>
+                        <a:lnSpc>
+                          <a:spcPts val="1600"/>
+                        </a:lnSpc>
+                        <a:spcAft>
+                          <a:spcPts val="0"/>
+                        </a:spcAft>
+                        <a:defRPr sz="1200" b="0">
+                          <a:solidFill>
+                            <a:srgbClr val="21243A"/>
+                          </a:solidFill>
+                          <a:latin typeface="Arial"/>
+                        </a:defRPr>
+                      </a:pPr>
+                      <a:r>
+                        <a:t>3. verdict</a:t>
+                      </a:r>
+                    </a:p>
+                  </a:txBody>
+                  <a:tcPr marL="82296" marR="82296" marT="64008" marB="64008">
+                    <a:solidFill>
+                      <a:srgbClr val="F1F7F7"/>
+                    </a:solidFill>
+                  </a:tcPr>
+                </a:tc>
+                <a:tc>
+                  <a:txBody>
+                    <a:bodyPr wrap="none"/>
+                    <a:lstStyle/>
+                    <a:p>
+                      <a:pPr>
+                        <a:lnSpc>
+                          <a:spcPts val="1600"/>
+                        </a:lnSpc>
+                        <a:spcAft>
+                          <a:spcPts val="0"/>
+                        </a:spcAft>
+                        <a:defRPr sz="1200" b="0">
+                          <a:solidFill>
+                            <a:srgbClr val="21243A"/>
+                          </a:solidFill>
+                          <a:latin typeface="Arial"/>
+                        </a:defRPr>
+                      </a:pPr>
+                      <a:r>
+                        <a:t>value=synthetic_likely; confidence=high; reason=3 models agree this is likely</a:t>
+                      </a:r>
+                    </a:p>
+                    <a:p>
+                      <a:pPr>
+                        <a:lnSpc>
+                          <a:spcPts val="1600"/>
+                        </a:lnSpc>
+                        <a:spcAft>
+                          <a:spcPts val="0"/>
+                        </a:spcAft>
+                        <a:defRPr sz="1200" b="0">
+                          <a:solidFill>
+                            <a:srgbClr val="21243A"/>
+                          </a:solidFill>
+                          <a:latin typeface="Arial"/>
+                        </a:defRPr>
+                      </a:pPr>
+                      <a:r>
+                        <a:t>synthetic.</a:t>
+                      </a:r>
+                    </a:p>
+                  </a:txBody>
+                  <a:tcPr marL="82296" marR="82296" marT="64008" marB="64008">
+                    <a:solidFill>
+                      <a:srgbClr val="F1F7F7"/>
+                    </a:solidFill>
+                  </a:tcPr>
+                </a:tc>
+              </a:tr>
+            </a:tbl>
+          </a:graphicData>
+        </a:graphic>
+      </p:graphicFrame>
+    </p:spTree>
+  </p:cSld>
+  <p:clrMapOvr>
+    <a:masterClrMapping/>
+  </p:clrMapOvr>
+</p:sld>
+</file>
+
+<file path=ppt/slides/slide18.xml><?xml version="1.0" encoding="utf-8"?>
+<p:sld xmlns:a="http://schemas.openxmlformats.org/drawingml/2006/main" xmlns:p="http://schemas.openxmlformats.org/presentationml/2006/main" xmlns:r="http://schemas.openxmlformats.org/officeDocument/2006/relationships">
+  <p:cSld>
+    <p:spTree>
+      <p:nvGrpSpPr>
+        <p:cNvPr id="1" name=""/>
+        <p:cNvGrpSpPr/>
+        <p:nvPr/>
+      </p:nvGrpSpPr>
+      <p:grpSpPr/>
+      <p:sp>
+        <p:nvSpPr>
+          <p:cNvPr id="2" name="TextBox 1"/>
+          <p:cNvSpPr txBox="1"/>
+          <p:nvPr/>
+        </p:nvSpPr>
+        <p:spPr>
+          <a:xfrm>
+            <a:off x="365760" y="219456"/>
+            <a:ext cx="8412480" cy="228600"/>
+          </a:xfrm>
+          <a:prstGeom prst="rect">
+            <a:avLst/>
+          </a:prstGeom>
+          <a:noFill/>
+        </p:spPr>
+        <p:txBody>
+          <a:bodyPr wrap="square" lIns="0" rIns="0" tIns="0" bIns="0">
+            <a:spAutoFit/>
+          </a:bodyPr>
+          <a:lstStyle/>
+          <a:p>
+            <a:pPr>
+              <a:lnSpc>
+                <a:spcPct val="115000"/>
+              </a:lnSpc>
+              <a:spcAft>
+                <a:spcPts val="0"/>
+              </a:spcAft>
+              <a:defRPr sz="1100" b="1">
+                <a:solidFill>
+                  <a:srgbClr val="C5006A"/>
+                </a:solidFill>
+                <a:latin typeface="Arial"/>
+              </a:defRPr>
+            </a:pPr>
+            <a:r>
+              <a:t>SDA VISION / RESEARCH REPORT</a:t>
+            </a:r>
+          </a:p>
+        </p:txBody>
+      </p:sp>
+      <p:sp>
+        <p:nvSpPr>
+          <p:cNvPr id="3" name="TextBox 2"/>
+          <p:cNvSpPr txBox="1"/>
+          <p:nvPr/>
+        </p:nvSpPr>
+        <p:spPr>
+          <a:xfrm>
+            <a:off x="365760" y="658368"/>
+            <a:ext cx="8412480" cy="612648"/>
+          </a:xfrm>
+          <a:prstGeom prst="rect">
+            <a:avLst/>
+          </a:prstGeom>
+          <a:noFill/>
+        </p:spPr>
+        <p:txBody>
+          <a:bodyPr wrap="square" lIns="0" rIns="0" tIns="0" bIns="0">
+            <a:spAutoFit/>
+          </a:bodyPr>
+          <a:lstStyle/>
+          <a:p>
+            <a:pPr>
+              <a:lnSpc>
+                <a:spcPct val="115000"/>
+              </a:lnSpc>
+              <a:spcAft>
+                <a:spcPts val="0"/>
+              </a:spcAft>
+              <a:defRPr sz="2200" b="1">
+                <a:solidFill>
+                  <a:srgbClr val="21243A"/>
+                </a:solidFill>
+                <a:latin typeface="Arial"/>
+              </a:defRPr>
+            </a:pPr>
+            <a:r>
+              <a:t>File and analysis record</a:t>
+            </a:r>
+          </a:p>
+        </p:txBody>
+      </p:sp>
+      <p:sp>
+        <p:nvSpPr>
+          <p:cNvPr id="4" name="TextBox 3"/>
+          <p:cNvSpPr txBox="1"/>
+          <p:nvPr/>
+        </p:nvSpPr>
+        <p:spPr>
+          <a:xfrm>
+            <a:off x="365760" y="6291072"/>
+            <a:ext cx="8001000" cy="365760"/>
+          </a:xfrm>
+          <a:prstGeom prst="rect">
+            <a:avLst/>
+          </a:prstGeom>
+          <a:noFill/>
+        </p:spPr>
+        <p:txBody>
+          <a:bodyPr wrap="square" lIns="0" rIns="0" tIns="0" bIns="0">
+            <a:spAutoFit/>
+          </a:bodyPr>
+          <a:lstStyle/>
+          <a:p>
+            <a:pPr>
+              <a:lnSpc>
+                <a:spcPct val="115000"/>
+              </a:lnSpc>
+              <a:spcAft>
+                <a:spcPts val="0"/>
+              </a:spcAft>
+              <a:defRPr sz="800" b="0">
+                <a:solidFill>
+                  <a:srgbClr val="545B6D"/>
+                </a:solidFill>
+                <a:latin typeface="Arial"/>
+              </a:defRPr>
+            </a:pPr>
+            <a:r>
+              <a:t>Research assessment. Ratings are not calibrated probabilities.</a:t>
+            </a:r>
+          </a:p>
+        </p:txBody>
+      </p:sp>
+      <p:sp>
+        <p:nvSpPr>
+          <p:cNvPr id="5" name="TextBox 4"/>
+          <p:cNvSpPr txBox="1"/>
+          <p:nvPr/>
+        </p:nvSpPr>
+        <p:spPr>
+          <a:xfrm>
+            <a:off x="8394192" y="6318504"/>
+            <a:ext cx="365760" cy="228600"/>
+          </a:xfrm>
+          <a:prstGeom prst="rect">
+            <a:avLst/>
+          </a:prstGeom>
+          <a:noFill/>
+        </p:spPr>
+        <p:txBody>
+          <a:bodyPr wrap="square" lIns="0" rIns="0" tIns="0" bIns="0">
+            <a:spAutoFit/>
+          </a:bodyPr>
+          <a:lstStyle/>
+          <a:p>
+            <a:pPr>
+              <a:lnSpc>
+                <a:spcPct val="115000"/>
+              </a:lnSpc>
+              <a:spcAft>
+                <a:spcPts val="0"/>
+              </a:spcAft>
+              <a:defRPr sz="900" b="0">
+                <a:solidFill>
+                  <a:srgbClr val="545B6D"/>
+                </a:solidFill>
+                <a:latin typeface="Arial"/>
+              </a:defRPr>
+            </a:pPr>
+            <a:r>
+              <a:t>18</a:t>
+            </a:r>
+          </a:p>
+        </p:txBody>
+      </p:sp>
+      <p:graphicFrame>
+        <p:nvGraphicFramePr>
+          <p:cNvPr id="6" name="Table 5"/>
+          <p:cNvGraphicFramePr>
+            <a:graphicFrameLocks noGrp="1"/>
+          </p:cNvGraphicFramePr>
+          <p:nvPr/>
+        </p:nvGraphicFramePr>
+        <p:xfrm>
+          <a:off x="365760" y="1353312"/>
+          <a:ext cx="8412479" cy="347472"/>
+        </p:xfrm>
+        <a:graphic>
+          <a:graphicData uri="http://schemas.openxmlformats.org/drawingml/2006/table">
+            <a:tbl>
+              <a:tblPr firstRow="1" bandRow="1">
+                <a:tableStyleId>{5C22544A-7EE6-4342-B048-85BDC9FD1C3A}</a:tableStyleId>
+              </a:tblPr>
+              <a:tblGrid>
+                <a:gridCol w="2271369"/>
+                <a:gridCol w="6141110"/>
+              </a:tblGrid>
+              <a:tr h="347472">
+                <a:tc>
+                  <a:txBody>
+                    <a:bodyPr wrap="none"/>
+                    <a:lstStyle/>
+                    <a:p>
+                      <a:pPr>
+                        <a:lnSpc>
+                          <a:spcPts val="1600"/>
+                        </a:lnSpc>
+                        <a:spcAft>
+                          <a:spcPts val="0"/>
+                        </a:spcAft>
+                        <a:defRPr sz="1200" b="1">
+                          <a:solidFill>
+                            <a:srgbClr val="FFFFFF"/>
+                          </a:solidFill>
+                          <a:latin typeface="Arial"/>
+                        </a:defRPr>
+                      </a:pPr>
+                      <a:r>
+                        <a:t>Field</a:t>
+                      </a:r>
+                    </a:p>
+                  </a:txBody>
+                  <a:tcPr marL="82296" marR="82296" marT="64008" marB="64008">
+                    <a:solidFill>
+                      <a:srgbClr val="16787C"/>
+                    </a:solidFill>
+                  </a:tcPr>
+                </a:tc>
+                <a:tc>
+                  <a:txBody>
+                    <a:bodyPr wrap="none"/>
+                    <a:lstStyle/>
+                    <a:p>
+                      <a:pPr>
+                        <a:lnSpc>
+                          <a:spcPts val="1600"/>
+                        </a:lnSpc>
+                        <a:spcAft>
+                          <a:spcPts val="0"/>
+                        </a:spcAft>
+                        <a:defRPr sz="1200" b="1">
+                          <a:solidFill>
+                            <a:srgbClr val="FFFFFF"/>
+                          </a:solidFill>
+                          <a:latin typeface="Arial"/>
+                        </a:defRPr>
+                      </a:pPr>
+                      <a:r>
+                        <a:t>Recorded detail</a:t>
+                      </a:r>
+                    </a:p>
+                  </a:txBody>
+                  <a:tcPr marL="82296" marR="82296" marT="64008" marB="64008">
+                    <a:solidFill>
+                      <a:srgbClr val="16787C"/>
+                    </a:solidFill>
+                  </a:tcPr>
+                </a:tc>
+              </a:tr>
+            </a:tbl>
+          </a:graphicData>
+        </a:graphic>
+      </p:graphicFrame>
+      <p:graphicFrame>
+        <p:nvGraphicFramePr>
+          <p:cNvPr id="7" name="Table 6"/>
+          <p:cNvGraphicFramePr>
+            <a:graphicFrameLocks noGrp="1"/>
+          </p:cNvGraphicFramePr>
+          <p:nvPr/>
+        </p:nvGraphicFramePr>
+        <p:xfrm>
+          <a:off x="365760" y="1700784"/>
+          <a:ext cx="8412479" cy="349504"/>
+        </p:xfrm>
+        <a:graphic>
+          <a:graphicData uri="http://schemas.openxmlformats.org/drawingml/2006/table">
+            <a:tbl>
+              <a:tblPr firstRow="1" bandRow="1">
+                <a:tableStyleId>{5C22544A-7EE6-4342-B048-85BDC9FD1C3A}</a:tableStyleId>
+              </a:tblPr>
+              <a:tblGrid>
+                <a:gridCol w="2271369"/>
+                <a:gridCol w="6141110"/>
+              </a:tblGrid>
+              <a:tr h="349504">
+                <a:tc>
+                  <a:txBody>
+                    <a:bodyPr wrap="none"/>
+                    <a:lstStyle/>
+                    <a:p>
+                      <a:pPr>
+                        <a:lnSpc>
+                          <a:spcPts val="1600"/>
+                        </a:lnSpc>
+                        <a:spcAft>
+                          <a:spcPts val="0"/>
+                        </a:spcAft>
+                        <a:defRPr sz="1200" b="0">
+                          <a:solidFill>
+                            <a:srgbClr val="21243A"/>
+                          </a:solidFill>
+                          <a:latin typeface="Arial"/>
+                        </a:defRPr>
+                      </a:pPr>
+                      <a:r>
+                        <a:t>File</a:t>
+                      </a:r>
+                    </a:p>
+                  </a:txBody>
+                  <a:tcPr marL="82296" marR="82296" marT="64008" marB="64008">
+                    <a:solidFill>
+                      <a:srgbClr val="F1F7F7"/>
+                    </a:solidFill>
+                  </a:tcPr>
+                </a:tc>
+                <a:tc>
+                  <a:txBody>
+                    <a:bodyPr wrap="none"/>
+                    <a:lstStyle/>
+                    <a:p>
+                      <a:pPr>
+                        <a:lnSpc>
+                          <a:spcPts val="1600"/>
+                        </a:lnSpc>
+                        <a:spcAft>
+                          <a:spcPts val="0"/>
+                        </a:spcAft>
+                        <a:defRPr sz="1200" b="0">
+                          <a:solidFill>
+                            <a:srgbClr val="21243A"/>
+                          </a:solidFill>
+                          <a:latin typeface="Arial"/>
+                        </a:defRPr>
+                      </a:pPr>
+                      <a:r>
+                        <a:t>journal-image.png</a:t>
+                      </a:r>
+                    </a:p>
+                  </a:txBody>
+                  <a:tcPr marL="82296" marR="82296" marT="64008" marB="64008">
+                    <a:solidFill>
+                      <a:srgbClr val="F1F7F7"/>
+                    </a:solidFill>
+                  </a:tcPr>
+                </a:tc>
+              </a:tr>
+            </a:tbl>
+          </a:graphicData>
+        </a:graphic>
+      </p:graphicFrame>
+      <p:graphicFrame>
+        <p:nvGraphicFramePr>
+          <p:cNvPr id="8" name="Table 7"/>
+          <p:cNvGraphicFramePr>
+            <a:graphicFrameLocks noGrp="1"/>
+          </p:cNvGraphicFramePr>
+          <p:nvPr/>
+        </p:nvGraphicFramePr>
+        <p:xfrm>
+          <a:off x="365760" y="2050288"/>
+          <a:ext cx="8412479" cy="349504"/>
+        </p:xfrm>
+        <a:graphic>
+          <a:graphicData uri="http://schemas.openxmlformats.org/drawingml/2006/table">
+            <a:tbl>
+              <a:tblPr firstRow="1" bandRow="1">
+                <a:tableStyleId>{5C22544A-7EE6-4342-B048-85BDC9FD1C3A}</a:tableStyleId>
+              </a:tblPr>
+              <a:tblGrid>
+                <a:gridCol w="2271369"/>
+                <a:gridCol w="6141110"/>
+              </a:tblGrid>
+              <a:tr h="349504">
+                <a:tc>
+                  <a:txBody>
+                    <a:bodyPr wrap="none"/>
+                    <a:lstStyle/>
+                    <a:p>
+                      <a:pPr>
+                        <a:lnSpc>
+                          <a:spcPts val="1600"/>
+                        </a:lnSpc>
+                        <a:spcAft>
+                          <a:spcPts val="0"/>
+                        </a:spcAft>
+                        <a:defRPr sz="1200" b="0">
+                          <a:solidFill>
+                            <a:srgbClr val="21243A"/>
+                          </a:solidFill>
+                          <a:latin typeface="Arial"/>
+                        </a:defRPr>
+                      </a:pPr>
+                      <a:r>
+                        <a:t>Analysis ID</a:t>
+                      </a:r>
+                    </a:p>
+                  </a:txBody>
+                  <a:tcPr marL="82296" marR="82296" marT="64008" marB="64008">
+                    <a:solidFill>
+                      <a:srgbClr val="FFFFFF"/>
+                    </a:solidFill>
+                  </a:tcPr>
+                </a:tc>
+                <a:tc>
+                  <a:txBody>
+                    <a:bodyPr wrap="none"/>
+                    <a:lstStyle/>
+                    <a:p>
+                      <a:pPr>
+                        <a:lnSpc>
+                          <a:spcPts val="1600"/>
+                        </a:lnSpc>
+                        <a:spcAft>
+                          <a:spcPts val="0"/>
+                        </a:spcAft>
+                        <a:defRPr sz="1200" b="0">
+                          <a:solidFill>
+                            <a:srgbClr val="21243A"/>
+                          </a:solidFill>
+                          <a:latin typeface="Arial"/>
+                        </a:defRPr>
+                      </a:pPr>
+                      <a:r>
+                        <a:t>edbcc4b1-e980-4105-87b5-1bcf9bc171af</a:t>
+                      </a:r>
+                    </a:p>
+                  </a:txBody>
+                  <a:tcPr marL="82296" marR="82296" marT="64008" marB="64008">
+                    <a:solidFill>
+                      <a:srgbClr val="FFFFFF"/>
+                    </a:solidFill>
+                  </a:tcPr>
+                </a:tc>
+              </a:tr>
+            </a:tbl>
+          </a:graphicData>
+        </a:graphic>
+      </p:graphicFrame>
+      <p:graphicFrame>
+        <p:nvGraphicFramePr>
+          <p:cNvPr id="9" name="Table 8"/>
+          <p:cNvGraphicFramePr>
+            <a:graphicFrameLocks noGrp="1"/>
+          </p:cNvGraphicFramePr>
+          <p:nvPr/>
+        </p:nvGraphicFramePr>
+        <p:xfrm>
+          <a:off x="365760" y="2399792"/>
+          <a:ext cx="8412479" cy="349504"/>
+        </p:xfrm>
+        <a:graphic>
+          <a:graphicData uri="http://schemas.openxmlformats.org/drawingml/2006/table">
+            <a:tbl>
+              <a:tblPr firstRow="1" bandRow="1">
+                <a:tableStyleId>{5C22544A-7EE6-4342-B048-85BDC9FD1C3A}</a:tableStyleId>
+              </a:tblPr>
+              <a:tblGrid>
+                <a:gridCol w="2271369"/>
+                <a:gridCol w="6141110"/>
+              </a:tblGrid>
+              <a:tr h="349504">
+                <a:tc>
+                  <a:txBody>
+                    <a:bodyPr wrap="none"/>
+                    <a:lstStyle/>
+                    <a:p>
+                      <a:pPr>
+                        <a:lnSpc>
+                          <a:spcPts val="1600"/>
+                        </a:lnSpc>
+                        <a:spcAft>
+                          <a:spcPts val="0"/>
+                        </a:spcAft>
+                        <a:defRPr sz="1200" b="0">
+                          <a:solidFill>
+                            <a:srgbClr val="21243A"/>
+                          </a:solidFill>
+                          <a:latin typeface="Arial"/>
+                        </a:defRPr>
+                      </a:pPr>
+                      <a:r>
+                        <a:t>Generated</a:t>
+                      </a:r>
+                    </a:p>
+                  </a:txBody>
+                  <a:tcPr marL="82296" marR="82296" marT="64008" marB="64008">
+                    <a:solidFill>
+                      <a:srgbClr val="F1F7F7"/>
+                    </a:solidFill>
+                  </a:tcPr>
+                </a:tc>
+                <a:tc>
+                  <a:txBody>
+                    <a:bodyPr wrap="none"/>
+                    <a:lstStyle/>
+                    <a:p>
+                      <a:pPr>
+                        <a:lnSpc>
+                          <a:spcPts val="1600"/>
+                        </a:lnSpc>
+                        <a:spcAft>
+                          <a:spcPts val="0"/>
+                        </a:spcAft>
+                        <a:defRPr sz="1200" b="0">
+                          <a:solidFill>
+                            <a:srgbClr val="21243A"/>
+                          </a:solidFill>
+                          <a:latin typeface="Arial"/>
+                        </a:defRPr>
+                      </a:pPr>
+                      <a:r>
+                        <a:t>2026-09-26T22:31:06+00:00</a:t>
+                      </a:r>
+                    </a:p>
+                  </a:txBody>
+                  <a:tcPr marL="82296" marR="82296" marT="64008" marB="64008">
+                    <a:solidFill>
+                      <a:srgbClr val="F1F7F7"/>
+                    </a:solidFill>
+                  </a:tcPr>
+                </a:tc>
+              </a:tr>
+            </a:tbl>
+          </a:graphicData>
+        </a:graphic>
+      </p:graphicFrame>
+      <p:graphicFrame>
+        <p:nvGraphicFramePr>
+          <p:cNvPr id="10" name="Table 9"/>
+          <p:cNvGraphicFramePr>
+            <a:graphicFrameLocks noGrp="1"/>
+          </p:cNvGraphicFramePr>
+          <p:nvPr/>
+        </p:nvGraphicFramePr>
+        <p:xfrm>
+          <a:off x="365760" y="2749296"/>
+          <a:ext cx="8412479" cy="349504"/>
+        </p:xfrm>
+        <a:graphic>
+          <a:graphicData uri="http://schemas.openxmlformats.org/drawingml/2006/table">
+            <a:tbl>
+              <a:tblPr firstRow="1" bandRow="1">
+                <a:tableStyleId>{5C22544A-7EE6-4342-B048-85BDC9FD1C3A}</a:tableStyleId>
+              </a:tblPr>
+              <a:tblGrid>
+                <a:gridCol w="2271369"/>
+                <a:gridCol w="6141110"/>
+              </a:tblGrid>
+              <a:tr h="349504">
+                <a:tc>
+                  <a:txBody>
+                    <a:bodyPr wrap="none"/>
+                    <a:lstStyle/>
+                    <a:p>
+                      <a:pPr>
+                        <a:lnSpc>
+                          <a:spcPts val="1600"/>
+                        </a:lnSpc>
+                        <a:spcAft>
+                          <a:spcPts val="0"/>
+                        </a:spcAft>
+                        <a:defRPr sz="1200" b="0">
+                          <a:solidFill>
+                            <a:srgbClr val="21243A"/>
+                          </a:solidFill>
+                          <a:latin typeface="Arial"/>
+                        </a:defRPr>
+                      </a:pPr>
+                      <a:r>
+                        <a:t>Tool</a:t>
+                      </a:r>
+                    </a:p>
+                  </a:txBody>
+                  <a:tcPr marL="82296" marR="82296" marT="64008" marB="64008">
+                    <a:solidFill>
+                      <a:srgbClr val="FFFFFF"/>
+                    </a:solidFill>
+                  </a:tcPr>
+                </a:tc>
+                <a:tc>
+                  <a:txBody>
+                    <a:bodyPr wrap="none"/>
+                    <a:lstStyle/>
+                    <a:p>
+                      <a:pPr>
+                        <a:lnSpc>
+                          <a:spcPts val="1600"/>
+                        </a:lnSpc>
+                        <a:spcAft>
+                          <a:spcPts val="0"/>
+                        </a:spcAft>
+                        <a:defRPr sz="1200" b="0">
+                          <a:solidFill>
+                            <a:srgbClr val="21243A"/>
+                          </a:solidFill>
+                          <a:latin typeface="Arial"/>
+                        </a:defRPr>
+                      </a:pPr>
+                      <a:r>
+                        <a:t>SDA Vision 0.1.0</a:t>
+                      </a:r>
+                    </a:p>
+                  </a:txBody>
+                  <a:tcPr marL="82296" marR="82296" marT="64008" marB="64008">
+                    <a:solidFill>
+                      <a:srgbClr val="FFFFFF"/>
+                    </a:solidFill>
+                  </a:tcPr>
+                </a:tc>
+              </a:tr>
+            </a:tbl>
+          </a:graphicData>
+        </a:graphic>
+      </p:graphicFrame>
+      <p:graphicFrame>
+        <p:nvGraphicFramePr>
+          <p:cNvPr id="11" name="Table 10"/>
+          <p:cNvGraphicFramePr>
+            <a:graphicFrameLocks noGrp="1"/>
+          </p:cNvGraphicFramePr>
+          <p:nvPr/>
+        </p:nvGraphicFramePr>
+        <p:xfrm>
+          <a:off x="365760" y="3098800"/>
+          <a:ext cx="8412479" cy="349504"/>
+        </p:xfrm>
+        <a:graphic>
+          <a:graphicData uri="http://schemas.openxmlformats.org/drawingml/2006/table">
+            <a:tbl>
+              <a:tblPr firstRow="1" bandRow="1">
+                <a:tableStyleId>{5C22544A-7EE6-4342-B048-85BDC9FD1C3A}</a:tableStyleId>
+              </a:tblPr>
+              <a:tblGrid>
+                <a:gridCol w="2271369"/>
+                <a:gridCol w="6141110"/>
+              </a:tblGrid>
+              <a:tr h="349504">
+                <a:tc>
+                  <a:txBody>
+                    <a:bodyPr wrap="none"/>
+                    <a:lstStyle/>
+                    <a:p>
+                      <a:pPr>
+                        <a:lnSpc>
+                          <a:spcPts val="1600"/>
+                        </a:lnSpc>
+                        <a:spcAft>
+                          <a:spcPts val="0"/>
+                        </a:spcAft>
+                        <a:defRPr sz="1200" b="0">
+                          <a:solidFill>
+                            <a:srgbClr val="21243A"/>
+                          </a:solidFill>
+                          <a:latin typeface="Arial"/>
+                        </a:defRPr>
+                      </a:pPr>
+                      <a:r>
+                        <a:t>Models</a:t>
+                      </a:r>
+                    </a:p>
+                  </a:txBody>
+                  <a:tcPr marL="82296" marR="82296" marT="64008" marB="64008">
+                    <a:solidFill>
+                      <a:srgbClr val="F1F7F7"/>
+                    </a:solidFill>
+                  </a:tcPr>
+                </a:tc>
+                <a:tc>
+                  <a:txBody>
+                    <a:bodyPr wrap="none"/>
+                    <a:lstStyle/>
+                    <a:p>
+                      <a:pPr>
+                        <a:lnSpc>
+                          <a:spcPts val="1600"/>
+                        </a:lnSpc>
+                        <a:spcAft>
+                          <a:spcPts val="0"/>
+                        </a:spcAft>
+                        <a:defRPr sz="1200" b="0">
+                          <a:solidFill>
+                            <a:srgbClr val="21243A"/>
+                          </a:solidFill>
+                          <a:latin typeface="Arial"/>
+                        </a:defRPr>
+                      </a:pPr>
+                      <a:r>
+                        <a:t>claude-opus-5-5, gemini-3.8-flash, gpt-6-astra</a:t>
+                      </a:r>
+                    </a:p>
+                  </a:txBody>
+                  <a:tcPr marL="82296" marR="82296" marT="64008" marB="64008">
+                    <a:solidFill>
+                      <a:srgbClr val="F1F7F7"/>
+                    </a:solidFill>
+                  </a:tcPr>
+                </a:tc>
+              </a:tr>
+            </a:tbl>
+          </a:graphicData>
+        </a:graphic>
+      </p:graphicFrame>
+      <p:graphicFrame>
+        <p:nvGraphicFramePr>
+          <p:cNvPr id="12" name="Table 11"/>
+          <p:cNvGraphicFramePr>
+            <a:graphicFrameLocks noGrp="1"/>
+          </p:cNvGraphicFramePr>
+          <p:nvPr/>
+        </p:nvGraphicFramePr>
+        <p:xfrm>
+          <a:off x="365760" y="3448304"/>
+          <a:ext cx="8412479" cy="349504"/>
+        </p:xfrm>
+        <a:graphic>
+          <a:graphicData uri="http://schemas.openxmlformats.org/drawingml/2006/table">
+            <a:tbl>
+              <a:tblPr firstRow="1" bandRow="1">
+                <a:tableStyleId>{5C22544A-7EE6-4342-B048-85BDC9FD1C3A}</a:tableStyleId>
+              </a:tblPr>
+              <a:tblGrid>
+                <a:gridCol w="2271369"/>
+                <a:gridCol w="6141110"/>
+              </a:tblGrid>
+              <a:tr h="349504">
+                <a:tc>
+                  <a:txBody>
+                    <a:bodyPr wrap="none"/>
+                    <a:lstStyle/>
+                    <a:p>
+                      <a:pPr>
+                        <a:lnSpc>
+                          <a:spcPts val="1600"/>
+                        </a:lnSpc>
+                        <a:spcAft>
+                          <a:spcPts val="0"/>
+                        </a:spcAft>
+                        <a:defRPr sz="1200" b="0">
+                          <a:solidFill>
+                            <a:srgbClr val="21243A"/>
+                          </a:solidFill>
+                          <a:latin typeface="Arial"/>
+                        </a:defRPr>
+                      </a:pPr>
+                      <a:r>
+                        <a:t>Method version</a:t>
+                      </a:r>
+                    </a:p>
+                  </a:txBody>
+                  <a:tcPr marL="82296" marR="82296" marT="64008" marB="64008">
+                    <a:solidFill>
+                      <a:srgbClr val="FFFFFF"/>
+                    </a:solidFill>
+                  </a:tcPr>
+                </a:tc>
+                <a:tc>
+                  <a:txBody>
+                    <a:bodyPr wrap="none"/>
+                    <a:lstStyle/>
+                    <a:p>
+                      <a:pPr>
+                        <a:lnSpc>
+                          <a:spcPts val="1600"/>
+                        </a:lnSpc>
+                        <a:spcAft>
+                          <a:spcPts val="0"/>
+                        </a:spcAft>
+                        <a:defRPr sz="1200" b="0">
+                          <a:solidFill>
+                            <a:srgbClr val="21243A"/>
+                          </a:solidFill>
+                          <a:latin typeface="Arial"/>
+                        </a:defRPr>
+                      </a:pPr>
+                      <a:r>
+                        <a:t>pdf-preparation-2026-09-26.1</a:t>
+                      </a:r>
+                    </a:p>
+                  </a:txBody>
+                  <a:tcPr marL="82296" marR="82296" marT="64008" marB="64008">
+                    <a:solidFill>
+                      <a:srgbClr val="FFFFFF"/>
+                    </a:solidFill>
+                  </a:tcPr>
+                </a:tc>
+              </a:tr>
+            </a:tbl>
+          </a:graphicData>
+        </a:graphic>
+      </p:graphicFrame>
+      <p:graphicFrame>
+        <p:nvGraphicFramePr>
+          <p:cNvPr id="13" name="Table 12"/>
+          <p:cNvGraphicFramePr>
+            <a:graphicFrameLocks noGrp="1"/>
+          </p:cNvGraphicFramePr>
+          <p:nvPr/>
+        </p:nvGraphicFramePr>
+        <p:xfrm>
+          <a:off x="365760" y="3797808"/>
+          <a:ext cx="8412479" cy="349504"/>
+        </p:xfrm>
+        <a:graphic>
+          <a:graphicData uri="http://schemas.openxmlformats.org/drawingml/2006/table">
+            <a:tbl>
+              <a:tblPr firstRow="1" bandRow="1">
+                <a:tableStyleId>{5C22544A-7EE6-4342-B048-85BDC9FD1C3A}</a:tableStyleId>
+              </a:tblPr>
+              <a:tblGrid>
+                <a:gridCol w="2271369"/>
+                <a:gridCol w="6141110"/>
+              </a:tblGrid>
+              <a:tr h="349504">
+                <a:tc>
+                  <a:txBody>
+                    <a:bodyPr wrap="none"/>
+                    <a:lstStyle/>
+                    <a:p>
+                      <a:pPr>
+                        <a:lnSpc>
+                          <a:spcPts val="1600"/>
+                        </a:lnSpc>
+                        <a:spcAft>
+                          <a:spcPts val="0"/>
+                        </a:spcAft>
+                        <a:defRPr sz="1200" b="0">
+                          <a:solidFill>
+                            <a:srgbClr val="21243A"/>
+                          </a:solidFill>
+                          <a:latin typeface="Arial"/>
+                        </a:defRPr>
+                      </a:pPr>
+                      <a:r>
+                        <a:t>Analysis lens</a:t>
+                      </a:r>
+                    </a:p>
+                  </a:txBody>
+                  <a:tcPr marL="82296" marR="82296" marT="64008" marB="64008">
+                    <a:solidFill>
+                      <a:srgbClr val="F1F7F7"/>
+                    </a:solidFill>
+                  </a:tcPr>
+                </a:tc>
+                <a:tc>
+                  <a:txBody>
+                    <a:bodyPr wrap="none"/>
+                    <a:lstStyle/>
+                    <a:p>
+                      <a:pPr>
+                        <a:lnSpc>
+                          <a:spcPts val="1600"/>
+                        </a:lnSpc>
+                        <a:spcAft>
+                          <a:spcPts val="0"/>
+                        </a:spcAft>
+                        <a:defRPr sz="1200" b="0">
+                          <a:solidFill>
+                            <a:srgbClr val="21243A"/>
+                          </a:solidFill>
+                          <a:latin typeface="Arial"/>
+                        </a:defRPr>
+                      </a:pPr>
+                      <a:r>
+                        <a:t>general</a:t>
+                      </a:r>
+                    </a:p>
+                  </a:txBody>
+                  <a:tcPr marL="82296" marR="82296" marT="64008" marB="64008">
+                    <a:solidFill>
+                      <a:srgbClr val="F1F7F7"/>
+                    </a:solidFill>
+                  </a:tcPr>
+                </a:tc>
+              </a:tr>
+            </a:tbl>
+          </a:graphicData>
+        </a:graphic>
+      </p:graphicFrame>
+      <p:graphicFrame>
+        <p:nvGraphicFramePr>
+          <p:cNvPr id="14" name="Table 13"/>
+          <p:cNvGraphicFramePr>
+            <a:graphicFrameLocks noGrp="1"/>
+          </p:cNvGraphicFramePr>
+          <p:nvPr/>
+        </p:nvGraphicFramePr>
+        <p:xfrm>
+          <a:off x="365760" y="4147312"/>
+          <a:ext cx="8412479" cy="349504"/>
+        </p:xfrm>
+        <a:graphic>
+          <a:graphicData uri="http://schemas.openxmlformats.org/drawingml/2006/table">
+            <a:tbl>
+              <a:tblPr firstRow="1" bandRow="1">
+                <a:tableStyleId>{5C22544A-7EE6-4342-B048-85BDC9FD1C3A}</a:tableStyleId>
+              </a:tblPr>
+              <a:tblGrid>
+                <a:gridCol w="2271369"/>
+                <a:gridCol w="6141110"/>
+              </a:tblGrid>
+              <a:tr h="349504">
+                <a:tc>
+                  <a:txBody>
+                    <a:bodyPr wrap="none"/>
+                    <a:lstStyle/>
+                    <a:p>
+                      <a:pPr>
+                        <a:lnSpc>
+                          <a:spcPts val="1600"/>
+                        </a:lnSpc>
+                        <a:spcAft>
+                          <a:spcPts val="0"/>
+                        </a:spcAft>
+                        <a:defRPr sz="1200" b="0">
+                          <a:solidFill>
+                            <a:srgbClr val="21243A"/>
+                          </a:solidFill>
+                          <a:latin typeface="Arial"/>
+                        </a:defRPr>
+                      </a:pPr>
+                      <a:r>
+                        <a:t>Original SHA-256</a:t>
+                      </a:r>
+                    </a:p>
+                  </a:txBody>
+                  <a:tcPr marL="82296" marR="82296" marT="64008" marB="64008">
+                    <a:solidFill>
+                      <a:srgbClr val="FFFFFF"/>
+                    </a:solidFill>
+                  </a:tcPr>
+                </a:tc>
+                <a:tc>
+                  <a:txBody>
+                    <a:bodyPr wrap="none"/>
+                    <a:lstStyle/>
+                    <a:p>
+                      <a:pPr>
+                        <a:lnSpc>
+                          <a:spcPts val="1600"/>
+                        </a:lnSpc>
+                        <a:spcAft>
+                          <a:spcPts val="0"/>
+                        </a:spcAft>
+                        <a:defRPr sz="1200" b="0">
+                          <a:solidFill>
+                            <a:srgbClr val="21243A"/>
+                          </a:solidFill>
+                          <a:latin typeface="Arial"/>
+                        </a:defRPr>
+                      </a:pPr>
+                      <a:r>
+                        <a:t>b11aa1e8c5c17a9496d362987bd4bf0c00a83bccd3a4a704f0f6ab7a7cf6fc8d</a:t>
+                      </a:r>
+                    </a:p>
+                  </a:txBody>
+                  <a:tcPr marL="82296" marR="82296" marT="64008" marB="64008">
+                    <a:solidFill>
+                      <a:srgbClr val="FFFFFF"/>
+                    </a:solidFill>
+                  </a:tcPr>
+                </a:tc>
+              </a:tr>
+            </a:tbl>
+          </a:graphicData>
+        </a:graphic>
+      </p:graphicFrame>
+      <p:graphicFrame>
+        <p:nvGraphicFramePr>
+          <p:cNvPr id="15" name="Table 14"/>
+          <p:cNvGraphicFramePr>
+            <a:graphicFrameLocks noGrp="1"/>
+          </p:cNvGraphicFramePr>
+          <p:nvPr/>
+        </p:nvGraphicFramePr>
+        <p:xfrm>
+          <a:off x="365760" y="4496816"/>
+          <a:ext cx="8412479" cy="552704"/>
+        </p:xfrm>
+        <a:graphic>
+          <a:graphicData uri="http://schemas.openxmlformats.org/drawingml/2006/table">
+            <a:tbl>
+              <a:tblPr firstRow="1" bandRow="1">
+                <a:tableStyleId>{5C22544A-7EE6-4342-B048-85BDC9FD1C3A}</a:tableStyleId>
+              </a:tblPr>
+              <a:tblGrid>
+                <a:gridCol w="2271369"/>
+                <a:gridCol w="6141110"/>
+              </a:tblGrid>
+              <a:tr h="552704">
+                <a:tc>
+                  <a:txBody>
+                    <a:bodyPr wrap="none"/>
+                    <a:lstStyle/>
+                    <a:p>
+                      <a:pPr>
+                        <a:lnSpc>
+                          <a:spcPts val="1600"/>
+                        </a:lnSpc>
+                        <a:spcAft>
+                          <a:spcPts val="0"/>
+                        </a:spcAft>
+                        <a:defRPr sz="1200" b="0">
+                          <a:solidFill>
+                            <a:srgbClr val="21243A"/>
+                          </a:solidFill>
+                          <a:latin typeface="Arial"/>
+                        </a:defRPr>
+                      </a:pPr>
+                      <a:r>
+                        <a:t>Ingestion note 1</a:t>
+                      </a:r>
+                    </a:p>
+                  </a:txBody>
+                  <a:tcPr marL="82296" marR="82296" marT="64008" marB="64008">
+                    <a:solidFill>
+                      <a:srgbClr val="F1F7F7"/>
+                    </a:solidFill>
+                  </a:tcPr>
+                </a:tc>
+                <a:tc>
+                  <a:txBody>
+                    <a:bodyPr wrap="none"/>
+                    <a:lstStyle/>
+                    <a:p>
+                      <a:pPr>
+                        <a:lnSpc>
+                          <a:spcPts val="1600"/>
+                        </a:lnSpc>
+                        <a:spcAft>
+                          <a:spcPts val="0"/>
+                        </a:spcAft>
+                        <a:defRPr sz="1200" b="0">
+                          <a:solidFill>
+                            <a:srgbClr val="21243A"/>
+                          </a:solidFill>
+                          <a:latin typeface="Arial"/>
+                        </a:defRPr>
+                      </a:pPr>
+                      <a:r>
+                        <a:t>Fresh provider replies acquired for eleven-examples-refresh-20260926-r1; report</a:t>
+                      </a:r>
+                    </a:p>
+                    <a:p>
+                      <a:pPr>
+                        <a:lnSpc>
+                          <a:spcPts val="1600"/>
+                        </a:lnSpc>
+                        <a:spcAft>
+                          <a:spcPts val="0"/>
+                        </a:spcAft>
+                        <a:defRPr sz="1200" b="0">
+                          <a:solidFill>
+                            <a:srgbClr val="21243A"/>
+                          </a:solidFill>
+                          <a:latin typeface="Arial"/>
+                        </a:defRPr>
+                      </a:pPr>
+                      <a:r>
+                        <a:t>assembled locally from the saved responses without further API calls.</a:t>
+                      </a:r>
+                    </a:p>
+                  </a:txBody>
+                  <a:tcPr marL="82296" marR="82296" marT="64008" marB="64008">
+                    <a:solidFill>
+                      <a:srgbClr val="F1F7F7"/>
+                    </a:solidFill>
+                  </a:tcPr>
+                </a:tc>
+              </a:tr>
+            </a:tbl>
+          </a:graphicData>
+        </a:graphic>
+      </p:graphicFrame>
+      <p:graphicFrame>
+        <p:nvGraphicFramePr>
+          <p:cNvPr id="16" name="Table 15"/>
+          <p:cNvGraphicFramePr>
+            <a:graphicFrameLocks noGrp="1"/>
+          </p:cNvGraphicFramePr>
+          <p:nvPr/>
+        </p:nvGraphicFramePr>
+        <p:xfrm>
+          <a:off x="365760" y="5049520"/>
+          <a:ext cx="8412479" cy="755904"/>
+        </p:xfrm>
+        <a:graphic>
+          <a:graphicData uri="http://schemas.openxmlformats.org/drawingml/2006/table">
+            <a:tbl>
+              <a:tblPr firstRow="1" bandRow="1">
+                <a:tableStyleId>{5C22544A-7EE6-4342-B048-85BDC9FD1C3A}</a:tableStyleId>
+              </a:tblPr>
+              <a:tblGrid>
+                <a:gridCol w="2271369"/>
+                <a:gridCol w="6141110"/>
+              </a:tblGrid>
+              <a:tr h="755904">
+                <a:tc>
+                  <a:txBody>
+                    <a:bodyPr wrap="none"/>
+                    <a:lstStyle/>
+                    <a:p>
+                      <a:pPr>
+                        <a:lnSpc>
+                          <a:spcPts val="1600"/>
+                        </a:lnSpc>
+                        <a:spcAft>
+                          <a:spcPts val="0"/>
+                        </a:spcAft>
+                        <a:defRPr sz="1200" b="0">
+                          <a:solidFill>
+                            <a:srgbClr val="21243A"/>
+                          </a:solidFill>
+                          <a:latin typeface="Arial"/>
+                        </a:defRPr>
+                      </a:pPr>
+                      <a:r>
+                        <a:t>Ingestion note 2</a:t>
+                      </a:r>
+                    </a:p>
+                  </a:txBody>
+                  <a:tcPr marL="82296" marR="82296" marT="64008" marB="64008">
+                    <a:solidFill>
+                      <a:srgbClr val="FFFFFF"/>
+                    </a:solidFill>
+                  </a:tcPr>
+                </a:tc>
+                <a:tc>
+                  <a:txBody>
+                    <a:bodyPr wrap="none"/>
+                    <a:lstStyle/>
+                    <a:p>
+                      <a:pPr>
+                        <a:lnSpc>
+                          <a:spcPts val="1600"/>
+                        </a:lnSpc>
+                        <a:spcAft>
+                          <a:spcPts val="0"/>
+                        </a:spcAft>
+                        <a:defRPr sz="1200" b="0">
+                          <a:solidFill>
+                            <a:srgbClr val="21243A"/>
+                          </a:solidFill>
+                          <a:latin typeface="Arial"/>
+                        </a:defRPr>
+                      </a:pPr>
+                      <a:r>
+                        <a:t>Provider latency values are restored from the acquisition receipts (maximum</a:t>
+                      </a:r>
+                    </a:p>
+                    <a:p>
+                      <a:pPr>
+                        <a:lnSpc>
+                          <a:spcPts val="1600"/>
+                        </a:lnSpc>
+                        <a:spcAft>
+                          <a:spcPts val="0"/>
+                        </a:spcAft>
+                        <a:defRPr sz="1200" b="0">
+                          <a:solidFill>
+                            <a:srgbClr val="21243A"/>
+                          </a:solidFill>
+                          <a:latin typeface="Arial"/>
+                        </a:defRPr>
+                      </a:pPr>
+                      <a:r>
+                        <a:t>sampled-frame latency per provider); raw replies and assessment results are</a:t>
+                      </a:r>
+                    </a:p>
+                    <a:p>
+                      <a:pPr>
+                        <a:lnSpc>
+                          <a:spcPts val="1600"/>
+                        </a:lnSpc>
+                        <a:spcAft>
+                          <a:spcPts val="0"/>
+                        </a:spcAft>
+                        <a:defRPr sz="1200" b="0">
+                          <a:solidFill>
+                            <a:srgbClr val="21243A"/>
+                          </a:solidFill>
+                          <a:latin typeface="Arial"/>
+                        </a:defRPr>
+                      </a:pPr>
+                      <a:r>
+                        <a:t>unchanged by this bookkeeping step.</a:t>
                       </a:r>
                     </a:p>
                   </a:txBody>
@@ -8542,7 +13226,7 @@
                         </a:defRPr>
                       </a:pPr>
                       <a:r>
-                        <a:t>Inconclusive</a:t>
+                        <a:t>Leaning synthetic</a:t>
                       </a:r>
                     </a:p>
                   </a:txBody>
@@ -8630,7 +13314,7 @@
                         </a:defRPr>
                       </a:pPr>
                       <a:r>
-                        <a:t>inconclusive</a:t>
+                        <a:t>synthetic likely</a:t>
                       </a:r>
                     </a:p>
                   </a:txBody>
@@ -8718,7 +13402,7 @@
                         </a:defRPr>
                       </a:pPr>
                       <a:r>
-                        <a:t>low</a:t>
+                        <a:t>high</a:t>
                       </a:r>
                     </a:p>
                   </a:txBody>
@@ -8806,7 +13490,7 @@
                         </a:defRPr>
                       </a:pPr>
                       <a:r>
-                        <a:t>n/a</a:t>
+                        <a:t>78/100</a:t>
                       </a:r>
                     </a:p>
                   </a:txBody>
@@ -8894,7 +13578,7 @@
                         </a:defRPr>
                       </a:pPr>
                       <a:r>
-                        <a:t>no numeric score</a:t>
+                        <a:t>median of available model ratings; not a calibrated probability</a:t>
                       </a:r>
                     </a:p>
                   </a:txBody>
@@ -8982,7 +13666,7 @@
                         </a:defRPr>
                       </a:pPr>
                       <a:r>
-                        <a:t>No vision model returned a usable result. Check provider status in the table.</a:t>
+                        <a:t>3 models agree this is likely synthetic.</a:t>
                       </a:r>
                     </a:p>
                   </a:txBody>
@@ -9622,7 +14306,7 @@
                         </a:defRPr>
                       </a:pPr>
                       <a:r>
-                        <a:t>vision / disabled</a:t>
+                        <a:t>vision / ok</a:t>
                       </a:r>
                     </a:p>
                   </a:txBody>
@@ -9652,7 +14336,7 @@
                         </a:defRPr>
                       </a:pPr>
                       <a:r>
-                        <a:t>inconclusive</a:t>
+                        <a:t>synthetic likely</a:t>
                       </a:r>
                     </a:p>
                   </a:txBody>
@@ -9682,7 +14366,7 @@
                         </a:defRPr>
                       </a:pPr>
                       <a:r>
-                        <a:t>n/a</a:t>
+                        <a:t>90/100</a:t>
                       </a:r>
                     </a:p>
                   </a:txBody>
@@ -9772,7 +14456,7 @@
                         </a:defRPr>
                       </a:pPr>
                       <a:r>
-                        <a:t>vision / disabled</a:t>
+                        <a:t>vision / ok</a:t>
                       </a:r>
                     </a:p>
                   </a:txBody>
@@ -9802,7 +14486,7 @@
                         </a:defRPr>
                       </a:pPr>
                       <a:r>
-                        <a:t>inconclusive</a:t>
+                        <a:t>synthetic likely</a:t>
                       </a:r>
                     </a:p>
                   </a:txBody>
@@ -9832,7 +14516,7 @@
                         </a:defRPr>
                       </a:pPr>
                       <a:r>
-                        <a:t>n/a</a:t>
+                        <a:t>78/100</a:t>
                       </a:r>
                     </a:p>
                   </a:txBody>
@@ -9922,7 +14606,7 @@
                         </a:defRPr>
                       </a:pPr>
                       <a:r>
-                        <a:t>vision / disabled</a:t>
+                        <a:t>vision / ok</a:t>
                       </a:r>
                     </a:p>
                   </a:txBody>
@@ -9952,7 +14636,7 @@
                         </a:defRPr>
                       </a:pPr>
                       <a:r>
-                        <a:t>inconclusive</a:t>
+                        <a:t>synthetic likely</a:t>
                       </a:r>
                     </a:p>
                   </a:txBody>
@@ -9982,7 +14666,7 @@
                         </a:defRPr>
                       </a:pPr>
                       <a:r>
-                        <a:t>n/a</a:t>
+                        <a:t>72/100</a:t>
                       </a:r>
                     </a:p>
                   </a:txBody>
@@ -10732,7 +15416,7 @@
                         </a:defRPr>
                       </a:pPr>
                       <a:r>
-                        <a:t>Not recorded</a:t>
+                        <a:t>claude-opus-5-5</a:t>
                       </a:r>
                     </a:p>
                   </a:txBody>
@@ -10820,7 +15504,7 @@
                         </a:defRPr>
                       </a:pPr>
                       <a:r>
-                        <a:t>disabled</a:t>
+                        <a:t>ok</a:t>
                       </a:r>
                     </a:p>
                   </a:txBody>
@@ -10908,7 +15592,7 @@
                         </a:defRPr>
                       </a:pPr>
                       <a:r>
-                        <a:t>inconclusive</a:t>
+                        <a:t>synthetic likely</a:t>
                       </a:r>
                     </a:p>
                   </a:txBody>
@@ -10996,7 +15680,7 @@
                         </a:defRPr>
                       </a:pPr>
                       <a:r>
-                        <a:t>Not recorded</a:t>
+                        <a:t>medium</a:t>
                       </a:r>
                     </a:p>
                   </a:txBody>
@@ -11084,7 +15768,7 @@
                         </a:defRPr>
                       </a:pPr>
                       <a:r>
-                        <a:t>Not listed</a:t>
+                        <a:t>Supporting</a:t>
                       </a:r>
                     </a:p>
                   </a:txBody>
@@ -11109,7 +15793,7 @@
         </p:nvGraphicFramePr>
         <p:xfrm>
           <a:off x="365760" y="3797808"/>
-          <a:ext cx="8412479" cy="552704"/>
+          <a:ext cx="8412479" cy="1568704"/>
         </p:xfrm>
         <a:graphic>
           <a:graphicData uri="http://schemas.openxmlformats.org/drawingml/2006/table">
@@ -11121,7 +15805,7 @@
                 <a:gridCol w="2271369"/>
                 <a:gridCol w="6141110"/>
               </a:tblGrid>
-              <a:tr h="552704">
+              <a:tr h="1568704">
                 <a:tc>
                   <a:txBody>
                     <a:bodyPr wrap="none"/>
@@ -11172,26 +15856,121 @@
                         </a:defRPr>
                       </a:pPr>
                       <a:r>
-                        <a:t>LLM visual check not run for this example. This testing record contains local file</a:t>
-                      </a:r>
-                    </a:p>
-                    <a:p>
-                      <a:pPr>
-                        <a:lnSpc>
-                          <a:spcPts val="1600"/>
-                        </a:lnSpc>
-                        <a:spcAft>
-                          <a:spcPts val="0"/>
-                        </a:spcAft>
-                        <a:defRPr sz="1200" b="0">
-                          <a:solidFill>
-                            <a:srgbClr val="21243A"/>
-                          </a:solidFill>
-                          <a:latin typeface="Arial"/>
-                        </a:defRPr>
-                      </a:pPr>
-                      <a:r>
-                        <a:t>checks only.</a:t>
+                        <a:t>synthetic likelihood 90/100; tells: uniform painterly-photoreal rendering style</a:t>
+                      </a:r>
+                    </a:p>
+                    <a:p>
+                      <a:pPr>
+                        <a:lnSpc>
+                          <a:spcPts val="1600"/>
+                        </a:lnSpc>
+                        <a:spcAft>
+                          <a:spcPts val="0"/>
+                        </a:spcAft>
+                        <a:defRPr sz="1200" b="0">
+                          <a:solidFill>
+                            <a:srgbClr val="21243A"/>
+                          </a:solidFill>
+                          <a:latin typeface="Arial"/>
+                        </a:defRPr>
+                      </a:pPr>
+                      <a:r>
+                        <a:t>shared across the main scene and all six portrait tiles, typical of a single</a:t>
+                      </a:r>
+                    </a:p>
+                    <a:p>
+                      <a:pPr>
+                        <a:lnSpc>
+                          <a:spcPts val="1600"/>
+                        </a:lnSpc>
+                        <a:spcAft>
+                          <a:spcPts val="0"/>
+                        </a:spcAft>
+                        <a:defRPr sz="1200" b="0">
+                          <a:solidFill>
+                            <a:srgbClr val="21243A"/>
+                          </a:solidFill>
+                          <a:latin typeface="Arial"/>
+                        </a:defRPr>
+                      </a:pPr>
+                      <a:r>
+                        <a:t>image-generation pass, stock-archetype faces with exaggerated, near-identical</a:t>
+                      </a:r>
+                    </a:p>
+                    <a:p>
+                      <a:pPr>
+                        <a:lnSpc>
+                          <a:spcPts val="1600"/>
+                        </a:lnSpc>
+                        <a:spcAft>
+                          <a:spcPts val="0"/>
+                        </a:spcAft>
+                        <a:defRPr sz="1200" b="0">
+                          <a:solidFill>
+                            <a:srgbClr val="21243A"/>
+                          </a:solidFill>
+                          <a:latin typeface="Arial"/>
+                        </a:defRPr>
+                      </a:pPr>
+                      <a:r>
+                        <a:t>'distressed' expressions and similar desaturated grading, over-smooth yet</a:t>
+                      </a:r>
+                    </a:p>
+                    <a:p>
+                      <a:pPr>
+                        <a:lnSpc>
+                          <a:spcPts val="1600"/>
+                        </a:lnSpc>
+                        <a:spcAft>
+                          <a:spcPts val="0"/>
+                        </a:spcAft>
+                        <a:defRPr sz="1200" b="0">
+                          <a:solidFill>
+                            <a:srgbClr val="21243A"/>
+                          </a:solidFill>
+                          <a:latin typeface="Arial"/>
+                        </a:defRPr>
+                      </a:pPr>
+                      <a:r>
+                        <a:t>hyper-detailed skin texture (pores and stubble rendered evenly, slightly waxy</a:t>
+                      </a:r>
+                    </a:p>
+                    <a:p>
+                      <a:pPr>
+                        <a:lnSpc>
+                          <a:spcPts val="1600"/>
+                        </a:lnSpc>
+                        <a:spcAft>
+                          <a:spcPts val="0"/>
+                        </a:spcAft>
+                        <a:defRPr sz="1200" b="0">
+                          <a:solidFill>
+                            <a:srgbClr val="21243A"/>
+                          </a:solidFill>
+                          <a:latin typeface="Arial"/>
+                        </a:defRPr>
+                      </a:pPr>
+                      <a:r>
+                        <a:t>highlights), syringe and gloved-hand geometry ambiguous: needle entry point</a:t>
+                      </a:r>
+                    </a:p>
+                    <a:p>
+                      <a:pPr>
+                        <a:lnSpc>
+                          <a:spcPts val="1600"/>
+                        </a:lnSpc>
+                        <a:spcAft>
+                          <a:spcPts val="0"/>
+                        </a:spcAft>
+                        <a:defRPr sz="1200" b="0">
+                          <a:solidFill>
+                            <a:srgbClr val="21243A"/>
+                          </a:solidFill>
+                          <a:latin typeface="Arial"/>
+                        </a:defRPr>
+                      </a:pPr>
+                      <a:r>
+                        <a:t>and grip read loosely, with fingers merging around the barrel</a:t>
                       </a:r>
                     </a:p>
                   </a:txBody>
@@ -11215,8 +15994,8 @@
           <p:nvPr/>
         </p:nvGraphicFramePr>
         <p:xfrm>
-          <a:off x="365760" y="4350512"/>
-          <a:ext cx="8412479" cy="349504"/>
+          <a:off x="365760" y="5366512"/>
+          <a:ext cx="8412479" cy="552704"/>
         </p:xfrm>
         <a:graphic>
           <a:graphicData uri="http://schemas.openxmlformats.org/drawingml/2006/table">
@@ -11228,7 +16007,7 @@
                 <a:gridCol w="2271369"/>
                 <a:gridCol w="6141110"/>
               </a:tblGrid>
-              <a:tr h="349504">
+              <a:tr h="552704">
                 <a:tc>
                   <a:txBody>
                     <a:bodyPr wrap="none"/>
@@ -11279,7 +16058,26 @@
                         </a:defRPr>
                       </a:pPr>
                       <a:r>
-                        <a:t>No request or image was sent to this provider for this record.</a:t>
+                        <a:t>Uniform painterly-photoreal rendering style shared across the main scene and all</a:t>
+                      </a:r>
+                    </a:p>
+                    <a:p>
+                      <a:pPr>
+                        <a:lnSpc>
+                          <a:spcPts val="1600"/>
+                        </a:lnSpc>
+                        <a:spcAft>
+                          <a:spcPts val="0"/>
+                        </a:spcAft>
+                        <a:defRPr sz="1200" b="0">
+                          <a:solidFill>
+                            <a:srgbClr val="21243A"/>
+                          </a:solidFill>
+                          <a:latin typeface="Arial"/>
+                        </a:defRPr>
+                      </a:pPr>
+                      <a:r>
+                        <a:t>six portrait tiles, typical of a single image-generation pass</a:t>
                       </a:r>
                     </a:p>
                   </a:txBody>
@@ -11391,7 +16189,7 @@
               </a:defRPr>
             </a:pPr>
             <a:r>
-              <a:t>Provider evidence / 2</a:t>
+              <a:t>Provider evidence / 1 (continued)</a:t>
             </a:r>
           </a:p>
         </p:txBody>
@@ -11578,7 +16376,7 @@
         </p:nvGraphicFramePr>
         <p:xfrm>
           <a:off x="365760" y="1700784"/>
-          <a:ext cx="8412479" cy="349504"/>
+          <a:ext cx="8412479" cy="552704"/>
         </p:xfrm>
         <a:graphic>
           <a:graphicData uri="http://schemas.openxmlformats.org/drawingml/2006/table">
@@ -11590,28 +16388,28 @@
                 <a:gridCol w="2271369"/>
                 <a:gridCol w="6141110"/>
               </a:tblGrid>
-              <a:tr h="349504">
-                <a:tc>
-                  <a:txBody>
-                    <a:bodyPr wrap="none"/>
-                    <a:lstStyle/>
-                    <a:p>
-                      <a:pPr>
-                        <a:lnSpc>
-                          <a:spcPts val="1600"/>
-                        </a:lnSpc>
-                        <a:spcAft>
-                          <a:spcPts val="0"/>
-                        </a:spcAft>
-                        <a:defRPr sz="1200" b="0">
-                          <a:solidFill>
-                            <a:srgbClr val="21243A"/>
-                          </a:solidFill>
-                          <a:latin typeface="Arial"/>
-                        </a:defRPr>
-                      </a:pPr>
-                      <a:r>
-                        <a:t>Provider</a:t>
+              <a:tr h="552704">
+                <a:tc>
+                  <a:txBody>
+                    <a:bodyPr wrap="none"/>
+                    <a:lstStyle/>
+                    <a:p>
+                      <a:pPr>
+                        <a:lnSpc>
+                          <a:spcPts val="1600"/>
+                        </a:lnSpc>
+                        <a:spcAft>
+                          <a:spcPts val="0"/>
+                        </a:spcAft>
+                        <a:defRPr sz="1200" b="0">
+                          <a:solidFill>
+                            <a:srgbClr val="21243A"/>
+                          </a:solidFill>
+                          <a:latin typeface="Arial"/>
+                        </a:defRPr>
+                      </a:pPr>
+                      <a:r>
+                        <a:t>Evidence 2</a:t>
                       </a:r>
                     </a:p>
                   </a:txBody>
@@ -11641,7 +16439,26 @@
                         </a:defRPr>
                       </a:pPr>
                       <a:r>
-                        <a:t>OpenAI Vision</a:t>
+                        <a:t>Stock-archetype faces with exaggerated, near-identical 'distressed' expressions</a:t>
+                      </a:r>
+                    </a:p>
+                    <a:p>
+                      <a:pPr>
+                        <a:lnSpc>
+                          <a:spcPts val="1600"/>
+                        </a:lnSpc>
+                        <a:spcAft>
+                          <a:spcPts val="0"/>
+                        </a:spcAft>
+                        <a:defRPr sz="1200" b="0">
+                          <a:solidFill>
+                            <a:srgbClr val="21243A"/>
+                          </a:solidFill>
+                          <a:latin typeface="Arial"/>
+                        </a:defRPr>
+                      </a:pPr>
+                      <a:r>
+                        <a:t>and similar desaturated grading</a:t>
                       </a:r>
                     </a:p>
                   </a:txBody>
@@ -11665,8 +16482,8 @@
           <p:nvPr/>
         </p:nvGraphicFramePr>
         <p:xfrm>
-          <a:off x="365760" y="2050288"/>
-          <a:ext cx="8412479" cy="349504"/>
+          <a:off x="365760" y="2253488"/>
+          <a:ext cx="8412479" cy="552704"/>
         </p:xfrm>
         <a:graphic>
           <a:graphicData uri="http://schemas.openxmlformats.org/drawingml/2006/table">
@@ -11678,28 +16495,28 @@
                 <a:gridCol w="2271369"/>
                 <a:gridCol w="6141110"/>
               </a:tblGrid>
-              <a:tr h="349504">
-                <a:tc>
-                  <a:txBody>
-                    <a:bodyPr wrap="none"/>
-                    <a:lstStyle/>
-                    <a:p>
-                      <a:pPr>
-                        <a:lnSpc>
-                          <a:spcPts val="1600"/>
-                        </a:lnSpc>
-                        <a:spcAft>
-                          <a:spcPts val="0"/>
-                        </a:spcAft>
-                        <a:defRPr sz="1200" b="0">
-                          <a:solidFill>
-                            <a:srgbClr val="21243A"/>
-                          </a:solidFill>
-                          <a:latin typeface="Arial"/>
-                        </a:defRPr>
-                      </a:pPr>
-                      <a:r>
-                        <a:t>Model</a:t>
+              <a:tr h="552704">
+                <a:tc>
+                  <a:txBody>
+                    <a:bodyPr wrap="none"/>
+                    <a:lstStyle/>
+                    <a:p>
+                      <a:pPr>
+                        <a:lnSpc>
+                          <a:spcPts val="1600"/>
+                        </a:lnSpc>
+                        <a:spcAft>
+                          <a:spcPts val="0"/>
+                        </a:spcAft>
+                        <a:defRPr sz="1200" b="0">
+                          <a:solidFill>
+                            <a:srgbClr val="21243A"/>
+                          </a:solidFill>
+                          <a:latin typeface="Arial"/>
+                        </a:defRPr>
+                      </a:pPr>
+                      <a:r>
+                        <a:t>Evidence 3</a:t>
                       </a:r>
                     </a:p>
                   </a:txBody>
@@ -11729,7 +16546,26 @@
                         </a:defRPr>
                       </a:pPr>
                       <a:r>
-                        <a:t>Not recorded</a:t>
+                        <a:t>Over-smooth yet hyper-detailed skin texture (pores and stubble rendered evenly,</a:t>
+                      </a:r>
+                    </a:p>
+                    <a:p>
+                      <a:pPr>
+                        <a:lnSpc>
+                          <a:spcPts val="1600"/>
+                        </a:lnSpc>
+                        <a:spcAft>
+                          <a:spcPts val="0"/>
+                        </a:spcAft>
+                        <a:defRPr sz="1200" b="0">
+                          <a:solidFill>
+                            <a:srgbClr val="21243A"/>
+                          </a:solidFill>
+                          <a:latin typeface="Arial"/>
+                        </a:defRPr>
+                      </a:pPr>
+                      <a:r>
+                        <a:t>slightly waxy highlights)</a:t>
                       </a:r>
                     </a:p>
                   </a:txBody>
@@ -11753,8 +16589,8 @@
           <p:nvPr/>
         </p:nvGraphicFramePr>
         <p:xfrm>
-          <a:off x="365760" y="2399792"/>
-          <a:ext cx="8412479" cy="349504"/>
+          <a:off x="365760" y="2806192"/>
+          <a:ext cx="8412479" cy="552704"/>
         </p:xfrm>
         <a:graphic>
           <a:graphicData uri="http://schemas.openxmlformats.org/drawingml/2006/table">
@@ -11766,28 +16602,28 @@
                 <a:gridCol w="2271369"/>
                 <a:gridCol w="6141110"/>
               </a:tblGrid>
-              <a:tr h="349504">
-                <a:tc>
-                  <a:txBody>
-                    <a:bodyPr wrap="none"/>
-                    <a:lstStyle/>
-                    <a:p>
-                      <a:pPr>
-                        <a:lnSpc>
-                          <a:spcPts val="1600"/>
-                        </a:lnSpc>
-                        <a:spcAft>
-                          <a:spcPts val="0"/>
-                        </a:spcAft>
-                        <a:defRPr sz="1200" b="0">
-                          <a:solidFill>
-                            <a:srgbClr val="21243A"/>
-                          </a:solidFill>
-                          <a:latin typeface="Arial"/>
-                        </a:defRPr>
-                      </a:pPr>
-                      <a:r>
-                        <a:t>Status</a:t>
+              <a:tr h="552704">
+                <a:tc>
+                  <a:txBody>
+                    <a:bodyPr wrap="none"/>
+                    <a:lstStyle/>
+                    <a:p>
+                      <a:pPr>
+                        <a:lnSpc>
+                          <a:spcPts val="1600"/>
+                        </a:lnSpc>
+                        <a:spcAft>
+                          <a:spcPts val="0"/>
+                        </a:spcAft>
+                        <a:defRPr sz="1200" b="0">
+                          <a:solidFill>
+                            <a:srgbClr val="21243A"/>
+                          </a:solidFill>
+                          <a:latin typeface="Arial"/>
+                        </a:defRPr>
+                      </a:pPr>
+                      <a:r>
+                        <a:t>Evidence 4</a:t>
                       </a:r>
                     </a:p>
                   </a:txBody>
@@ -11817,7 +16653,26 @@
                         </a:defRPr>
                       </a:pPr>
                       <a:r>
-                        <a:t>disabled</a:t>
+                        <a:t>Syringe and gloved-hand geometry ambiguous: needle entry point and grip read</a:t>
+                      </a:r>
+                    </a:p>
+                    <a:p>
+                      <a:pPr>
+                        <a:lnSpc>
+                          <a:spcPts val="1600"/>
+                        </a:lnSpc>
+                        <a:spcAft>
+                          <a:spcPts val="0"/>
+                        </a:spcAft>
+                        <a:defRPr sz="1200" b="0">
+                          <a:solidFill>
+                            <a:srgbClr val="21243A"/>
+                          </a:solidFill>
+                          <a:latin typeface="Arial"/>
+                        </a:defRPr>
+                      </a:pPr>
+                      <a:r>
+                        <a:t>loosely, with fingers merging around the barrel</a:t>
                       </a:r>
                     </a:p>
                   </a:txBody>
@@ -11841,7 +16696,7 @@
           <p:nvPr/>
         </p:nvGraphicFramePr>
         <p:xfrm>
-          <a:off x="365760" y="2749296"/>
+          <a:off x="365760" y="3358896"/>
           <a:ext cx="8412479" cy="349504"/>
         </p:xfrm>
         <a:graphic>
@@ -11875,7 +16730,7 @@
                         </a:defRPr>
                       </a:pPr>
                       <a:r>
-                        <a:t>Assessment</a:t>
+                        <a:t>Evidence 5</a:t>
                       </a:r>
                     </a:p>
                   </a:txBody>
@@ -11905,7 +16760,7 @@
                         </a:defRPr>
                       </a:pPr>
                       <a:r>
-                        <a:t>inconclusive</a:t>
+                        <a:t>Man's hand pinching the sleeve has soft, poorly separated knuckles</a:t>
                       </a:r>
                     </a:p>
                   </a:txBody>
@@ -11929,8 +16784,8 @@
           <p:nvPr/>
         </p:nvGraphicFramePr>
         <p:xfrm>
-          <a:off x="365760" y="3098800"/>
-          <a:ext cx="8412479" cy="349504"/>
+          <a:off x="365760" y="3708400"/>
+          <a:ext cx="8412479" cy="552704"/>
         </p:xfrm>
         <a:graphic>
           <a:graphicData uri="http://schemas.openxmlformats.org/drawingml/2006/table">
@@ -11942,28 +16797,28 @@
                 <a:gridCol w="2271369"/>
                 <a:gridCol w="6141110"/>
               </a:tblGrid>
-              <a:tr h="349504">
-                <a:tc>
-                  <a:txBody>
-                    <a:bodyPr wrap="none"/>
-                    <a:lstStyle/>
-                    <a:p>
-                      <a:pPr>
-                        <a:lnSpc>
-                          <a:spcPts val="1600"/>
-                        </a:lnSpc>
-                        <a:spcAft>
-                          <a:spcPts val="0"/>
-                        </a:spcAft>
-                        <a:defRPr sz="1200" b="0">
-                          <a:solidFill>
-                            <a:srgbClr val="21243A"/>
-                          </a:solidFill>
-                          <a:latin typeface="Arial"/>
-                        </a:defRPr>
-                      </a:pPr>
-                      <a:r>
-                        <a:t>Confidence</a:t>
+              <a:tr h="552704">
+                <a:tc>
+                  <a:txBody>
+                    <a:bodyPr wrap="none"/>
+                    <a:lstStyle/>
+                    <a:p>
+                      <a:pPr>
+                        <a:lnSpc>
+                          <a:spcPts val="1600"/>
+                        </a:lnSpc>
+                        <a:spcAft>
+                          <a:spcPts val="0"/>
+                        </a:spcAft>
+                        <a:defRPr sz="1200" b="0">
+                          <a:solidFill>
+                            <a:srgbClr val="21243A"/>
+                          </a:solidFill>
+                          <a:latin typeface="Arial"/>
+                        </a:defRPr>
+                      </a:pPr>
+                      <a:r>
+                        <a:t>Evidence 6</a:t>
                       </a:r>
                     </a:p>
                   </a:txBody>
@@ -11993,7 +16848,26 @@
                         </a:defRPr>
                       </a:pPr>
                       <a:r>
-                        <a:t>Not recorded</a:t>
+                        <a:t>Clean, correctly spelled headline and label typography integrated seamlessly with</a:t>
+                      </a:r>
+                    </a:p>
+                    <a:p>
+                      <a:pPr>
+                        <a:lnSpc>
+                          <a:spcPts val="1600"/>
+                        </a:lnSpc>
+                        <a:spcAft>
+                          <a:spcPts val="0"/>
+                        </a:spcAft>
+                        <a:defRPr sz="1200" b="0">
+                          <a:solidFill>
+                            <a:srgbClr val="21243A"/>
+                          </a:solidFill>
+                          <a:latin typeface="Arial"/>
+                        </a:defRPr>
+                      </a:pPr>
+                      <a:r>
+                        <a:t>the artwork, consistent with recent text-capable generators</a:t>
                       </a:r>
                     </a:p>
                   </a:txBody>
@@ -12017,8 +16891,8 @@
           <p:nvPr/>
         </p:nvGraphicFramePr>
         <p:xfrm>
-          <a:off x="365760" y="3448304"/>
-          <a:ext cx="8412479" cy="349504"/>
+          <a:off x="365760" y="4261104"/>
+          <a:ext cx="8412479" cy="552704"/>
         </p:xfrm>
         <a:graphic>
           <a:graphicData uri="http://schemas.openxmlformats.org/drawingml/2006/table">
@@ -12030,28 +16904,28 @@
                 <a:gridCol w="2271369"/>
                 <a:gridCol w="6141110"/>
               </a:tblGrid>
-              <a:tr h="349504">
-                <a:tc>
-                  <a:txBody>
-                    <a:bodyPr wrap="none"/>
-                    <a:lstStyle/>
-                    <a:p>
-                      <a:pPr>
-                        <a:lnSpc>
-                          <a:spcPts val="1600"/>
-                        </a:lnSpc>
-                        <a:spcAft>
-                          <a:spcPts val="0"/>
-                        </a:spcAft>
-                        <a:defRPr sz="1200" b="0">
-                          <a:solidFill>
-                            <a:srgbClr val="21243A"/>
-                          </a:solidFill>
-                          <a:latin typeface="Arial"/>
-                        </a:defRPr>
-                      </a:pPr>
-                      <a:r>
-                        <a:t>Role in assessment</a:t>
+              <a:tr h="552704">
+                <a:tc>
+                  <a:txBody>
+                    <a:bodyPr wrap="none"/>
+                    <a:lstStyle/>
+                    <a:p>
+                      <a:pPr>
+                        <a:lnSpc>
+                          <a:spcPts val="1600"/>
+                        </a:lnSpc>
+                        <a:spcAft>
+                          <a:spcPts val="0"/>
+                        </a:spcAft>
+                        <a:defRPr sz="1200" b="0">
+                          <a:solidFill>
+                            <a:srgbClr val="21243A"/>
+                          </a:solidFill>
+                          <a:latin typeface="Arial"/>
+                        </a:defRPr>
+                      </a:pPr>
+                      <a:r>
+                        <a:t>Evidence 7</a:t>
                       </a:r>
                     </a:p>
                   </a:txBody>
@@ -12081,7 +16955,26 @@
                         </a:defRPr>
                       </a:pPr>
                       <a:r>
-                        <a:t>Not listed</a:t>
+                        <a:t>Decorative torn-paper edge and grunge textures with a generic, procedurally</a:t>
+                      </a:r>
+                    </a:p>
+                    <a:p>
+                      <a:pPr>
+                        <a:lnSpc>
+                          <a:spcPts val="1600"/>
+                        </a:lnSpc>
+                        <a:spcAft>
+                          <a:spcPts val="0"/>
+                        </a:spcAft>
+                        <a:defRPr sz="1200" b="0">
+                          <a:solidFill>
+                            <a:srgbClr val="21243A"/>
+                          </a:solidFill>
+                          <a:latin typeface="Arial"/>
+                        </a:defRPr>
+                      </a:pPr>
+                      <a:r>
+                        <a:t>uniform look</a:t>
                       </a:r>
                     </a:p>
                   </a:txBody>
@@ -12105,7 +16998,7 @@
           <p:nvPr/>
         </p:nvGraphicFramePr>
         <p:xfrm>
-          <a:off x="365760" y="3797808"/>
+          <a:off x="365760" y="4813808"/>
           <a:ext cx="8412479" cy="552704"/>
         </p:xfrm>
         <a:graphic>
@@ -12139,7 +17032,7 @@
                         </a:defRPr>
                       </a:pPr>
                       <a:r>
-                        <a:t>Provider summary</a:t>
+                        <a:t>Evidence 8</a:t>
                       </a:r>
                     </a:p>
                   </a:txBody>
@@ -12169,26 +17062,26 @@
                         </a:defRPr>
                       </a:pPr>
                       <a:r>
-                        <a:t>LLM visual check not run for this example. This testing record contains local file</a:t>
-                      </a:r>
-                    </a:p>
-                    <a:p>
-                      <a:pPr>
-                        <a:lnSpc>
-                          <a:spcPts val="1600"/>
-                        </a:lnSpc>
-                        <a:spcAft>
-                          <a:spcPts val="0"/>
-                        </a:spcAft>
-                        <a:defRPr sz="1200" b="0">
-                          <a:solidFill>
-                            <a:srgbClr val="21243A"/>
-                          </a:solidFill>
-                          <a:latin typeface="Arial"/>
-                        </a:defRPr>
-                      </a:pPr>
-                      <a:r>
-                        <a:t>checks only.</a:t>
+                        <a:t>No camera-consistent noise, lens blur falloff, or compression grain differences</a:t>
+                      </a:r>
+                    </a:p>
+                    <a:p>
+                      <a:pPr>
+                        <a:lnSpc>
+                          <a:spcPts val="1600"/>
+                        </a:lnSpc>
+                        <a:spcAft>
+                          <a:spcPts val="0"/>
+                        </a:spcAft>
+                        <a:defRPr sz="1200" b="0">
+                          <a:solidFill>
+                            <a:srgbClr val="21243A"/>
+                          </a:solidFill>
+                          <a:latin typeface="Arial"/>
+                        </a:defRPr>
+                      </a:pPr>
+                      <a:r>
+                        <a:t>between the 'photo' regions</a:t>
                       </a:r>
                     </a:p>
                   </a:txBody>
@@ -12212,8 +17105,8 @@
           <p:nvPr/>
         </p:nvGraphicFramePr>
         <p:xfrm>
-          <a:off x="365760" y="4350512"/>
-          <a:ext cx="8412479" cy="349504"/>
+          <a:off x="365760" y="5366512"/>
+          <a:ext cx="8412479" cy="552704"/>
         </p:xfrm>
         <a:graphic>
           <a:graphicData uri="http://schemas.openxmlformats.org/drawingml/2006/table">
@@ -12225,28 +17118,28 @@
                 <a:gridCol w="2271369"/>
                 <a:gridCol w="6141110"/>
               </a:tblGrid>
-              <a:tr h="349504">
-                <a:tc>
-                  <a:txBody>
-                    <a:bodyPr wrap="none"/>
-                    <a:lstStyle/>
-                    <a:p>
-                      <a:pPr>
-                        <a:lnSpc>
-                          <a:spcPts val="1600"/>
-                        </a:lnSpc>
-                        <a:spcAft>
-                          <a:spcPts val="0"/>
-                        </a:spcAft>
-                        <a:defRPr sz="1200" b="0">
-                          <a:solidFill>
-                            <a:srgbClr val="21243A"/>
-                          </a:solidFill>
-                          <a:latin typeface="Arial"/>
-                        </a:defRPr>
-                      </a:pPr>
-                      <a:r>
-                        <a:t>Evidence 1</a:t>
+              <a:tr h="552704">
+                <a:tc>
+                  <a:txBody>
+                    <a:bodyPr wrap="none"/>
+                    <a:lstStyle/>
+                    <a:p>
+                      <a:pPr>
+                        <a:lnSpc>
+                          <a:spcPts val="1600"/>
+                        </a:lnSpc>
+                        <a:spcAft>
+                          <a:spcPts val="0"/>
+                        </a:spcAft>
+                        <a:defRPr sz="1200" b="0">
+                          <a:solidFill>
+                            <a:srgbClr val="21243A"/>
+                          </a:solidFill>
+                          <a:latin typeface="Arial"/>
+                        </a:defRPr>
+                      </a:pPr>
+                      <a:r>
+                        <a:t>Evidence 9</a:t>
                       </a:r>
                     </a:p>
                   </a:txBody>
@@ -12276,7 +17169,26 @@
                         </a:defRPr>
                       </a:pPr>
                       <a:r>
-                        <a:t>No request or image was sent to this provider for this record.</a:t>
+                        <a:t>Square 1254x1254-style canvas with PNG output and no provenance metadata</a:t>
+                      </a:r>
+                    </a:p>
+                    <a:p>
+                      <a:pPr>
+                        <a:lnSpc>
+                          <a:spcPts val="1600"/>
+                        </a:lnSpc>
+                        <a:spcAft>
+                          <a:spcPts val="0"/>
+                        </a:spcAft>
+                        <a:defRPr sz="1200" b="0">
+                          <a:solidFill>
+                            <a:srgbClr val="21243A"/>
+                          </a:solidFill>
+                          <a:latin typeface="Arial"/>
+                        </a:defRPr>
+                      </a:pPr>
+                      <a:r>
+                        <a:t>context supplied</a:t>
                       </a:r>
                     </a:p>
                   </a:txBody>
@@ -12388,7 +17300,7 @@
               </a:defRPr>
             </a:pPr>
             <a:r>
-              <a:t>Provider evidence / 3</a:t>
+              <a:t>Provider evidence / 1 (continued)</a:t>
             </a:r>
           </a:p>
         </p:txBody>
@@ -12575,7 +17487,7 @@
         </p:nvGraphicFramePr>
         <p:xfrm>
           <a:off x="365760" y="1700784"/>
-          <a:ext cx="8412479" cy="349504"/>
+          <a:ext cx="8412479" cy="959103"/>
         </p:xfrm>
         <a:graphic>
           <a:graphicData uri="http://schemas.openxmlformats.org/drawingml/2006/table">
@@ -12587,28 +17499,28 @@
                 <a:gridCol w="2271369"/>
                 <a:gridCol w="6141110"/>
               </a:tblGrid>
-              <a:tr h="349504">
-                <a:tc>
-                  <a:txBody>
-                    <a:bodyPr wrap="none"/>
-                    <a:lstStyle/>
-                    <a:p>
-                      <a:pPr>
-                        <a:lnSpc>
-                          <a:spcPts val="1600"/>
-                        </a:lnSpc>
-                        <a:spcAft>
-                          <a:spcPts val="0"/>
-                        </a:spcAft>
-                        <a:defRPr sz="1200" b="0">
-                          <a:solidFill>
-                            <a:srgbClr val="21243A"/>
-                          </a:solidFill>
-                          <a:latin typeface="Arial"/>
-                        </a:defRPr>
-                      </a:pPr>
-                      <a:r>
-                        <a:t>Provider</a:t>
+              <a:tr h="959103">
+                <a:tc>
+                  <a:txBody>
+                    <a:bodyPr wrap="none"/>
+                    <a:lstStyle/>
+                    <a:p>
+                      <a:pPr>
+                        <a:lnSpc>
+                          <a:spcPts val="1600"/>
+                        </a:lnSpc>
+                        <a:spcAft>
+                          <a:spcPts val="0"/>
+                        </a:spcAft>
+                        <a:defRPr sz="1200" b="0">
+                          <a:solidFill>
+                            <a:srgbClr val="21243A"/>
+                          </a:solidFill>
+                          <a:latin typeface="Arial"/>
+                        </a:defRPr>
+                      </a:pPr>
+                      <a:r>
+                        <a:t>Evidence 10</a:t>
                       </a:r>
                     </a:p>
                   </a:txBody>
@@ -12638,648 +17550,70 @@
                         </a:defRPr>
                       </a:pPr>
                       <a:r>
-                        <a:t>Gemini Vision</a:t>
+                        <a:t>Caveat: The fully synthetic look is strong, but a designed graphic could also</a:t>
+                      </a:r>
+                    </a:p>
+                    <a:p>
+                      <a:pPr>
+                        <a:lnSpc>
+                          <a:spcPts val="1600"/>
+                        </a:lnSpc>
+                        <a:spcAft>
+                          <a:spcPts val="0"/>
+                        </a:spcAft>
+                        <a:defRPr sz="1200" b="0">
+                          <a:solidFill>
+                            <a:srgbClr val="21243A"/>
+                          </a:solidFill>
+                          <a:latin typeface="Arial"/>
+                        </a:defRPr>
+                      </a:pPr>
+                      <a:r>
+                        <a:t>combine stock photos with heavy stylisation. Check the file's metadata,</a:t>
+                      </a:r>
+                    </a:p>
+                    <a:p>
+                      <a:pPr>
+                        <a:lnSpc>
+                          <a:spcPts val="1600"/>
+                        </a:lnSpc>
+                        <a:spcAft>
+                          <a:spcPts val="0"/>
+                        </a:spcAft>
+                        <a:defRPr sz="1200" b="0">
+                          <a:solidFill>
+                            <a:srgbClr val="21243A"/>
+                          </a:solidFill>
+                          <a:latin typeface="Arial"/>
+                        </a:defRPr>
+                      </a:pPr>
+                      <a:r>
+                        <a:t>C2PA/content credentials and reverse-image matches before attributing origin.</a:t>
+                      </a:r>
+                    </a:p>
+                    <a:p>
+                      <a:pPr>
+                        <a:lnSpc>
+                          <a:spcPts val="1600"/>
+                        </a:lnSpc>
+                        <a:spcAft>
+                          <a:spcPts val="0"/>
+                        </a:spcAft>
+                        <a:defRPr sz="1200" b="0">
+                          <a:solidFill>
+                            <a:srgbClr val="21243A"/>
+                          </a:solidFill>
+                          <a:latin typeface="Arial"/>
+                        </a:defRPr>
+                      </a:pPr>
+                      <a:r>
+                        <a:t>The rating does not assess the truth of any health claim.</a:t>
                       </a:r>
                     </a:p>
                   </a:txBody>
                   <a:tcPr marL="82296" marR="82296" marT="64008" marB="64008">
                     <a:solidFill>
                       <a:srgbClr val="F1F7F7"/>
-                    </a:solidFill>
-                  </a:tcPr>
-                </a:tc>
-              </a:tr>
-            </a:tbl>
-          </a:graphicData>
-        </a:graphic>
-      </p:graphicFrame>
-      <p:graphicFrame>
-        <p:nvGraphicFramePr>
-          <p:cNvPr id="8" name="Table 7"/>
-          <p:cNvGraphicFramePr>
-            <a:graphicFrameLocks noGrp="1"/>
-          </p:cNvGraphicFramePr>
-          <p:nvPr/>
-        </p:nvGraphicFramePr>
-        <p:xfrm>
-          <a:off x="365760" y="2050288"/>
-          <a:ext cx="8412479" cy="349504"/>
-        </p:xfrm>
-        <a:graphic>
-          <a:graphicData uri="http://schemas.openxmlformats.org/drawingml/2006/table">
-            <a:tbl>
-              <a:tblPr firstRow="1" bandRow="1">
-                <a:tableStyleId>{5C22544A-7EE6-4342-B048-85BDC9FD1C3A}</a:tableStyleId>
-              </a:tblPr>
-              <a:tblGrid>
-                <a:gridCol w="2271369"/>
-                <a:gridCol w="6141110"/>
-              </a:tblGrid>
-              <a:tr h="349504">
-                <a:tc>
-                  <a:txBody>
-                    <a:bodyPr wrap="none"/>
-                    <a:lstStyle/>
-                    <a:p>
-                      <a:pPr>
-                        <a:lnSpc>
-                          <a:spcPts val="1600"/>
-                        </a:lnSpc>
-                        <a:spcAft>
-                          <a:spcPts val="0"/>
-                        </a:spcAft>
-                        <a:defRPr sz="1200" b="0">
-                          <a:solidFill>
-                            <a:srgbClr val="21243A"/>
-                          </a:solidFill>
-                          <a:latin typeface="Arial"/>
-                        </a:defRPr>
-                      </a:pPr>
-                      <a:r>
-                        <a:t>Model</a:t>
-                      </a:r>
-                    </a:p>
-                  </a:txBody>
-                  <a:tcPr marL="82296" marR="82296" marT="64008" marB="64008">
-                    <a:solidFill>
-                      <a:srgbClr val="FFFFFF"/>
-                    </a:solidFill>
-                  </a:tcPr>
-                </a:tc>
-                <a:tc>
-                  <a:txBody>
-                    <a:bodyPr wrap="none"/>
-                    <a:lstStyle/>
-                    <a:p>
-                      <a:pPr>
-                        <a:lnSpc>
-                          <a:spcPts val="1600"/>
-                        </a:lnSpc>
-                        <a:spcAft>
-                          <a:spcPts val="0"/>
-                        </a:spcAft>
-                        <a:defRPr sz="1200" b="0">
-                          <a:solidFill>
-                            <a:srgbClr val="21243A"/>
-                          </a:solidFill>
-                          <a:latin typeface="Arial"/>
-                        </a:defRPr>
-                      </a:pPr>
-                      <a:r>
-                        <a:t>Not recorded</a:t>
-                      </a:r>
-                    </a:p>
-                  </a:txBody>
-                  <a:tcPr marL="82296" marR="82296" marT="64008" marB="64008">
-                    <a:solidFill>
-                      <a:srgbClr val="FFFFFF"/>
-                    </a:solidFill>
-                  </a:tcPr>
-                </a:tc>
-              </a:tr>
-            </a:tbl>
-          </a:graphicData>
-        </a:graphic>
-      </p:graphicFrame>
-      <p:graphicFrame>
-        <p:nvGraphicFramePr>
-          <p:cNvPr id="9" name="Table 8"/>
-          <p:cNvGraphicFramePr>
-            <a:graphicFrameLocks noGrp="1"/>
-          </p:cNvGraphicFramePr>
-          <p:nvPr/>
-        </p:nvGraphicFramePr>
-        <p:xfrm>
-          <a:off x="365760" y="2399792"/>
-          <a:ext cx="8412479" cy="349504"/>
-        </p:xfrm>
-        <a:graphic>
-          <a:graphicData uri="http://schemas.openxmlformats.org/drawingml/2006/table">
-            <a:tbl>
-              <a:tblPr firstRow="1" bandRow="1">
-                <a:tableStyleId>{5C22544A-7EE6-4342-B048-85BDC9FD1C3A}</a:tableStyleId>
-              </a:tblPr>
-              <a:tblGrid>
-                <a:gridCol w="2271369"/>
-                <a:gridCol w="6141110"/>
-              </a:tblGrid>
-              <a:tr h="349504">
-                <a:tc>
-                  <a:txBody>
-                    <a:bodyPr wrap="none"/>
-                    <a:lstStyle/>
-                    <a:p>
-                      <a:pPr>
-                        <a:lnSpc>
-                          <a:spcPts val="1600"/>
-                        </a:lnSpc>
-                        <a:spcAft>
-                          <a:spcPts val="0"/>
-                        </a:spcAft>
-                        <a:defRPr sz="1200" b="0">
-                          <a:solidFill>
-                            <a:srgbClr val="21243A"/>
-                          </a:solidFill>
-                          <a:latin typeface="Arial"/>
-                        </a:defRPr>
-                      </a:pPr>
-                      <a:r>
-                        <a:t>Status</a:t>
-                      </a:r>
-                    </a:p>
-                  </a:txBody>
-                  <a:tcPr marL="82296" marR="82296" marT="64008" marB="64008">
-                    <a:solidFill>
-                      <a:srgbClr val="F1F7F7"/>
-                    </a:solidFill>
-                  </a:tcPr>
-                </a:tc>
-                <a:tc>
-                  <a:txBody>
-                    <a:bodyPr wrap="none"/>
-                    <a:lstStyle/>
-                    <a:p>
-                      <a:pPr>
-                        <a:lnSpc>
-                          <a:spcPts val="1600"/>
-                        </a:lnSpc>
-                        <a:spcAft>
-                          <a:spcPts val="0"/>
-                        </a:spcAft>
-                        <a:defRPr sz="1200" b="0">
-                          <a:solidFill>
-                            <a:srgbClr val="21243A"/>
-                          </a:solidFill>
-                          <a:latin typeface="Arial"/>
-                        </a:defRPr>
-                      </a:pPr>
-                      <a:r>
-                        <a:t>disabled</a:t>
-                      </a:r>
-                    </a:p>
-                  </a:txBody>
-                  <a:tcPr marL="82296" marR="82296" marT="64008" marB="64008">
-                    <a:solidFill>
-                      <a:srgbClr val="F1F7F7"/>
-                    </a:solidFill>
-                  </a:tcPr>
-                </a:tc>
-              </a:tr>
-            </a:tbl>
-          </a:graphicData>
-        </a:graphic>
-      </p:graphicFrame>
-      <p:graphicFrame>
-        <p:nvGraphicFramePr>
-          <p:cNvPr id="10" name="Table 9"/>
-          <p:cNvGraphicFramePr>
-            <a:graphicFrameLocks noGrp="1"/>
-          </p:cNvGraphicFramePr>
-          <p:nvPr/>
-        </p:nvGraphicFramePr>
-        <p:xfrm>
-          <a:off x="365760" y="2749296"/>
-          <a:ext cx="8412479" cy="349504"/>
-        </p:xfrm>
-        <a:graphic>
-          <a:graphicData uri="http://schemas.openxmlformats.org/drawingml/2006/table">
-            <a:tbl>
-              <a:tblPr firstRow="1" bandRow="1">
-                <a:tableStyleId>{5C22544A-7EE6-4342-B048-85BDC9FD1C3A}</a:tableStyleId>
-              </a:tblPr>
-              <a:tblGrid>
-                <a:gridCol w="2271369"/>
-                <a:gridCol w="6141110"/>
-              </a:tblGrid>
-              <a:tr h="349504">
-                <a:tc>
-                  <a:txBody>
-                    <a:bodyPr wrap="none"/>
-                    <a:lstStyle/>
-                    <a:p>
-                      <a:pPr>
-                        <a:lnSpc>
-                          <a:spcPts val="1600"/>
-                        </a:lnSpc>
-                        <a:spcAft>
-                          <a:spcPts val="0"/>
-                        </a:spcAft>
-                        <a:defRPr sz="1200" b="0">
-                          <a:solidFill>
-                            <a:srgbClr val="21243A"/>
-                          </a:solidFill>
-                          <a:latin typeface="Arial"/>
-                        </a:defRPr>
-                      </a:pPr>
-                      <a:r>
-                        <a:t>Assessment</a:t>
-                      </a:r>
-                    </a:p>
-                  </a:txBody>
-                  <a:tcPr marL="82296" marR="82296" marT="64008" marB="64008">
-                    <a:solidFill>
-                      <a:srgbClr val="FFFFFF"/>
-                    </a:solidFill>
-                  </a:tcPr>
-                </a:tc>
-                <a:tc>
-                  <a:txBody>
-                    <a:bodyPr wrap="none"/>
-                    <a:lstStyle/>
-                    <a:p>
-                      <a:pPr>
-                        <a:lnSpc>
-                          <a:spcPts val="1600"/>
-                        </a:lnSpc>
-                        <a:spcAft>
-                          <a:spcPts val="0"/>
-                        </a:spcAft>
-                        <a:defRPr sz="1200" b="0">
-                          <a:solidFill>
-                            <a:srgbClr val="21243A"/>
-                          </a:solidFill>
-                          <a:latin typeface="Arial"/>
-                        </a:defRPr>
-                      </a:pPr>
-                      <a:r>
-                        <a:t>inconclusive</a:t>
-                      </a:r>
-                    </a:p>
-                  </a:txBody>
-                  <a:tcPr marL="82296" marR="82296" marT="64008" marB="64008">
-                    <a:solidFill>
-                      <a:srgbClr val="FFFFFF"/>
-                    </a:solidFill>
-                  </a:tcPr>
-                </a:tc>
-              </a:tr>
-            </a:tbl>
-          </a:graphicData>
-        </a:graphic>
-      </p:graphicFrame>
-      <p:graphicFrame>
-        <p:nvGraphicFramePr>
-          <p:cNvPr id="11" name="Table 10"/>
-          <p:cNvGraphicFramePr>
-            <a:graphicFrameLocks noGrp="1"/>
-          </p:cNvGraphicFramePr>
-          <p:nvPr/>
-        </p:nvGraphicFramePr>
-        <p:xfrm>
-          <a:off x="365760" y="3098800"/>
-          <a:ext cx="8412479" cy="349504"/>
-        </p:xfrm>
-        <a:graphic>
-          <a:graphicData uri="http://schemas.openxmlformats.org/drawingml/2006/table">
-            <a:tbl>
-              <a:tblPr firstRow="1" bandRow="1">
-                <a:tableStyleId>{5C22544A-7EE6-4342-B048-85BDC9FD1C3A}</a:tableStyleId>
-              </a:tblPr>
-              <a:tblGrid>
-                <a:gridCol w="2271369"/>
-                <a:gridCol w="6141110"/>
-              </a:tblGrid>
-              <a:tr h="349504">
-                <a:tc>
-                  <a:txBody>
-                    <a:bodyPr wrap="none"/>
-                    <a:lstStyle/>
-                    <a:p>
-                      <a:pPr>
-                        <a:lnSpc>
-                          <a:spcPts val="1600"/>
-                        </a:lnSpc>
-                        <a:spcAft>
-                          <a:spcPts val="0"/>
-                        </a:spcAft>
-                        <a:defRPr sz="1200" b="0">
-                          <a:solidFill>
-                            <a:srgbClr val="21243A"/>
-                          </a:solidFill>
-                          <a:latin typeface="Arial"/>
-                        </a:defRPr>
-                      </a:pPr>
-                      <a:r>
-                        <a:t>Confidence</a:t>
-                      </a:r>
-                    </a:p>
-                  </a:txBody>
-                  <a:tcPr marL="82296" marR="82296" marT="64008" marB="64008">
-                    <a:solidFill>
-                      <a:srgbClr val="F1F7F7"/>
-                    </a:solidFill>
-                  </a:tcPr>
-                </a:tc>
-                <a:tc>
-                  <a:txBody>
-                    <a:bodyPr wrap="none"/>
-                    <a:lstStyle/>
-                    <a:p>
-                      <a:pPr>
-                        <a:lnSpc>
-                          <a:spcPts val="1600"/>
-                        </a:lnSpc>
-                        <a:spcAft>
-                          <a:spcPts val="0"/>
-                        </a:spcAft>
-                        <a:defRPr sz="1200" b="0">
-                          <a:solidFill>
-                            <a:srgbClr val="21243A"/>
-                          </a:solidFill>
-                          <a:latin typeface="Arial"/>
-                        </a:defRPr>
-                      </a:pPr>
-                      <a:r>
-                        <a:t>Not recorded</a:t>
-                      </a:r>
-                    </a:p>
-                  </a:txBody>
-                  <a:tcPr marL="82296" marR="82296" marT="64008" marB="64008">
-                    <a:solidFill>
-                      <a:srgbClr val="F1F7F7"/>
-                    </a:solidFill>
-                  </a:tcPr>
-                </a:tc>
-              </a:tr>
-            </a:tbl>
-          </a:graphicData>
-        </a:graphic>
-      </p:graphicFrame>
-      <p:graphicFrame>
-        <p:nvGraphicFramePr>
-          <p:cNvPr id="12" name="Table 11"/>
-          <p:cNvGraphicFramePr>
-            <a:graphicFrameLocks noGrp="1"/>
-          </p:cNvGraphicFramePr>
-          <p:nvPr/>
-        </p:nvGraphicFramePr>
-        <p:xfrm>
-          <a:off x="365760" y="3448304"/>
-          <a:ext cx="8412479" cy="349504"/>
-        </p:xfrm>
-        <a:graphic>
-          <a:graphicData uri="http://schemas.openxmlformats.org/drawingml/2006/table">
-            <a:tbl>
-              <a:tblPr firstRow="1" bandRow="1">
-                <a:tableStyleId>{5C22544A-7EE6-4342-B048-85BDC9FD1C3A}</a:tableStyleId>
-              </a:tblPr>
-              <a:tblGrid>
-                <a:gridCol w="2271369"/>
-                <a:gridCol w="6141110"/>
-              </a:tblGrid>
-              <a:tr h="349504">
-                <a:tc>
-                  <a:txBody>
-                    <a:bodyPr wrap="none"/>
-                    <a:lstStyle/>
-                    <a:p>
-                      <a:pPr>
-                        <a:lnSpc>
-                          <a:spcPts val="1600"/>
-                        </a:lnSpc>
-                        <a:spcAft>
-                          <a:spcPts val="0"/>
-                        </a:spcAft>
-                        <a:defRPr sz="1200" b="0">
-                          <a:solidFill>
-                            <a:srgbClr val="21243A"/>
-                          </a:solidFill>
-                          <a:latin typeface="Arial"/>
-                        </a:defRPr>
-                      </a:pPr>
-                      <a:r>
-                        <a:t>Role in assessment</a:t>
-                      </a:r>
-                    </a:p>
-                  </a:txBody>
-                  <a:tcPr marL="82296" marR="82296" marT="64008" marB="64008">
-                    <a:solidFill>
-                      <a:srgbClr val="FFFFFF"/>
-                    </a:solidFill>
-                  </a:tcPr>
-                </a:tc>
-                <a:tc>
-                  <a:txBody>
-                    <a:bodyPr wrap="none"/>
-                    <a:lstStyle/>
-                    <a:p>
-                      <a:pPr>
-                        <a:lnSpc>
-                          <a:spcPts val="1600"/>
-                        </a:lnSpc>
-                        <a:spcAft>
-                          <a:spcPts val="0"/>
-                        </a:spcAft>
-                        <a:defRPr sz="1200" b="0">
-                          <a:solidFill>
-                            <a:srgbClr val="21243A"/>
-                          </a:solidFill>
-                          <a:latin typeface="Arial"/>
-                        </a:defRPr>
-                      </a:pPr>
-                      <a:r>
-                        <a:t>Not listed</a:t>
-                      </a:r>
-                    </a:p>
-                  </a:txBody>
-                  <a:tcPr marL="82296" marR="82296" marT="64008" marB="64008">
-                    <a:solidFill>
-                      <a:srgbClr val="FFFFFF"/>
-                    </a:solidFill>
-                  </a:tcPr>
-                </a:tc>
-              </a:tr>
-            </a:tbl>
-          </a:graphicData>
-        </a:graphic>
-      </p:graphicFrame>
-      <p:graphicFrame>
-        <p:nvGraphicFramePr>
-          <p:cNvPr id="13" name="Table 12"/>
-          <p:cNvGraphicFramePr>
-            <a:graphicFrameLocks noGrp="1"/>
-          </p:cNvGraphicFramePr>
-          <p:nvPr/>
-        </p:nvGraphicFramePr>
-        <p:xfrm>
-          <a:off x="365760" y="3797808"/>
-          <a:ext cx="8412479" cy="552704"/>
-        </p:xfrm>
-        <a:graphic>
-          <a:graphicData uri="http://schemas.openxmlformats.org/drawingml/2006/table">
-            <a:tbl>
-              <a:tblPr firstRow="1" bandRow="1">
-                <a:tableStyleId>{5C22544A-7EE6-4342-B048-85BDC9FD1C3A}</a:tableStyleId>
-              </a:tblPr>
-              <a:tblGrid>
-                <a:gridCol w="2271369"/>
-                <a:gridCol w="6141110"/>
-              </a:tblGrid>
-              <a:tr h="552704">
-                <a:tc>
-                  <a:txBody>
-                    <a:bodyPr wrap="none"/>
-                    <a:lstStyle/>
-                    <a:p>
-                      <a:pPr>
-                        <a:lnSpc>
-                          <a:spcPts val="1600"/>
-                        </a:lnSpc>
-                        <a:spcAft>
-                          <a:spcPts val="0"/>
-                        </a:spcAft>
-                        <a:defRPr sz="1200" b="0">
-                          <a:solidFill>
-                            <a:srgbClr val="21243A"/>
-                          </a:solidFill>
-                          <a:latin typeface="Arial"/>
-                        </a:defRPr>
-                      </a:pPr>
-                      <a:r>
-                        <a:t>Provider summary</a:t>
-                      </a:r>
-                    </a:p>
-                  </a:txBody>
-                  <a:tcPr marL="82296" marR="82296" marT="64008" marB="64008">
-                    <a:solidFill>
-                      <a:srgbClr val="F1F7F7"/>
-                    </a:solidFill>
-                  </a:tcPr>
-                </a:tc>
-                <a:tc>
-                  <a:txBody>
-                    <a:bodyPr wrap="none"/>
-                    <a:lstStyle/>
-                    <a:p>
-                      <a:pPr>
-                        <a:lnSpc>
-                          <a:spcPts val="1600"/>
-                        </a:lnSpc>
-                        <a:spcAft>
-                          <a:spcPts val="0"/>
-                        </a:spcAft>
-                        <a:defRPr sz="1200" b="0">
-                          <a:solidFill>
-                            <a:srgbClr val="21243A"/>
-                          </a:solidFill>
-                          <a:latin typeface="Arial"/>
-                        </a:defRPr>
-                      </a:pPr>
-                      <a:r>
-                        <a:t>LLM visual check not run for this example. This testing record contains local file</a:t>
-                      </a:r>
-                    </a:p>
-                    <a:p>
-                      <a:pPr>
-                        <a:lnSpc>
-                          <a:spcPts val="1600"/>
-                        </a:lnSpc>
-                        <a:spcAft>
-                          <a:spcPts val="0"/>
-                        </a:spcAft>
-                        <a:defRPr sz="1200" b="0">
-                          <a:solidFill>
-                            <a:srgbClr val="21243A"/>
-                          </a:solidFill>
-                          <a:latin typeface="Arial"/>
-                        </a:defRPr>
-                      </a:pPr>
-                      <a:r>
-                        <a:t>checks only.</a:t>
-                      </a:r>
-                    </a:p>
-                  </a:txBody>
-                  <a:tcPr marL="82296" marR="82296" marT="64008" marB="64008">
-                    <a:solidFill>
-                      <a:srgbClr val="F1F7F7"/>
-                    </a:solidFill>
-                  </a:tcPr>
-                </a:tc>
-              </a:tr>
-            </a:tbl>
-          </a:graphicData>
-        </a:graphic>
-      </p:graphicFrame>
-      <p:graphicFrame>
-        <p:nvGraphicFramePr>
-          <p:cNvPr id="14" name="Table 13"/>
-          <p:cNvGraphicFramePr>
-            <a:graphicFrameLocks noGrp="1"/>
-          </p:cNvGraphicFramePr>
-          <p:nvPr/>
-        </p:nvGraphicFramePr>
-        <p:xfrm>
-          <a:off x="365760" y="4350512"/>
-          <a:ext cx="8412479" cy="349504"/>
-        </p:xfrm>
-        <a:graphic>
-          <a:graphicData uri="http://schemas.openxmlformats.org/drawingml/2006/table">
-            <a:tbl>
-              <a:tblPr firstRow="1" bandRow="1">
-                <a:tableStyleId>{5C22544A-7EE6-4342-B048-85BDC9FD1C3A}</a:tableStyleId>
-              </a:tblPr>
-              <a:tblGrid>
-                <a:gridCol w="2271369"/>
-                <a:gridCol w="6141110"/>
-              </a:tblGrid>
-              <a:tr h="349504">
-                <a:tc>
-                  <a:txBody>
-                    <a:bodyPr wrap="none"/>
-                    <a:lstStyle/>
-                    <a:p>
-                      <a:pPr>
-                        <a:lnSpc>
-                          <a:spcPts val="1600"/>
-                        </a:lnSpc>
-                        <a:spcAft>
-                          <a:spcPts val="0"/>
-                        </a:spcAft>
-                        <a:defRPr sz="1200" b="0">
-                          <a:solidFill>
-                            <a:srgbClr val="21243A"/>
-                          </a:solidFill>
-                          <a:latin typeface="Arial"/>
-                        </a:defRPr>
-                      </a:pPr>
-                      <a:r>
-                        <a:t>Evidence 1</a:t>
-                      </a:r>
-                    </a:p>
-                  </a:txBody>
-                  <a:tcPr marL="82296" marR="82296" marT="64008" marB="64008">
-                    <a:solidFill>
-                      <a:srgbClr val="FFFFFF"/>
-                    </a:solidFill>
-                  </a:tcPr>
-                </a:tc>
-                <a:tc>
-                  <a:txBody>
-                    <a:bodyPr wrap="none"/>
-                    <a:lstStyle/>
-                    <a:p>
-                      <a:pPr>
-                        <a:lnSpc>
-                          <a:spcPts val="1600"/>
-                        </a:lnSpc>
-                        <a:spcAft>
-                          <a:spcPts val="0"/>
-                        </a:spcAft>
-                        <a:defRPr sz="1200" b="0">
-                          <a:solidFill>
-                            <a:srgbClr val="21243A"/>
-                          </a:solidFill>
-                          <a:latin typeface="Arial"/>
-                        </a:defRPr>
-                      </a:pPr>
-                      <a:r>
-                        <a:t>No request or image was sent to this provider for this record.</a:t>
-                      </a:r>
-                    </a:p>
-                  </a:txBody>
-                  <a:tcPr marL="82296" marR="82296" marT="64008" marB="64008">
-                    <a:solidFill>
-                      <a:srgbClr val="FFFFFF"/>
                     </a:solidFill>
                   </a:tcPr>
                 </a:tc>
@@ -13385,7 +17719,7 @@
               </a:defRPr>
             </a:pPr>
             <a:r>
-              <a:t>Content Credentials / provenance</a:t>
+              <a:t>Provider evidence / 2</a:t>
             </a:r>
           </a:p>
         </p:txBody>
@@ -13635,7 +17969,7 @@
                         </a:defRPr>
                       </a:pPr>
                       <a:r>
-                        <a:t>C2PA Content Credentials</a:t>
+                        <a:t>OpenAI Vision</a:t>
                       </a:r>
                     </a:p>
                   </a:txBody>
@@ -13723,7 +18057,7 @@
                         </a:defRPr>
                       </a:pPr>
                       <a:r>
-                        <a:t>Not recorded</a:t>
+                        <a:t>gpt-6-astra</a:t>
                       </a:r>
                     </a:p>
                   </a:txBody>
@@ -13899,7 +18233,7 @@
                         </a:defRPr>
                       </a:pPr>
                       <a:r>
-                        <a:t>inconclusive</a:t>
+                        <a:t>synthetic likely</a:t>
                       </a:r>
                     </a:p>
                   </a:txBody>
@@ -13987,7 +18321,7 @@
                         </a:defRPr>
                       </a:pPr>
                       <a:r>
-                        <a:t>Not recorded</a:t>
+                        <a:t>medium</a:t>
                       </a:r>
                     </a:p>
                   </a:txBody>
@@ -14075,7 +18409,7 @@
                         </a:defRPr>
                       </a:pPr>
                       <a:r>
-                        <a:t>Additional finding</a:t>
+                        <a:t>Supporting</a:t>
                       </a:r>
                     </a:p>
                   </a:txBody>
@@ -14100,7 +18434,7 @@
         </p:nvGraphicFramePr>
         <p:xfrm>
           <a:off x="365760" y="3797808"/>
-          <a:ext cx="8412479" cy="349504"/>
+          <a:ext cx="8412479" cy="1365503"/>
         </p:xfrm>
         <a:graphic>
           <a:graphicData uri="http://schemas.openxmlformats.org/drawingml/2006/table">
@@ -14112,7 +18446,7 @@
                 <a:gridCol w="2271369"/>
                 <a:gridCol w="6141110"/>
               </a:tblGrid>
-              <a:tr h="349504">
+              <a:tr h="1365503">
                 <a:tc>
                   <a:txBody>
                     <a:bodyPr wrap="none"/>
@@ -14163,7 +18497,102 @@
                         </a:defRPr>
                       </a:pPr>
                       <a:r>
-                        <a:t>Embedded credentials: none found. Origin remains unresolved by this check.</a:t>
+                        <a:t>synthetic likelihood 78/100; tells: Main vaccination scene and six inset portraits</a:t>
+                      </a:r>
+                    </a:p>
+                    <a:p>
+                      <a:pPr>
+                        <a:lnSpc>
+                          <a:spcPts val="1600"/>
+                        </a:lnSpc>
+                        <a:spcAft>
+                          <a:spcPts val="0"/>
+                        </a:spcAft>
+                        <a:defRPr sz="1200" b="0">
+                          <a:solidFill>
+                            <a:srgbClr val="21243A"/>
+                          </a:solidFill>
+                          <a:latin typeface="Arial"/>
+                        </a:defRPr>
+                      </a:pPr>
+                      <a:r>
+                        <a:t>share unusually uniform cinematic lighting and textured skin rendering., Syringe</a:t>
+                      </a:r>
+                    </a:p>
+                    <a:p>
+                      <a:pPr>
+                        <a:lnSpc>
+                          <a:spcPts val="1600"/>
+                        </a:lnSpc>
+                        <a:spcAft>
+                          <a:spcPts val="0"/>
+                        </a:spcAft>
+                        <a:defRPr sz="1200" b="0">
+                          <a:solidFill>
+                            <a:srgbClr val="21243A"/>
+                          </a:solidFill>
+                          <a:latin typeface="Arial"/>
+                        </a:defRPr>
+                      </a:pPr>
+                      <a:r>
+                        <a:t>barrel, plunger, and gloved grip have indistinct, difficult-to-reconcile geometry.,</a:t>
+                      </a:r>
+                    </a:p>
+                    <a:p>
+                      <a:pPr>
+                        <a:lnSpc>
+                          <a:spcPts val="1600"/>
+                        </a:lnSpc>
+                        <a:spcAft>
+                          <a:spcPts val="0"/>
+                        </a:spcAft>
+                        <a:defRPr sz="1200" b="0">
+                          <a:solidFill>
+                            <a:srgbClr val="21243A"/>
+                          </a:solidFill>
+                          <a:latin typeface="Arial"/>
+                        </a:defRPr>
+                      </a:pPr>
+                      <a:r>
+                        <a:t>Hair and facial creases in several portraits appear unusually densely sharpened</a:t>
+                      </a:r>
+                    </a:p>
+                    <a:p>
+                      <a:pPr>
+                        <a:lnSpc>
+                          <a:spcPts val="1600"/>
+                        </a:lnSpc>
+                        <a:spcAft>
+                          <a:spcPts val="0"/>
+                        </a:spcAft>
+                        <a:defRPr sz="1200" b="0">
+                          <a:solidFill>
+                            <a:srgbClr val="21243A"/>
+                          </a:solidFill>
+                          <a:latin typeface="Arial"/>
+                        </a:defRPr>
+                      </a:pPr>
+                      <a:r>
+                        <a:t>against smooth backgrounds., Crisp, coherent typography and neatly aligned</a:t>
+                      </a:r>
+                    </a:p>
+                    <a:p>
+                      <a:pPr>
+                        <a:lnSpc>
+                          <a:spcPts val="1600"/>
+                        </a:lnSpc>
+                        <a:spcAft>
+                          <a:spcPts val="0"/>
+                        </a:spcAft>
+                        <a:defRPr sz="1200" b="0">
+                          <a:solidFill>
+                            <a:srgbClr val="21243A"/>
+                          </a:solidFill>
+                          <a:latin typeface="Arial"/>
+                        </a:defRPr>
+                      </a:pPr>
+                      <a:r>
+                        <a:t>panels indicate a designed graphic but do not independently establish AI use.</a:t>
                       </a:r>
                     </a:p>
                   </a:txBody>
@@ -14187,7 +18616,7 @@
           <p:nvPr/>
         </p:nvGraphicFramePr>
         <p:xfrm>
-          <a:off x="365760" y="4147312"/>
+          <a:off x="365760" y="5163312"/>
           <a:ext cx="8412479" cy="552704"/>
         </p:xfrm>
         <a:graphic>
@@ -14251,240 +18680,26 @@
                         </a:defRPr>
                       </a:pPr>
                       <a:r>
-                        <a:t>Coverage: credentials embedded in the submitted file. External credentials were</a:t>
-                      </a:r>
-                    </a:p>
-                    <a:p>
-                      <a:pPr>
-                        <a:lnSpc>
-                          <a:spcPts val="1600"/>
-                        </a:lnSpc>
-                        <a:spcAft>
-                          <a:spcPts val="0"/>
-                        </a:spcAft>
-                        <a:defRPr sz="1200" b="0">
-                          <a:solidFill>
-                            <a:srgbClr val="21243A"/>
-                          </a:solidFill>
-                          <a:latin typeface="Arial"/>
-                        </a:defRPr>
-                      </a:pPr>
-                      <a:r>
-                        <a:t>not retrieved.</a:t>
-                      </a:r>
-                    </a:p>
-                  </a:txBody>
-                  <a:tcPr marL="82296" marR="82296" marT="64008" marB="64008">
-                    <a:solidFill>
-                      <a:srgbClr val="FFFFFF"/>
-                    </a:solidFill>
-                  </a:tcPr>
-                </a:tc>
-              </a:tr>
-            </a:tbl>
-          </a:graphicData>
-        </a:graphic>
-      </p:graphicFrame>
-      <p:graphicFrame>
-        <p:nvGraphicFramePr>
-          <p:cNvPr id="15" name="Table 14"/>
-          <p:cNvGraphicFramePr>
-            <a:graphicFrameLocks noGrp="1"/>
-          </p:cNvGraphicFramePr>
-          <p:nvPr/>
-        </p:nvGraphicFramePr>
-        <p:xfrm>
-          <a:off x="365760" y="4700016"/>
-          <a:ext cx="8412479" cy="552704"/>
-        </p:xfrm>
-        <a:graphic>
-          <a:graphicData uri="http://schemas.openxmlformats.org/drawingml/2006/table">
-            <a:tbl>
-              <a:tblPr firstRow="1" bandRow="1">
-                <a:tableStyleId>{5C22544A-7EE6-4342-B048-85BDC9FD1C3A}</a:tableStyleId>
-              </a:tblPr>
-              <a:tblGrid>
-                <a:gridCol w="2271369"/>
-                <a:gridCol w="6141110"/>
-              </a:tblGrid>
-              <a:tr h="552704">
-                <a:tc>
-                  <a:txBody>
-                    <a:bodyPr wrap="none"/>
-                    <a:lstStyle/>
-                    <a:p>
-                      <a:pPr>
-                        <a:lnSpc>
-                          <a:spcPts val="1600"/>
-                        </a:lnSpc>
-                        <a:spcAft>
-                          <a:spcPts val="0"/>
-                        </a:spcAft>
-                        <a:defRPr sz="1200" b="0">
-                          <a:solidFill>
-                            <a:srgbClr val="21243A"/>
-                          </a:solidFill>
-                          <a:latin typeface="Arial"/>
-                        </a:defRPr>
-                      </a:pPr>
-                      <a:r>
-                        <a:t>Evidence 2</a:t>
-                      </a:r>
-                    </a:p>
-                  </a:txBody>
-                  <a:tcPr marL="82296" marR="82296" marT="64008" marB="64008">
-                    <a:solidFill>
-                      <a:srgbClr val="F1F7F7"/>
-                    </a:solidFill>
-                  </a:tcPr>
-                </a:tc>
-                <a:tc>
-                  <a:txBody>
-                    <a:bodyPr wrap="none"/>
-                    <a:lstStyle/>
-                    <a:p>
-                      <a:pPr>
-                        <a:lnSpc>
-                          <a:spcPts val="1600"/>
-                        </a:lnSpc>
-                        <a:spcAft>
-                          <a:spcPts val="0"/>
-                        </a:spcAft>
-                        <a:defRPr sz="1200" b="0">
-                          <a:solidFill>
-                            <a:srgbClr val="21243A"/>
-                          </a:solidFill>
-                          <a:latin typeface="Arial"/>
-                        </a:defRPr>
-                      </a:pPr>
-                      <a:r>
-                        <a:t>Verifier: c2pa-python 0.37.12; native SDK 0.91.0; specification target 2.4; policy</a:t>
-                      </a:r>
-                    </a:p>
-                    <a:p>
-                      <a:pPr>
-                        <a:lnSpc>
-                          <a:spcPts val="1600"/>
-                        </a:lnSpc>
-                        <a:spcAft>
-                          <a:spcPts val="0"/>
-                        </a:spcAft>
-                        <a:defRPr sz="1200" b="0">
-                          <a:solidFill>
-                            <a:srgbClr val="21243A"/>
-                          </a:solidFill>
-                          <a:latin typeface="Arial"/>
-                        </a:defRPr>
-                      </a:pPr>
-                      <a:r>
-                        <a:t>embedded-offline-reviewed-trust-v3.</a:t>
-                      </a:r>
-                    </a:p>
-                  </a:txBody>
-                  <a:tcPr marL="82296" marR="82296" marT="64008" marB="64008">
-                    <a:solidFill>
-                      <a:srgbClr val="F1F7F7"/>
-                    </a:solidFill>
-                  </a:tcPr>
-                </a:tc>
-              </a:tr>
-            </a:tbl>
-          </a:graphicData>
-        </a:graphic>
-      </p:graphicFrame>
-      <p:graphicFrame>
-        <p:nvGraphicFramePr>
-          <p:cNvPr id="16" name="Table 15"/>
-          <p:cNvGraphicFramePr>
-            <a:graphicFrameLocks noGrp="1"/>
-          </p:cNvGraphicFramePr>
-          <p:nvPr/>
-        </p:nvGraphicFramePr>
-        <p:xfrm>
-          <a:off x="365760" y="5252720"/>
-          <a:ext cx="8412479" cy="552704"/>
-        </p:xfrm>
-        <a:graphic>
-          <a:graphicData uri="http://schemas.openxmlformats.org/drawingml/2006/table">
-            <a:tbl>
-              <a:tblPr firstRow="1" bandRow="1">
-                <a:tableStyleId>{5C22544A-7EE6-4342-B048-85BDC9FD1C3A}</a:tableStyleId>
-              </a:tblPr>
-              <a:tblGrid>
-                <a:gridCol w="2271369"/>
-                <a:gridCol w="6141110"/>
-              </a:tblGrid>
-              <a:tr h="552704">
-                <a:tc>
-                  <a:txBody>
-                    <a:bodyPr wrap="none"/>
-                    <a:lstStyle/>
-                    <a:p>
-                      <a:pPr>
-                        <a:lnSpc>
-                          <a:spcPts val="1600"/>
-                        </a:lnSpc>
-                        <a:spcAft>
-                          <a:spcPts val="0"/>
-                        </a:spcAft>
-                        <a:defRPr sz="1200" b="0">
-                          <a:solidFill>
-                            <a:srgbClr val="21243A"/>
-                          </a:solidFill>
-                          <a:latin typeface="Arial"/>
-                        </a:defRPr>
-                      </a:pPr>
-                      <a:r>
-                        <a:t>Evidence 3</a:t>
-                      </a:r>
-                    </a:p>
-                  </a:txBody>
-                  <a:tcPr marL="82296" marR="82296" marT="64008" marB="64008">
-                    <a:solidFill>
-                      <a:srgbClr val="FFFFFF"/>
-                    </a:solidFill>
-                  </a:tcPr>
-                </a:tc>
-                <a:tc>
-                  <a:txBody>
-                    <a:bodyPr wrap="none"/>
-                    <a:lstStyle/>
-                    <a:p>
-                      <a:pPr>
-                        <a:lnSpc>
-                          <a:spcPts val="1600"/>
-                        </a:lnSpc>
-                        <a:spcAft>
-                          <a:spcPts val="0"/>
-                        </a:spcAft>
-                        <a:defRPr sz="1200" b="0">
-                          <a:solidFill>
-                            <a:srgbClr val="21243A"/>
-                          </a:solidFill>
-                          <a:latin typeface="Arial"/>
-                        </a:defRPr>
-                      </a:pPr>
-                      <a:r>
-                        <a:t>Offline embedded-manifest verification; no network trust-list, manifest or</a:t>
-                      </a:r>
-                    </a:p>
-                    <a:p>
-                      <a:pPr>
-                        <a:lnSpc>
-                          <a:spcPts val="1600"/>
-                        </a:lnSpc>
-                        <a:spcAft>
-                          <a:spcPts val="0"/>
-                        </a:spcAft>
-                        <a:defRPr sz="1200" b="0">
-                          <a:solidFill>
-                            <a:srgbClr val="21243A"/>
-                          </a:solidFill>
-                          <a:latin typeface="Arial"/>
-                        </a:defRPr>
-                      </a:pPr>
-                      <a:r>
-                        <a:t>revocation refresh.</a:t>
+                        <a:t>Main vaccination scene and six inset portraits share unusually uniform cinematic</a:t>
+                      </a:r>
+                    </a:p>
+                    <a:p>
+                      <a:pPr>
+                        <a:lnSpc>
+                          <a:spcPts val="1600"/>
+                        </a:lnSpc>
+                        <a:spcAft>
+                          <a:spcPts val="0"/>
+                        </a:spcAft>
+                        <a:defRPr sz="1200" b="0">
+                          <a:solidFill>
+                            <a:srgbClr val="21243A"/>
+                          </a:solidFill>
+                          <a:latin typeface="Arial"/>
+                        </a:defRPr>
+                      </a:pPr>
+                      <a:r>
+                        <a:t>lighting and textured skin rendering.</a:t>
                       </a:r>
                     </a:p>
                   </a:txBody>
@@ -14596,7 +18811,7 @@
               </a:defRPr>
             </a:pPr>
             <a:r>
-              <a:t>Content Credentials / provenance (continued)</a:t>
+              <a:t>Provider evidence / 2 (continued)</a:t>
             </a:r>
           </a:p>
         </p:txBody>
@@ -14816,6 +19031,220 @@
                         </a:defRPr>
                       </a:pPr>
                       <a:r>
+                        <a:t>Evidence 2</a:t>
+                      </a:r>
+                    </a:p>
+                  </a:txBody>
+                  <a:tcPr marL="82296" marR="82296" marT="64008" marB="64008">
+                    <a:solidFill>
+                      <a:srgbClr val="F1F7F7"/>
+                    </a:solidFill>
+                  </a:tcPr>
+                </a:tc>
+                <a:tc>
+                  <a:txBody>
+                    <a:bodyPr wrap="none"/>
+                    <a:lstStyle/>
+                    <a:p>
+                      <a:pPr>
+                        <a:lnSpc>
+                          <a:spcPts val="1600"/>
+                        </a:lnSpc>
+                        <a:spcAft>
+                          <a:spcPts val="0"/>
+                        </a:spcAft>
+                        <a:defRPr sz="1200" b="0">
+                          <a:solidFill>
+                            <a:srgbClr val="21243A"/>
+                          </a:solidFill>
+                          <a:latin typeface="Arial"/>
+                        </a:defRPr>
+                      </a:pPr>
+                      <a:r>
+                        <a:t>Syringe barrel, plunger, and gloved grip have indistinct, difficult-to-reconcile</a:t>
+                      </a:r>
+                    </a:p>
+                    <a:p>
+                      <a:pPr>
+                        <a:lnSpc>
+                          <a:spcPts val="1600"/>
+                        </a:lnSpc>
+                        <a:spcAft>
+                          <a:spcPts val="0"/>
+                        </a:spcAft>
+                        <a:defRPr sz="1200" b="0">
+                          <a:solidFill>
+                            <a:srgbClr val="21243A"/>
+                          </a:solidFill>
+                          <a:latin typeface="Arial"/>
+                        </a:defRPr>
+                      </a:pPr>
+                      <a:r>
+                        <a:t>geometry.</a:t>
+                      </a:r>
+                    </a:p>
+                  </a:txBody>
+                  <a:tcPr marL="82296" marR="82296" marT="64008" marB="64008">
+                    <a:solidFill>
+                      <a:srgbClr val="F1F7F7"/>
+                    </a:solidFill>
+                  </a:tcPr>
+                </a:tc>
+              </a:tr>
+            </a:tbl>
+          </a:graphicData>
+        </a:graphic>
+      </p:graphicFrame>
+      <p:graphicFrame>
+        <p:nvGraphicFramePr>
+          <p:cNvPr id="8" name="Table 7"/>
+          <p:cNvGraphicFramePr>
+            <a:graphicFrameLocks noGrp="1"/>
+          </p:cNvGraphicFramePr>
+          <p:nvPr/>
+        </p:nvGraphicFramePr>
+        <p:xfrm>
+          <a:off x="365760" y="2253488"/>
+          <a:ext cx="8412479" cy="552704"/>
+        </p:xfrm>
+        <a:graphic>
+          <a:graphicData uri="http://schemas.openxmlformats.org/drawingml/2006/table">
+            <a:tbl>
+              <a:tblPr firstRow="1" bandRow="1">
+                <a:tableStyleId>{5C22544A-7EE6-4342-B048-85BDC9FD1C3A}</a:tableStyleId>
+              </a:tblPr>
+              <a:tblGrid>
+                <a:gridCol w="2271369"/>
+                <a:gridCol w="6141110"/>
+              </a:tblGrid>
+              <a:tr h="552704">
+                <a:tc>
+                  <a:txBody>
+                    <a:bodyPr wrap="none"/>
+                    <a:lstStyle/>
+                    <a:p>
+                      <a:pPr>
+                        <a:lnSpc>
+                          <a:spcPts val="1600"/>
+                        </a:lnSpc>
+                        <a:spcAft>
+                          <a:spcPts val="0"/>
+                        </a:spcAft>
+                        <a:defRPr sz="1200" b="0">
+                          <a:solidFill>
+                            <a:srgbClr val="21243A"/>
+                          </a:solidFill>
+                          <a:latin typeface="Arial"/>
+                        </a:defRPr>
+                      </a:pPr>
+                      <a:r>
+                        <a:t>Evidence 3</a:t>
+                      </a:r>
+                    </a:p>
+                  </a:txBody>
+                  <a:tcPr marL="82296" marR="82296" marT="64008" marB="64008">
+                    <a:solidFill>
+                      <a:srgbClr val="FFFFFF"/>
+                    </a:solidFill>
+                  </a:tcPr>
+                </a:tc>
+                <a:tc>
+                  <a:txBody>
+                    <a:bodyPr wrap="none"/>
+                    <a:lstStyle/>
+                    <a:p>
+                      <a:pPr>
+                        <a:lnSpc>
+                          <a:spcPts val="1600"/>
+                        </a:lnSpc>
+                        <a:spcAft>
+                          <a:spcPts val="0"/>
+                        </a:spcAft>
+                        <a:defRPr sz="1200" b="0">
+                          <a:solidFill>
+                            <a:srgbClr val="21243A"/>
+                          </a:solidFill>
+                          <a:latin typeface="Arial"/>
+                        </a:defRPr>
+                      </a:pPr>
+                      <a:r>
+                        <a:t>Hair and facial creases in several portraits appear unusually densely sharpened</a:t>
+                      </a:r>
+                    </a:p>
+                    <a:p>
+                      <a:pPr>
+                        <a:lnSpc>
+                          <a:spcPts val="1600"/>
+                        </a:lnSpc>
+                        <a:spcAft>
+                          <a:spcPts val="0"/>
+                        </a:spcAft>
+                        <a:defRPr sz="1200" b="0">
+                          <a:solidFill>
+                            <a:srgbClr val="21243A"/>
+                          </a:solidFill>
+                          <a:latin typeface="Arial"/>
+                        </a:defRPr>
+                      </a:pPr>
+                      <a:r>
+                        <a:t>against smooth backgrounds.</a:t>
+                      </a:r>
+                    </a:p>
+                  </a:txBody>
+                  <a:tcPr marL="82296" marR="82296" marT="64008" marB="64008">
+                    <a:solidFill>
+                      <a:srgbClr val="FFFFFF"/>
+                    </a:solidFill>
+                  </a:tcPr>
+                </a:tc>
+              </a:tr>
+            </a:tbl>
+          </a:graphicData>
+        </a:graphic>
+      </p:graphicFrame>
+      <p:graphicFrame>
+        <p:nvGraphicFramePr>
+          <p:cNvPr id="9" name="Table 8"/>
+          <p:cNvGraphicFramePr>
+            <a:graphicFrameLocks noGrp="1"/>
+          </p:cNvGraphicFramePr>
+          <p:nvPr/>
+        </p:nvGraphicFramePr>
+        <p:xfrm>
+          <a:off x="365760" y="2806192"/>
+          <a:ext cx="8412479" cy="552704"/>
+        </p:xfrm>
+        <a:graphic>
+          <a:graphicData uri="http://schemas.openxmlformats.org/drawingml/2006/table">
+            <a:tbl>
+              <a:tblPr firstRow="1" bandRow="1">
+                <a:tableStyleId>{5C22544A-7EE6-4342-B048-85BDC9FD1C3A}</a:tableStyleId>
+              </a:tblPr>
+              <a:tblGrid>
+                <a:gridCol w="2271369"/>
+                <a:gridCol w="6141110"/>
+              </a:tblGrid>
+              <a:tr h="552704">
+                <a:tc>
+                  <a:txBody>
+                    <a:bodyPr wrap="none"/>
+                    <a:lstStyle/>
+                    <a:p>
+                      <a:pPr>
+                        <a:lnSpc>
+                          <a:spcPts val="1600"/>
+                        </a:lnSpc>
+                        <a:spcAft>
+                          <a:spcPts val="0"/>
+                        </a:spcAft>
+                        <a:defRPr sz="1200" b="0">
+                          <a:solidFill>
+                            <a:srgbClr val="21243A"/>
+                          </a:solidFill>
+                          <a:latin typeface="Arial"/>
+                        </a:defRPr>
+                      </a:pPr>
+                      <a:r>
                         <a:t>Evidence 4</a:t>
                       </a:r>
                     </a:p>
@@ -14846,32 +19275,158 @@
                         </a:defRPr>
                       </a:pPr>
                       <a:r>
-                        <a:t>No reviewed local C2PA trust snapshot installed. Provenance overrides are</a:t>
-                      </a:r>
-                    </a:p>
-                    <a:p>
-                      <a:pPr>
-                        <a:lnSpc>
-                          <a:spcPts val="1600"/>
-                        </a:lnSpc>
-                        <a:spcAft>
-                          <a:spcPts val="0"/>
-                        </a:spcAft>
-                        <a:defRPr sz="1200" b="0">
-                          <a:solidFill>
-                            <a:srgbClr val="21243A"/>
-                          </a:solidFill>
-                          <a:latin typeface="Arial"/>
-                        </a:defRPr>
-                      </a:pPr>
-                      <a:r>
-                        <a:t>disabled.</a:t>
+                        <a:t>Crisp, coherent typography and neatly aligned panels indicate a designed graphic</a:t>
+                      </a:r>
+                    </a:p>
+                    <a:p>
+                      <a:pPr>
+                        <a:lnSpc>
+                          <a:spcPts val="1600"/>
+                        </a:lnSpc>
+                        <a:spcAft>
+                          <a:spcPts val="0"/>
+                        </a:spcAft>
+                        <a:defRPr sz="1200" b="0">
+                          <a:solidFill>
+                            <a:srgbClr val="21243A"/>
+                          </a:solidFill>
+                          <a:latin typeface="Arial"/>
+                        </a:defRPr>
+                      </a:pPr>
+                      <a:r>
+                        <a:t>but do not independently establish AI use.</a:t>
                       </a:r>
                     </a:p>
                   </a:txBody>
                   <a:tcPr marL="82296" marR="82296" marT="64008" marB="64008">
                     <a:solidFill>
                       <a:srgbClr val="F1F7F7"/>
+                    </a:solidFill>
+                  </a:tcPr>
+                </a:tc>
+              </a:tr>
+            </a:tbl>
+          </a:graphicData>
+        </a:graphic>
+      </p:graphicFrame>
+      <p:graphicFrame>
+        <p:nvGraphicFramePr>
+          <p:cNvPr id="10" name="Table 9"/>
+          <p:cNvGraphicFramePr>
+            <a:graphicFrameLocks noGrp="1"/>
+          </p:cNvGraphicFramePr>
+          <p:nvPr/>
+        </p:nvGraphicFramePr>
+        <p:xfrm>
+          <a:off x="365760" y="3358896"/>
+          <a:ext cx="8412479" cy="755904"/>
+        </p:xfrm>
+        <a:graphic>
+          <a:graphicData uri="http://schemas.openxmlformats.org/drawingml/2006/table">
+            <a:tbl>
+              <a:tblPr firstRow="1" bandRow="1">
+                <a:tableStyleId>{5C22544A-7EE6-4342-B048-85BDC9FD1C3A}</a:tableStyleId>
+              </a:tblPr>
+              <a:tblGrid>
+                <a:gridCol w="2271369"/>
+                <a:gridCol w="6141110"/>
+              </a:tblGrid>
+              <a:tr h="755904">
+                <a:tc>
+                  <a:txBody>
+                    <a:bodyPr wrap="none"/>
+                    <a:lstStyle/>
+                    <a:p>
+                      <a:pPr>
+                        <a:lnSpc>
+                          <a:spcPts val="1600"/>
+                        </a:lnSpc>
+                        <a:spcAft>
+                          <a:spcPts val="0"/>
+                        </a:spcAft>
+                        <a:defRPr sz="1200" b="0">
+                          <a:solidFill>
+                            <a:srgbClr val="21243A"/>
+                          </a:solidFill>
+                          <a:latin typeface="Arial"/>
+                        </a:defRPr>
+                      </a:pPr>
+                      <a:r>
+                        <a:t>Evidence 5</a:t>
+                      </a:r>
+                    </a:p>
+                  </a:txBody>
+                  <a:tcPr marL="82296" marR="82296" marT="64008" marB="64008">
+                    <a:solidFill>
+                      <a:srgbClr val="FFFFFF"/>
+                    </a:solidFill>
+                  </a:tcPr>
+                </a:tc>
+                <a:tc>
+                  <a:txBody>
+                    <a:bodyPr wrap="none"/>
+                    <a:lstStyle/>
+                    <a:p>
+                      <a:pPr>
+                        <a:lnSpc>
+                          <a:spcPts val="1600"/>
+                        </a:lnSpc>
+                        <a:spcAft>
+                          <a:spcPts val="0"/>
+                        </a:spcAft>
+                        <a:defRPr sz="1200" b="0">
+                          <a:solidFill>
+                            <a:srgbClr val="21243A"/>
+                          </a:solidFill>
+                          <a:latin typeface="Arial"/>
+                        </a:defRPr>
+                      </a:pPr>
+                      <a:r>
+                        <a:t>Caveat: A professionally designed collage of stock photographs could produce</a:t>
+                      </a:r>
+                    </a:p>
+                    <a:p>
+                      <a:pPr>
+                        <a:lnSpc>
+                          <a:spcPts val="1600"/>
+                        </a:lnSpc>
+                        <a:spcAft>
+                          <a:spcPts val="0"/>
+                        </a:spcAft>
+                        <a:defRPr sz="1200" b="0">
+                          <a:solidFill>
+                            <a:srgbClr val="21243A"/>
+                          </a:solidFill>
+                          <a:latin typeface="Arial"/>
+                        </a:defRPr>
+                      </a:pPr>
+                      <a:r>
+                        <a:t>similar styling; source assets and provenance are needed to distinguish generated</a:t>
+                      </a:r>
+                    </a:p>
+                    <a:p>
+                      <a:pPr>
+                        <a:lnSpc>
+                          <a:spcPts val="1600"/>
+                        </a:lnSpc>
+                        <a:spcAft>
+                          <a:spcPts val="0"/>
+                        </a:spcAft>
+                        <a:defRPr sz="1200" b="0">
+                          <a:solidFill>
+                            <a:srgbClr val="21243A"/>
+                          </a:solidFill>
+                          <a:latin typeface="Arial"/>
+                        </a:defRPr>
+                      </a:pPr>
+                      <a:r>
+                        <a:t>portraits from conventional editing.</a:t>
+                      </a:r>
+                    </a:p>
+                  </a:txBody>
+                  <a:tcPr marL="82296" marR="82296" marT="64008" marB="64008">
+                    <a:solidFill>
+                      <a:srgbClr val="FFFFFF"/>
                     </a:solidFill>
                   </a:tcPr>
                 </a:tc>
@@ -14977,7 +19532,7 @@
               </a:defRPr>
             </a:pPr>
             <a:r>
-              <a:t>Provider evidence / 5</a:t>
+              <a:t>Provider evidence / 3</a:t>
             </a:r>
           </a:p>
         </p:txBody>
@@ -15227,7 +19782,7 @@
                         </a:defRPr>
                       </a:pPr>
                       <a:r>
-                        <a:t>Local forensic cues</a:t>
+                        <a:t>Gemini Vision</a:t>
                       </a:r>
                     </a:p>
                   </a:txBody>
@@ -15315,7 +19870,7 @@
                         </a:defRPr>
                       </a:pPr>
                       <a:r>
-                        <a:t>Not recorded</a:t>
+                        <a:t>gemini-3.8-flash</a:t>
                       </a:r>
                     </a:p>
                   </a:txBody>
@@ -15491,7 +20046,7 @@
                         </a:defRPr>
                       </a:pPr>
                       <a:r>
-                        <a:t>partially synthetic</a:t>
+                        <a:t>synthetic likely</a:t>
                       </a:r>
                     </a:p>
                   </a:txBody>
@@ -15579,7 +20134,7 @@
                         </a:defRPr>
                       </a:pPr>
                       <a:r>
-                        <a:t>low</a:t>
+                        <a:t>medium</a:t>
                       </a:r>
                     </a:p>
                   </a:txBody>
@@ -15667,7 +20222,7 @@
                         </a:defRPr>
                       </a:pPr>
                       <a:r>
-                        <a:t>Additional finding</a:t>
+                        <a:t>Supporting</a:t>
                       </a:r>
                     </a:p>
                   </a:txBody>
@@ -15692,7 +20247,7 @@
         </p:nvGraphicFramePr>
         <p:xfrm>
           <a:off x="365760" y="3797808"/>
-          <a:ext cx="8412479" cy="349504"/>
+          <a:ext cx="8412479" cy="755904"/>
         </p:xfrm>
         <a:graphic>
           <a:graphicData uri="http://schemas.openxmlformats.org/drawingml/2006/table">
@@ -15704,7 +20259,7 @@
                 <a:gridCol w="2271369"/>
                 <a:gridCol w="6141110"/>
               </a:tblGrid>
-              <a:tr h="349504">
+              <a:tr h="755904">
                 <a:tc>
                   <a:txBody>
                     <a:bodyPr wrap="none"/>
@@ -15755,7 +20310,45 @@
                         </a:defRPr>
                       </a:pPr>
                       <a:r>
-                        <a:t>Heuristic synthetic likelihood 41/100 from metadata + pixel statistics.</a:t>
+                        <a:t>synthetic likelihood 72/100; tells: model read this as AI editing over a</a:t>
+                      </a:r>
+                    </a:p>
+                    <a:p>
+                      <a:pPr>
+                        <a:lnSpc>
+                          <a:spcPts val="1600"/>
+                        </a:lnSpc>
+                        <a:spcAft>
+                          <a:spcPts val="0"/>
+                        </a:spcAft>
+                        <a:defRPr sz="1200" b="0">
+                          <a:solidFill>
+                            <a:srgbClr val="21243A"/>
+                          </a:solidFill>
+                          <a:latin typeface="Arial"/>
+                        </a:defRPr>
+                      </a:pPr>
+                      <a:r>
+                        <a:t>photographic base image, hyper-rendered skin textures, characteristic AI portrait</a:t>
+                      </a:r>
+                    </a:p>
+                    <a:p>
+                      <a:pPr>
+                        <a:lnSpc>
+                          <a:spcPts val="1600"/>
+                        </a:lnSpc>
+                        <a:spcAft>
+                          <a:spcPts val="0"/>
+                        </a:spcAft>
+                        <a:defRPr sz="1200" b="0">
+                          <a:solidFill>
+                            <a:srgbClr val="21243A"/>
+                          </a:solidFill>
+                          <a:latin typeface="Arial"/>
+                        </a:defRPr>
+                      </a:pPr>
+                      <a:r>
+                        <a:t>lighting across multiple subjects, slightly unnatural finger and needle interaction</a:t>
                       </a:r>
                     </a:p>
                   </a:txBody>
@@ -15779,7 +20372,7 @@
           <p:nvPr/>
         </p:nvGraphicFramePr>
         <p:xfrm>
-          <a:off x="365760" y="4147312"/>
+          <a:off x="365760" y="4553712"/>
           <a:ext cx="8412479" cy="349504"/>
         </p:xfrm>
         <a:graphic>
@@ -15843,7 +20436,7 @@
                         </a:defRPr>
                       </a:pPr>
                       <a:r>
-                        <a:t>No camera EXIF (common in AI exports, screenshots, and re-saves).</a:t>
+                        <a:t>Model read this as AI editing over a photographic base image</a:t>
                       </a:r>
                     </a:p>
                   </a:txBody>
@@ -15867,7 +20460,7 @@
           <p:nvPr/>
         </p:nvGraphicFramePr>
         <p:xfrm>
-          <a:off x="365760" y="4496816"/>
+          <a:off x="365760" y="4903216"/>
           <a:ext cx="8412479" cy="349504"/>
         </p:xfrm>
         <a:graphic>
@@ -15931,7 +20524,7 @@
                         </a:defRPr>
                       </a:pPr>
                       <a:r>
-                        <a:t>ELA mean 1.8, peak 53 (uniform high ELA can indicate generation/heavy edit).</a:t>
+                        <a:t>Hyper-rendered skin textures</a:t>
                       </a:r>
                     </a:p>
                   </a:txBody>
@@ -15955,7 +20548,7 @@
           <p:nvPr/>
         </p:nvGraphicFramePr>
         <p:xfrm>
-          <a:off x="365760" y="4846320"/>
+          <a:off x="365760" y="5252720"/>
           <a:ext cx="8412479" cy="349504"/>
         </p:xfrm>
         <a:graphic>
@@ -16019,101 +20612,13 @@
                         </a:defRPr>
                       </a:pPr>
                       <a:r>
-                        <a:t>High-frequency noise std 10.42 (very low/very uniform noise is a synthesis cue).</a:t>
+                        <a:t>Characteristic AI portrait lighting across multiple subjects</a:t>
                       </a:r>
                     </a:p>
                   </a:txBody>
                   <a:tcPr marL="82296" marR="82296" marT="64008" marB="64008">
                     <a:solidFill>
                       <a:srgbClr val="FFFFFF"/>
-                    </a:solidFill>
-                  </a:tcPr>
-                </a:tc>
-              </a:tr>
-            </a:tbl>
-          </a:graphicData>
-        </a:graphic>
-      </p:graphicFrame>
-      <p:graphicFrame>
-        <p:nvGraphicFramePr>
-          <p:cNvPr id="17" name="Table 16"/>
-          <p:cNvGraphicFramePr>
-            <a:graphicFrameLocks noGrp="1"/>
-          </p:cNvGraphicFramePr>
-          <p:nvPr/>
-        </p:nvGraphicFramePr>
-        <p:xfrm>
-          <a:off x="365760" y="5195824"/>
-          <a:ext cx="8412479" cy="349504"/>
-        </p:xfrm>
-        <a:graphic>
-          <a:graphicData uri="http://schemas.openxmlformats.org/drawingml/2006/table">
-            <a:tbl>
-              <a:tblPr firstRow="1" bandRow="1">
-                <a:tableStyleId>{5C22544A-7EE6-4342-B048-85BDC9FD1C3A}</a:tableStyleId>
-              </a:tblPr>
-              <a:tblGrid>
-                <a:gridCol w="2271369"/>
-                <a:gridCol w="6141110"/>
-              </a:tblGrid>
-              <a:tr h="349504">
-                <a:tc>
-                  <a:txBody>
-                    <a:bodyPr wrap="none"/>
-                    <a:lstStyle/>
-                    <a:p>
-                      <a:pPr>
-                        <a:lnSpc>
-                          <a:spcPts val="1600"/>
-                        </a:lnSpc>
-                        <a:spcAft>
-                          <a:spcPts val="0"/>
-                        </a:spcAft>
-                        <a:defRPr sz="1200" b="0">
-                          <a:solidFill>
-                            <a:srgbClr val="21243A"/>
-                          </a:solidFill>
-                          <a:latin typeface="Arial"/>
-                        </a:defRPr>
-                      </a:pPr>
-                      <a:r>
-                        <a:t>Evidence 4</a:t>
-                      </a:r>
-                    </a:p>
-                  </a:txBody>
-                  <a:tcPr marL="82296" marR="82296" marT="64008" marB="64008">
-                    <a:solidFill>
-                      <a:srgbClr val="F1F7F7"/>
-                    </a:solidFill>
-                  </a:tcPr>
-                </a:tc>
-                <a:tc>
-                  <a:txBody>
-                    <a:bodyPr wrap="none"/>
-                    <a:lstStyle/>
-                    <a:p>
-                      <a:pPr>
-                        <a:lnSpc>
-                          <a:spcPts val="1600"/>
-                        </a:lnSpc>
-                        <a:spcAft>
-                          <a:spcPts val="0"/>
-                        </a:spcAft>
-                        <a:defRPr sz="1200" b="0">
-                          <a:solidFill>
-                            <a:srgbClr val="21243A"/>
-                          </a:solidFill>
-                          <a:latin typeface="Arial"/>
-                        </a:defRPr>
-                      </a:pPr>
-                      <a:r>
-                        <a:t>Spectral peakiness 24.85 (periodic frequency peaks can mark generated textures).</a:t>
-                      </a:r>
-                    </a:p>
-                  </a:txBody>
-                  <a:tcPr marL="82296" marR="82296" marT="64008" marB="64008">
-                    <a:solidFill>
-                      <a:srgbClr val="F1F7F7"/>
                     </a:solidFill>
                   </a:tcPr>
                 </a:tc>

--- a/site/showcase/exports/journal_image.pptx
+++ b/site/showcase/exports/journal_image.pptx
@@ -23,6 +23,7 @@
     <p:sldId id="271" r:id="rId23"/>
     <p:sldId id="272" r:id="rId24"/>
     <p:sldId id="273" r:id="rId25"/>
+    <p:sldId id="274" r:id="rId26"/>
   </p:sldIdLst>
   <p:sldSz cx="9144000" cy="6858000" type="screen4x3"/>
   <p:notesSz cx="6858000" cy="9144000"/>
@@ -1470,6 +1471,101 @@
 </file>
 
 <file path=ppt/notesSlides/notesSlide18.xml><?xml version="1.0" encoding="utf-8"?>
+<p:notes xmlns:a="http://schemas.openxmlformats.org/drawingml/2006/main" xmlns:p="http://schemas.openxmlformats.org/presentationml/2006/main" xmlns:r="http://schemas.openxmlformats.org/officeDocument/2006/relationships">
+  <p:cSld>
+    <p:spTree>
+      <p:nvGrpSpPr>
+        <p:cNvPr id="1" name=""/>
+        <p:cNvGrpSpPr/>
+        <p:nvPr/>
+      </p:nvGrpSpPr>
+      <p:grpSpPr>
+        <a:xfrm>
+          <a:off x="0" y="0"/>
+          <a:ext cx="0" cy="0"/>
+          <a:chOff x="0" y="0"/>
+          <a:chExt cx="0" cy="0"/>
+        </a:xfrm>
+      </p:grpSpPr>
+      <p:sp>
+        <p:nvSpPr>
+          <p:cNvPr id="2" name="Slide Image Placeholder 1"/>
+          <p:cNvSpPr>
+            <a:spLocks noGrp="1"/>
+          </p:cNvSpPr>
+          <p:nvPr>
+            <p:ph type="sldImg" idx="2"/>
+          </p:nvPr>
+        </p:nvSpPr>
+        <p:spPr/>
+      </p:sp>
+      <p:sp>
+        <p:nvSpPr>
+          <p:cNvPr id="3" name="Notes Placeholder 2"/>
+          <p:cNvSpPr>
+            <a:spLocks noGrp="1"/>
+          </p:cNvSpPr>
+          <p:nvPr>
+            <p:ph type="body" idx="3" sz="quarter"/>
+          </p:nvPr>
+        </p:nvSpPr>
+        <p:spPr/>
+        <p:txBody>
+          <a:bodyPr/>
+          <a:lstStyle/>
+          <a:p>
+            <a:r>
+              <a:t>journal-image.png</a:t>
+            </a:r>
+          </a:p>
+          <a:p>
+            <a:r>
+              <a:t>Cite this analysis</a:t>
+            </a:r>
+          </a:p>
+          <a:p>
+            <a:r>
+              <a:t>Software (Harvard) | Martin, S. (2026) SDA Vision: Synthetic-media Discourse Analysis (version 0.1.0) [Computer software]. Manchester Metropolitan University. Available at: https://sdavision.io/</a:t>
+            </a:r>
+          </a:p>
+          <a:p>
+            <a:r>
+              <a:t>Software creator | Dr Sam Martin, Smart Data Research UK (UKRI) Fellow, Manchester Metropolitan University (MMU). ORCID: https://orcid.org/0000-0002-4466-8374.</a:t>
+            </a:r>
+          </a:p>
+          <a:p>
+            <a:r>
+              <a:t>Funding acknowledgement | This work was supported by Smart Data Research UK, a UKRI investment; Grant number UKRI4010.</a:t>
+            </a:r>
+          </a:p>
+          <a:p>
+            <a:r>
+              <a:t>Analysis record | File: journal-image.png; media type: image; recorded at: 2026-09-26T22:31:06+00:00; models: claude-opus-5-5, gemini-3.8-flash, gpt-6-astra.</a:t>
+            </a:r>
+          </a:p>
+        </p:txBody>
+      </p:sp>
+      <p:sp>
+        <p:nvSpPr>
+          <p:cNvPr id="4" name="Slide Number Placeholder 3"/>
+          <p:cNvSpPr>
+            <a:spLocks noGrp="1"/>
+          </p:cNvSpPr>
+          <p:nvPr>
+            <p:ph type="sldNum" idx="5" sz="quarter"/>
+          </p:nvPr>
+        </p:nvSpPr>
+        <p:spPr/>
+      </p:sp>
+    </p:spTree>
+  </p:cSld>
+  <p:clrMapOvr>
+    <a:masterClrMapping/>
+  </p:clrMapOvr>
+</p:notes>
+</file>
+
+<file path=ppt/notesSlides/notesSlide19.xml><?xml version="1.0" encoding="utf-8"?>
 <p:notes xmlns:a="http://schemas.openxmlformats.org/drawingml/2006/main" xmlns:p="http://schemas.openxmlformats.org/presentationml/2006/main" xmlns:r="http://schemas.openxmlformats.org/officeDocument/2006/relationships">
   <p:cSld>
     <p:spTree>
@@ -11765,7 +11861,7 @@
               </a:defRPr>
             </a:pPr>
             <a:r>
-              <a:t>File and analysis record</a:t>
+              <a:t>Cite this analysis</a:t>
             </a:r>
           </a:p>
         </p:txBody>
@@ -11850,6 +11946,746 @@
             </a:pPr>
             <a:r>
               <a:t>18</a:t>
+            </a:r>
+          </a:p>
+        </p:txBody>
+      </p:sp>
+      <p:graphicFrame>
+        <p:nvGraphicFramePr>
+          <p:cNvPr id="6" name="Table 5"/>
+          <p:cNvGraphicFramePr>
+            <a:graphicFrameLocks noGrp="1"/>
+          </p:cNvGraphicFramePr>
+          <p:nvPr/>
+        </p:nvGraphicFramePr>
+        <p:xfrm>
+          <a:off x="365760" y="1353312"/>
+          <a:ext cx="8412479" cy="347472"/>
+        </p:xfrm>
+        <a:graphic>
+          <a:graphicData uri="http://schemas.openxmlformats.org/drawingml/2006/table">
+            <a:tbl>
+              <a:tblPr firstRow="1" bandRow="1">
+                <a:tableStyleId>{5C22544A-7EE6-4342-B048-85BDC9FD1C3A}</a:tableStyleId>
+              </a:tblPr>
+              <a:tblGrid>
+                <a:gridCol w="2271369"/>
+                <a:gridCol w="6141110"/>
+              </a:tblGrid>
+              <a:tr h="347472">
+                <a:tc>
+                  <a:txBody>
+                    <a:bodyPr wrap="none"/>
+                    <a:lstStyle/>
+                    <a:p>
+                      <a:pPr>
+                        <a:lnSpc>
+                          <a:spcPts val="1600"/>
+                        </a:lnSpc>
+                        <a:spcAft>
+                          <a:spcPts val="0"/>
+                        </a:spcAft>
+                        <a:defRPr sz="1200" b="1">
+                          <a:solidFill>
+                            <a:srgbClr val="FFFFFF"/>
+                          </a:solidFill>
+                          <a:latin typeface="Arial"/>
+                        </a:defRPr>
+                      </a:pPr>
+                      <a:r>
+                        <a:t>Field</a:t>
+                      </a:r>
+                    </a:p>
+                  </a:txBody>
+                  <a:tcPr marL="82296" marR="82296" marT="64008" marB="64008">
+                    <a:solidFill>
+                      <a:srgbClr val="16787C"/>
+                    </a:solidFill>
+                  </a:tcPr>
+                </a:tc>
+                <a:tc>
+                  <a:txBody>
+                    <a:bodyPr wrap="none"/>
+                    <a:lstStyle/>
+                    <a:p>
+                      <a:pPr>
+                        <a:lnSpc>
+                          <a:spcPts val="1600"/>
+                        </a:lnSpc>
+                        <a:spcAft>
+                          <a:spcPts val="0"/>
+                        </a:spcAft>
+                        <a:defRPr sz="1200" b="1">
+                          <a:solidFill>
+                            <a:srgbClr val="FFFFFF"/>
+                          </a:solidFill>
+                          <a:latin typeface="Arial"/>
+                        </a:defRPr>
+                      </a:pPr>
+                      <a:r>
+                        <a:t>Recorded detail</a:t>
+                      </a:r>
+                    </a:p>
+                  </a:txBody>
+                  <a:tcPr marL="82296" marR="82296" marT="64008" marB="64008">
+                    <a:solidFill>
+                      <a:srgbClr val="16787C"/>
+                    </a:solidFill>
+                  </a:tcPr>
+                </a:tc>
+              </a:tr>
+            </a:tbl>
+          </a:graphicData>
+        </a:graphic>
+      </p:graphicFrame>
+      <p:graphicFrame>
+        <p:nvGraphicFramePr>
+          <p:cNvPr id="7" name="Table 6"/>
+          <p:cNvGraphicFramePr>
+            <a:graphicFrameLocks noGrp="1"/>
+          </p:cNvGraphicFramePr>
+          <p:nvPr/>
+        </p:nvGraphicFramePr>
+        <p:xfrm>
+          <a:off x="365760" y="1700784"/>
+          <a:ext cx="8412479" cy="755904"/>
+        </p:xfrm>
+        <a:graphic>
+          <a:graphicData uri="http://schemas.openxmlformats.org/drawingml/2006/table">
+            <a:tbl>
+              <a:tblPr firstRow="1" bandRow="1">
+                <a:tableStyleId>{5C22544A-7EE6-4342-B048-85BDC9FD1C3A}</a:tableStyleId>
+              </a:tblPr>
+              <a:tblGrid>
+                <a:gridCol w="2271369"/>
+                <a:gridCol w="6141110"/>
+              </a:tblGrid>
+              <a:tr h="755904">
+                <a:tc>
+                  <a:txBody>
+                    <a:bodyPr wrap="none"/>
+                    <a:lstStyle/>
+                    <a:p>
+                      <a:pPr>
+                        <a:lnSpc>
+                          <a:spcPts val="1600"/>
+                        </a:lnSpc>
+                        <a:spcAft>
+                          <a:spcPts val="0"/>
+                        </a:spcAft>
+                        <a:defRPr sz="1200" b="0">
+                          <a:solidFill>
+                            <a:srgbClr val="21243A"/>
+                          </a:solidFill>
+                          <a:latin typeface="Arial"/>
+                        </a:defRPr>
+                      </a:pPr>
+                      <a:r>
+                        <a:t>Software (Harvard)</a:t>
+                      </a:r>
+                    </a:p>
+                  </a:txBody>
+                  <a:tcPr marL="82296" marR="82296" marT="64008" marB="64008">
+                    <a:solidFill>
+                      <a:srgbClr val="F1F7F7"/>
+                    </a:solidFill>
+                  </a:tcPr>
+                </a:tc>
+                <a:tc>
+                  <a:txBody>
+                    <a:bodyPr wrap="none"/>
+                    <a:lstStyle/>
+                    <a:p>
+                      <a:pPr>
+                        <a:lnSpc>
+                          <a:spcPts val="1600"/>
+                        </a:lnSpc>
+                        <a:spcAft>
+                          <a:spcPts val="0"/>
+                        </a:spcAft>
+                        <a:defRPr sz="1200" b="0">
+                          <a:solidFill>
+                            <a:srgbClr val="21243A"/>
+                          </a:solidFill>
+                          <a:latin typeface="Arial"/>
+                        </a:defRPr>
+                      </a:pPr>
+                      <a:r>
+                        <a:t>Martin, S. (2026) SDA Vision: Synthetic-media Discourse Analysis (version 0.1.0)</a:t>
+                      </a:r>
+                    </a:p>
+                    <a:p>
+                      <a:pPr>
+                        <a:lnSpc>
+                          <a:spcPts val="1600"/>
+                        </a:lnSpc>
+                        <a:spcAft>
+                          <a:spcPts val="0"/>
+                        </a:spcAft>
+                        <a:defRPr sz="1200" b="0">
+                          <a:solidFill>
+                            <a:srgbClr val="21243A"/>
+                          </a:solidFill>
+                          <a:latin typeface="Arial"/>
+                        </a:defRPr>
+                      </a:pPr>
+                      <a:r>
+                        <a:t>[Computer software]. Manchester Metropolitan University. Available at:</a:t>
+                      </a:r>
+                    </a:p>
+                    <a:p>
+                      <a:pPr>
+                        <a:lnSpc>
+                          <a:spcPts val="1600"/>
+                        </a:lnSpc>
+                        <a:spcAft>
+                          <a:spcPts val="0"/>
+                        </a:spcAft>
+                        <a:defRPr sz="1200" b="0">
+                          <a:solidFill>
+                            <a:srgbClr val="21243A"/>
+                          </a:solidFill>
+                          <a:latin typeface="Arial"/>
+                        </a:defRPr>
+                      </a:pPr>
+                      <a:r>
+                        <a:t>https://sdavision.io/</a:t>
+                      </a:r>
+                    </a:p>
+                  </a:txBody>
+                  <a:tcPr marL="82296" marR="82296" marT="64008" marB="64008">
+                    <a:solidFill>
+                      <a:srgbClr val="F1F7F7"/>
+                    </a:solidFill>
+                  </a:tcPr>
+                </a:tc>
+              </a:tr>
+            </a:tbl>
+          </a:graphicData>
+        </a:graphic>
+      </p:graphicFrame>
+      <p:graphicFrame>
+        <p:nvGraphicFramePr>
+          <p:cNvPr id="8" name="Table 7"/>
+          <p:cNvGraphicFramePr>
+            <a:graphicFrameLocks noGrp="1"/>
+          </p:cNvGraphicFramePr>
+          <p:nvPr/>
+        </p:nvGraphicFramePr>
+        <p:xfrm>
+          <a:off x="365760" y="2456688"/>
+          <a:ext cx="8412479" cy="552704"/>
+        </p:xfrm>
+        <a:graphic>
+          <a:graphicData uri="http://schemas.openxmlformats.org/drawingml/2006/table">
+            <a:tbl>
+              <a:tblPr firstRow="1" bandRow="1">
+                <a:tableStyleId>{5C22544A-7EE6-4342-B048-85BDC9FD1C3A}</a:tableStyleId>
+              </a:tblPr>
+              <a:tblGrid>
+                <a:gridCol w="2271369"/>
+                <a:gridCol w="6141110"/>
+              </a:tblGrid>
+              <a:tr h="552704">
+                <a:tc>
+                  <a:txBody>
+                    <a:bodyPr wrap="none"/>
+                    <a:lstStyle/>
+                    <a:p>
+                      <a:pPr>
+                        <a:lnSpc>
+                          <a:spcPts val="1600"/>
+                        </a:lnSpc>
+                        <a:spcAft>
+                          <a:spcPts val="0"/>
+                        </a:spcAft>
+                        <a:defRPr sz="1200" b="0">
+                          <a:solidFill>
+                            <a:srgbClr val="21243A"/>
+                          </a:solidFill>
+                          <a:latin typeface="Arial"/>
+                        </a:defRPr>
+                      </a:pPr>
+                      <a:r>
+                        <a:t>Software creator</a:t>
+                      </a:r>
+                    </a:p>
+                  </a:txBody>
+                  <a:tcPr marL="82296" marR="82296" marT="64008" marB="64008">
+                    <a:solidFill>
+                      <a:srgbClr val="FFFFFF"/>
+                    </a:solidFill>
+                  </a:tcPr>
+                </a:tc>
+                <a:tc>
+                  <a:txBody>
+                    <a:bodyPr wrap="none"/>
+                    <a:lstStyle/>
+                    <a:p>
+                      <a:pPr>
+                        <a:lnSpc>
+                          <a:spcPts val="1600"/>
+                        </a:lnSpc>
+                        <a:spcAft>
+                          <a:spcPts val="0"/>
+                        </a:spcAft>
+                        <a:defRPr sz="1200" b="0">
+                          <a:solidFill>
+                            <a:srgbClr val="21243A"/>
+                          </a:solidFill>
+                          <a:latin typeface="Arial"/>
+                        </a:defRPr>
+                      </a:pPr>
+                      <a:r>
+                        <a:t>Dr Sam Martin, Smart Data Research UK (UKRI) Fellow, Manchester Metropolitan</a:t>
+                      </a:r>
+                    </a:p>
+                    <a:p>
+                      <a:pPr>
+                        <a:lnSpc>
+                          <a:spcPts val="1600"/>
+                        </a:lnSpc>
+                        <a:spcAft>
+                          <a:spcPts val="0"/>
+                        </a:spcAft>
+                        <a:defRPr sz="1200" b="0">
+                          <a:solidFill>
+                            <a:srgbClr val="21243A"/>
+                          </a:solidFill>
+                          <a:latin typeface="Arial"/>
+                        </a:defRPr>
+                      </a:pPr>
+                      <a:r>
+                        <a:t>University (MMU). ORCID: https://orcid.org/0000-0002-4466-8374.</a:t>
+                      </a:r>
+                    </a:p>
+                  </a:txBody>
+                  <a:tcPr marL="82296" marR="82296" marT="64008" marB="64008">
+                    <a:solidFill>
+                      <a:srgbClr val="FFFFFF"/>
+                    </a:solidFill>
+                  </a:tcPr>
+                </a:tc>
+              </a:tr>
+            </a:tbl>
+          </a:graphicData>
+        </a:graphic>
+      </p:graphicFrame>
+      <p:graphicFrame>
+        <p:nvGraphicFramePr>
+          <p:cNvPr id="9" name="Table 8"/>
+          <p:cNvGraphicFramePr>
+            <a:graphicFrameLocks noGrp="1"/>
+          </p:cNvGraphicFramePr>
+          <p:nvPr/>
+        </p:nvGraphicFramePr>
+        <p:xfrm>
+          <a:off x="365760" y="3009392"/>
+          <a:ext cx="8412479" cy="552704"/>
+        </p:xfrm>
+        <a:graphic>
+          <a:graphicData uri="http://schemas.openxmlformats.org/drawingml/2006/table">
+            <a:tbl>
+              <a:tblPr firstRow="1" bandRow="1">
+                <a:tableStyleId>{5C22544A-7EE6-4342-B048-85BDC9FD1C3A}</a:tableStyleId>
+              </a:tblPr>
+              <a:tblGrid>
+                <a:gridCol w="2271369"/>
+                <a:gridCol w="6141110"/>
+              </a:tblGrid>
+              <a:tr h="552704">
+                <a:tc>
+                  <a:txBody>
+                    <a:bodyPr wrap="none"/>
+                    <a:lstStyle/>
+                    <a:p>
+                      <a:pPr>
+                        <a:lnSpc>
+                          <a:spcPts val="1600"/>
+                        </a:lnSpc>
+                        <a:spcAft>
+                          <a:spcPts val="0"/>
+                        </a:spcAft>
+                        <a:defRPr sz="1200" b="0">
+                          <a:solidFill>
+                            <a:srgbClr val="21243A"/>
+                          </a:solidFill>
+                          <a:latin typeface="Arial"/>
+                        </a:defRPr>
+                      </a:pPr>
+                      <a:r>
+                        <a:t>Funding acknowledgement</a:t>
+                      </a:r>
+                    </a:p>
+                  </a:txBody>
+                  <a:tcPr marL="82296" marR="82296" marT="64008" marB="64008">
+                    <a:solidFill>
+                      <a:srgbClr val="F1F7F7"/>
+                    </a:solidFill>
+                  </a:tcPr>
+                </a:tc>
+                <a:tc>
+                  <a:txBody>
+                    <a:bodyPr wrap="none"/>
+                    <a:lstStyle/>
+                    <a:p>
+                      <a:pPr>
+                        <a:lnSpc>
+                          <a:spcPts val="1600"/>
+                        </a:lnSpc>
+                        <a:spcAft>
+                          <a:spcPts val="0"/>
+                        </a:spcAft>
+                        <a:defRPr sz="1200" b="0">
+                          <a:solidFill>
+                            <a:srgbClr val="21243A"/>
+                          </a:solidFill>
+                          <a:latin typeface="Arial"/>
+                        </a:defRPr>
+                      </a:pPr>
+                      <a:r>
+                        <a:t>This work was supported by Smart Data Research UK, a UKRI investment; Grant</a:t>
+                      </a:r>
+                    </a:p>
+                    <a:p>
+                      <a:pPr>
+                        <a:lnSpc>
+                          <a:spcPts val="1600"/>
+                        </a:lnSpc>
+                        <a:spcAft>
+                          <a:spcPts val="0"/>
+                        </a:spcAft>
+                        <a:defRPr sz="1200" b="0">
+                          <a:solidFill>
+                            <a:srgbClr val="21243A"/>
+                          </a:solidFill>
+                          <a:latin typeface="Arial"/>
+                        </a:defRPr>
+                      </a:pPr>
+                      <a:r>
+                        <a:t>number UKRI4010.</a:t>
+                      </a:r>
+                    </a:p>
+                  </a:txBody>
+                  <a:tcPr marL="82296" marR="82296" marT="64008" marB="64008">
+                    <a:solidFill>
+                      <a:srgbClr val="F1F7F7"/>
+                    </a:solidFill>
+                  </a:tcPr>
+                </a:tc>
+              </a:tr>
+            </a:tbl>
+          </a:graphicData>
+        </a:graphic>
+      </p:graphicFrame>
+      <p:graphicFrame>
+        <p:nvGraphicFramePr>
+          <p:cNvPr id="10" name="Table 9"/>
+          <p:cNvGraphicFramePr>
+            <a:graphicFrameLocks noGrp="1"/>
+          </p:cNvGraphicFramePr>
+          <p:nvPr/>
+        </p:nvGraphicFramePr>
+        <p:xfrm>
+          <a:off x="365760" y="3562095"/>
+          <a:ext cx="8412479" cy="755904"/>
+        </p:xfrm>
+        <a:graphic>
+          <a:graphicData uri="http://schemas.openxmlformats.org/drawingml/2006/table">
+            <a:tbl>
+              <a:tblPr firstRow="1" bandRow="1">
+                <a:tableStyleId>{5C22544A-7EE6-4342-B048-85BDC9FD1C3A}</a:tableStyleId>
+              </a:tblPr>
+              <a:tblGrid>
+                <a:gridCol w="2271369"/>
+                <a:gridCol w="6141110"/>
+              </a:tblGrid>
+              <a:tr h="755904">
+                <a:tc>
+                  <a:txBody>
+                    <a:bodyPr wrap="none"/>
+                    <a:lstStyle/>
+                    <a:p>
+                      <a:pPr>
+                        <a:lnSpc>
+                          <a:spcPts val="1600"/>
+                        </a:lnSpc>
+                        <a:spcAft>
+                          <a:spcPts val="0"/>
+                        </a:spcAft>
+                        <a:defRPr sz="1200" b="0">
+                          <a:solidFill>
+                            <a:srgbClr val="21243A"/>
+                          </a:solidFill>
+                          <a:latin typeface="Arial"/>
+                        </a:defRPr>
+                      </a:pPr>
+                      <a:r>
+                        <a:t>Analysis record</a:t>
+                      </a:r>
+                    </a:p>
+                  </a:txBody>
+                  <a:tcPr marL="82296" marR="82296" marT="64008" marB="64008">
+                    <a:solidFill>
+                      <a:srgbClr val="FFFFFF"/>
+                    </a:solidFill>
+                  </a:tcPr>
+                </a:tc>
+                <a:tc>
+                  <a:txBody>
+                    <a:bodyPr wrap="none"/>
+                    <a:lstStyle/>
+                    <a:p>
+                      <a:pPr>
+                        <a:lnSpc>
+                          <a:spcPts val="1600"/>
+                        </a:lnSpc>
+                        <a:spcAft>
+                          <a:spcPts val="0"/>
+                        </a:spcAft>
+                        <a:defRPr sz="1200" b="0">
+                          <a:solidFill>
+                            <a:srgbClr val="21243A"/>
+                          </a:solidFill>
+                          <a:latin typeface="Arial"/>
+                        </a:defRPr>
+                      </a:pPr>
+                      <a:r>
+                        <a:t>File: journal-image.png; media type: image; recorded at:</a:t>
+                      </a:r>
+                    </a:p>
+                    <a:p>
+                      <a:pPr>
+                        <a:lnSpc>
+                          <a:spcPts val="1600"/>
+                        </a:lnSpc>
+                        <a:spcAft>
+                          <a:spcPts val="0"/>
+                        </a:spcAft>
+                        <a:defRPr sz="1200" b="0">
+                          <a:solidFill>
+                            <a:srgbClr val="21243A"/>
+                          </a:solidFill>
+                          <a:latin typeface="Arial"/>
+                        </a:defRPr>
+                      </a:pPr>
+                      <a:r>
+                        <a:t>2026-09-26T22:31:06+00:00; models: claude-opus-5-5, gemini-3.8-flash,</a:t>
+                      </a:r>
+                    </a:p>
+                    <a:p>
+                      <a:pPr>
+                        <a:lnSpc>
+                          <a:spcPts val="1600"/>
+                        </a:lnSpc>
+                        <a:spcAft>
+                          <a:spcPts val="0"/>
+                        </a:spcAft>
+                        <a:defRPr sz="1200" b="0">
+                          <a:solidFill>
+                            <a:srgbClr val="21243A"/>
+                          </a:solidFill>
+                          <a:latin typeface="Arial"/>
+                        </a:defRPr>
+                      </a:pPr>
+                      <a:r>
+                        <a:t>gpt-6-astra.</a:t>
+                      </a:r>
+                    </a:p>
+                  </a:txBody>
+                  <a:tcPr marL="82296" marR="82296" marT="64008" marB="64008">
+                    <a:solidFill>
+                      <a:srgbClr val="FFFFFF"/>
+                    </a:solidFill>
+                  </a:tcPr>
+                </a:tc>
+              </a:tr>
+            </a:tbl>
+          </a:graphicData>
+        </a:graphic>
+      </p:graphicFrame>
+    </p:spTree>
+  </p:cSld>
+  <p:clrMapOvr>
+    <a:masterClrMapping/>
+  </p:clrMapOvr>
+</p:sld>
+</file>
+
+<file path=ppt/slides/slide19.xml><?xml version="1.0" encoding="utf-8"?>
+<p:sld xmlns:a="http://schemas.openxmlformats.org/drawingml/2006/main" xmlns:p="http://schemas.openxmlformats.org/presentationml/2006/main" xmlns:r="http://schemas.openxmlformats.org/officeDocument/2006/relationships">
+  <p:cSld>
+    <p:spTree>
+      <p:nvGrpSpPr>
+        <p:cNvPr id="1" name=""/>
+        <p:cNvGrpSpPr/>
+        <p:nvPr/>
+      </p:nvGrpSpPr>
+      <p:grpSpPr/>
+      <p:sp>
+        <p:nvSpPr>
+          <p:cNvPr id="2" name="TextBox 1"/>
+          <p:cNvSpPr txBox="1"/>
+          <p:nvPr/>
+        </p:nvSpPr>
+        <p:spPr>
+          <a:xfrm>
+            <a:off x="365760" y="219456"/>
+            <a:ext cx="8412480" cy="228600"/>
+          </a:xfrm>
+          <a:prstGeom prst="rect">
+            <a:avLst/>
+          </a:prstGeom>
+          <a:noFill/>
+        </p:spPr>
+        <p:txBody>
+          <a:bodyPr wrap="square" lIns="0" rIns="0" tIns="0" bIns="0">
+            <a:spAutoFit/>
+          </a:bodyPr>
+          <a:lstStyle/>
+          <a:p>
+            <a:pPr>
+              <a:lnSpc>
+                <a:spcPct val="115000"/>
+              </a:lnSpc>
+              <a:spcAft>
+                <a:spcPts val="0"/>
+              </a:spcAft>
+              <a:defRPr sz="1100" b="1">
+                <a:solidFill>
+                  <a:srgbClr val="C5006A"/>
+                </a:solidFill>
+                <a:latin typeface="Arial"/>
+              </a:defRPr>
+            </a:pPr>
+            <a:r>
+              <a:t>SDA VISION / RESEARCH REPORT</a:t>
+            </a:r>
+          </a:p>
+        </p:txBody>
+      </p:sp>
+      <p:sp>
+        <p:nvSpPr>
+          <p:cNvPr id="3" name="TextBox 2"/>
+          <p:cNvSpPr txBox="1"/>
+          <p:nvPr/>
+        </p:nvSpPr>
+        <p:spPr>
+          <a:xfrm>
+            <a:off x="365760" y="658368"/>
+            <a:ext cx="8412480" cy="612648"/>
+          </a:xfrm>
+          <a:prstGeom prst="rect">
+            <a:avLst/>
+          </a:prstGeom>
+          <a:noFill/>
+        </p:spPr>
+        <p:txBody>
+          <a:bodyPr wrap="square" lIns="0" rIns="0" tIns="0" bIns="0">
+            <a:spAutoFit/>
+          </a:bodyPr>
+          <a:lstStyle/>
+          <a:p>
+            <a:pPr>
+              <a:lnSpc>
+                <a:spcPct val="115000"/>
+              </a:lnSpc>
+              <a:spcAft>
+                <a:spcPts val="0"/>
+              </a:spcAft>
+              <a:defRPr sz="2200" b="1">
+                <a:solidFill>
+                  <a:srgbClr val="21243A"/>
+                </a:solidFill>
+                <a:latin typeface="Arial"/>
+              </a:defRPr>
+            </a:pPr>
+            <a:r>
+              <a:t>File and analysis record</a:t>
+            </a:r>
+          </a:p>
+        </p:txBody>
+      </p:sp>
+      <p:sp>
+        <p:nvSpPr>
+          <p:cNvPr id="4" name="TextBox 3"/>
+          <p:cNvSpPr txBox="1"/>
+          <p:nvPr/>
+        </p:nvSpPr>
+        <p:spPr>
+          <a:xfrm>
+            <a:off x="365760" y="6291072"/>
+            <a:ext cx="8001000" cy="365760"/>
+          </a:xfrm>
+          <a:prstGeom prst="rect">
+            <a:avLst/>
+          </a:prstGeom>
+          <a:noFill/>
+        </p:spPr>
+        <p:txBody>
+          <a:bodyPr wrap="square" lIns="0" rIns="0" tIns="0" bIns="0">
+            <a:spAutoFit/>
+          </a:bodyPr>
+          <a:lstStyle/>
+          <a:p>
+            <a:pPr>
+              <a:lnSpc>
+                <a:spcPct val="115000"/>
+              </a:lnSpc>
+              <a:spcAft>
+                <a:spcPts val="0"/>
+              </a:spcAft>
+              <a:defRPr sz="800" b="0">
+                <a:solidFill>
+                  <a:srgbClr val="545B6D"/>
+                </a:solidFill>
+                <a:latin typeface="Arial"/>
+              </a:defRPr>
+            </a:pPr>
+            <a:r>
+              <a:t>Research assessment. Ratings are not calibrated probabilities.</a:t>
+            </a:r>
+          </a:p>
+        </p:txBody>
+      </p:sp>
+      <p:sp>
+        <p:nvSpPr>
+          <p:cNvPr id="5" name="TextBox 4"/>
+          <p:cNvSpPr txBox="1"/>
+          <p:nvPr/>
+        </p:nvSpPr>
+        <p:spPr>
+          <a:xfrm>
+            <a:off x="8394192" y="6318504"/>
+            <a:ext cx="365760" cy="228600"/>
+          </a:xfrm>
+          <a:prstGeom prst="rect">
+            <a:avLst/>
+          </a:prstGeom>
+          <a:noFill/>
+        </p:spPr>
+        <p:txBody>
+          <a:bodyPr wrap="square" lIns="0" rIns="0" tIns="0" bIns="0">
+            <a:spAutoFit/>
+          </a:bodyPr>
+          <a:lstStyle/>
+          <a:p>
+            <a:pPr>
+              <a:lnSpc>
+                <a:spcPct val="115000"/>
+              </a:lnSpc>
+              <a:spcAft>
+                <a:spcPts val="0"/>
+              </a:spcAft>
+              <a:defRPr sz="900" b="0">
+                <a:solidFill>
+                  <a:srgbClr val="545B6D"/>
+                </a:solidFill>
+                <a:latin typeface="Arial"/>
+              </a:defRPr>
+            </a:pPr>
+            <a:r>
+              <a:t>19</a:t>
             </a:r>
           </a:p>
         </p:txBody>

--- a/site/showcase/exports/journal_image.pptx
+++ b/site/showcase/exports/journal_image.pptx
@@ -1525,7 +1525,7 @@
           </a:p>
           <a:p>
             <a:r>
-              <a:t>Software (Harvard) | Martin, S. (2026) SDA Vision: Synthetic-media Discourse Analysis (version 0.1.0) [Computer software]. Manchester Metropolitan University. Available at: https://sdavision.io/</a:t>
+              <a:t>Software citation | Martin, S. (2026) SDA Vision: Synthetic-media Discourse Analysis (version 0.1.0) [Computer software]. Manchester Metropolitan University. Available at: https://sdavision.io/</a:t>
             </a:r>
           </a:p>
           <a:p>
@@ -12081,7 +12081,7 @@
                         </a:defRPr>
                       </a:pPr>
                       <a:r>
-                        <a:t>Software (Harvard)</a:t>
+                        <a:t>Software citation</a:t>
                       </a:r>
                     </a:p>
                   </a:txBody>

--- a/site/showcase/exports/journal_image.pptx
+++ b/site/showcase/exports/journal_image.pptx
@@ -23,7 +23,6 @@
     <p:sldId id="271" r:id="rId23"/>
     <p:sldId id="272" r:id="rId24"/>
     <p:sldId id="273" r:id="rId25"/>
-    <p:sldId id="274" r:id="rId26"/>
   </p:sldIdLst>
   <p:sldSz cx="9144000" cy="6858000" type="screen4x3"/>
   <p:notesSz cx="6858000" cy="9144000"/>
@@ -1471,101 +1470,6 @@
 </file>
 
 <file path=ppt/notesSlides/notesSlide18.xml><?xml version="1.0" encoding="utf-8"?>
-<p:notes xmlns:a="http://schemas.openxmlformats.org/drawingml/2006/main" xmlns:p="http://schemas.openxmlformats.org/presentationml/2006/main" xmlns:r="http://schemas.openxmlformats.org/officeDocument/2006/relationships">
-  <p:cSld>
-    <p:spTree>
-      <p:nvGrpSpPr>
-        <p:cNvPr id="1" name=""/>
-        <p:cNvGrpSpPr/>
-        <p:nvPr/>
-      </p:nvGrpSpPr>
-      <p:grpSpPr>
-        <a:xfrm>
-          <a:off x="0" y="0"/>
-          <a:ext cx="0" cy="0"/>
-          <a:chOff x="0" y="0"/>
-          <a:chExt cx="0" cy="0"/>
-        </a:xfrm>
-      </p:grpSpPr>
-      <p:sp>
-        <p:nvSpPr>
-          <p:cNvPr id="2" name="Slide Image Placeholder 1"/>
-          <p:cNvSpPr>
-            <a:spLocks noGrp="1"/>
-          </p:cNvSpPr>
-          <p:nvPr>
-            <p:ph type="sldImg" idx="2"/>
-          </p:nvPr>
-        </p:nvSpPr>
-        <p:spPr/>
-      </p:sp>
-      <p:sp>
-        <p:nvSpPr>
-          <p:cNvPr id="3" name="Notes Placeholder 2"/>
-          <p:cNvSpPr>
-            <a:spLocks noGrp="1"/>
-          </p:cNvSpPr>
-          <p:nvPr>
-            <p:ph type="body" idx="3" sz="quarter"/>
-          </p:nvPr>
-        </p:nvSpPr>
-        <p:spPr/>
-        <p:txBody>
-          <a:bodyPr/>
-          <a:lstStyle/>
-          <a:p>
-            <a:r>
-              <a:t>journal-image.png</a:t>
-            </a:r>
-          </a:p>
-          <a:p>
-            <a:r>
-              <a:t>Cite this analysis</a:t>
-            </a:r>
-          </a:p>
-          <a:p>
-            <a:r>
-              <a:t>Software citation | Martin, S. (2026) SDA Vision: Synthetic-media Discourse Analysis (version 0.1.0) [Computer software]. Manchester Metropolitan University. Available at: https://sdavision.io/</a:t>
-            </a:r>
-          </a:p>
-          <a:p>
-            <a:r>
-              <a:t>Software creator | Dr Sam Martin, Smart Data Research UK (UKRI) Fellow, Manchester Metropolitan University (MMU). ORCID: https://orcid.org/0000-0002-4466-8374.</a:t>
-            </a:r>
-          </a:p>
-          <a:p>
-            <a:r>
-              <a:t>Funding acknowledgement | This work was supported by Smart Data Research UK, a UKRI investment; Grant number UKRI4010.</a:t>
-            </a:r>
-          </a:p>
-          <a:p>
-            <a:r>
-              <a:t>Analysis record | File: journal-image.png; media type: image; recorded at: 2026-09-26T22:31:06+00:00; models: claude-opus-5-5, gemini-3.8-flash, gpt-6-astra.</a:t>
-            </a:r>
-          </a:p>
-        </p:txBody>
-      </p:sp>
-      <p:sp>
-        <p:nvSpPr>
-          <p:cNvPr id="4" name="Slide Number Placeholder 3"/>
-          <p:cNvSpPr>
-            <a:spLocks noGrp="1"/>
-          </p:cNvSpPr>
-          <p:nvPr>
-            <p:ph type="sldNum" idx="5" sz="quarter"/>
-          </p:nvPr>
-        </p:nvSpPr>
-        <p:spPr/>
-      </p:sp>
-    </p:spTree>
-  </p:cSld>
-  <p:clrMapOvr>
-    <a:masterClrMapping/>
-  </p:clrMapOvr>
-</p:notes>
-</file>
-
-<file path=ppt/notesSlides/notesSlide19.xml><?xml version="1.0" encoding="utf-8"?>
 <p:notes xmlns:a="http://schemas.openxmlformats.org/drawingml/2006/main" xmlns:p="http://schemas.openxmlformats.org/presentationml/2006/main" xmlns:r="http://schemas.openxmlformats.org/officeDocument/2006/relationships">
   <p:cSld>
     <p:spTree>
@@ -11861,7 +11765,7 @@
               </a:defRPr>
             </a:pPr>
             <a:r>
-              <a:t>Cite this analysis</a:t>
+              <a:t>File and analysis record</a:t>
             </a:r>
           </a:p>
         </p:txBody>
@@ -11946,746 +11850,6 @@
             </a:pPr>
             <a:r>
               <a:t>18</a:t>
-            </a:r>
-          </a:p>
-        </p:txBody>
-      </p:sp>
-      <p:graphicFrame>
-        <p:nvGraphicFramePr>
-          <p:cNvPr id="6" name="Table 5"/>
-          <p:cNvGraphicFramePr>
-            <a:graphicFrameLocks noGrp="1"/>
-          </p:cNvGraphicFramePr>
-          <p:nvPr/>
-        </p:nvGraphicFramePr>
-        <p:xfrm>
-          <a:off x="365760" y="1353312"/>
-          <a:ext cx="8412479" cy="347472"/>
-        </p:xfrm>
-        <a:graphic>
-          <a:graphicData uri="http://schemas.openxmlformats.org/drawingml/2006/table">
-            <a:tbl>
-              <a:tblPr firstRow="1" bandRow="1">
-                <a:tableStyleId>{5C22544A-7EE6-4342-B048-85BDC9FD1C3A}</a:tableStyleId>
-              </a:tblPr>
-              <a:tblGrid>
-                <a:gridCol w="2271369"/>
-                <a:gridCol w="6141110"/>
-              </a:tblGrid>
-              <a:tr h="347472">
-                <a:tc>
-                  <a:txBody>
-                    <a:bodyPr wrap="none"/>
-                    <a:lstStyle/>
-                    <a:p>
-                      <a:pPr>
-                        <a:lnSpc>
-                          <a:spcPts val="1600"/>
-                        </a:lnSpc>
-                        <a:spcAft>
-                          <a:spcPts val="0"/>
-                        </a:spcAft>
-                        <a:defRPr sz="1200" b="1">
-                          <a:solidFill>
-                            <a:srgbClr val="FFFFFF"/>
-                          </a:solidFill>
-                          <a:latin typeface="Arial"/>
-                        </a:defRPr>
-                      </a:pPr>
-                      <a:r>
-                        <a:t>Field</a:t>
-                      </a:r>
-                    </a:p>
-                  </a:txBody>
-                  <a:tcPr marL="82296" marR="82296" marT="64008" marB="64008">
-                    <a:solidFill>
-                      <a:srgbClr val="16787C"/>
-                    </a:solidFill>
-                  </a:tcPr>
-                </a:tc>
-                <a:tc>
-                  <a:txBody>
-                    <a:bodyPr wrap="none"/>
-                    <a:lstStyle/>
-                    <a:p>
-                      <a:pPr>
-                        <a:lnSpc>
-                          <a:spcPts val="1600"/>
-                        </a:lnSpc>
-                        <a:spcAft>
-                          <a:spcPts val="0"/>
-                        </a:spcAft>
-                        <a:defRPr sz="1200" b="1">
-                          <a:solidFill>
-                            <a:srgbClr val="FFFFFF"/>
-                          </a:solidFill>
-                          <a:latin typeface="Arial"/>
-                        </a:defRPr>
-                      </a:pPr>
-                      <a:r>
-                        <a:t>Recorded detail</a:t>
-                      </a:r>
-                    </a:p>
-                  </a:txBody>
-                  <a:tcPr marL="82296" marR="82296" marT="64008" marB="64008">
-                    <a:solidFill>
-                      <a:srgbClr val="16787C"/>
-                    </a:solidFill>
-                  </a:tcPr>
-                </a:tc>
-              </a:tr>
-            </a:tbl>
-          </a:graphicData>
-        </a:graphic>
-      </p:graphicFrame>
-      <p:graphicFrame>
-        <p:nvGraphicFramePr>
-          <p:cNvPr id="7" name="Table 6"/>
-          <p:cNvGraphicFramePr>
-            <a:graphicFrameLocks noGrp="1"/>
-          </p:cNvGraphicFramePr>
-          <p:nvPr/>
-        </p:nvGraphicFramePr>
-        <p:xfrm>
-          <a:off x="365760" y="1700784"/>
-          <a:ext cx="8412479" cy="755904"/>
-        </p:xfrm>
-        <a:graphic>
-          <a:graphicData uri="http://schemas.openxmlformats.org/drawingml/2006/table">
-            <a:tbl>
-              <a:tblPr firstRow="1" bandRow="1">
-                <a:tableStyleId>{5C22544A-7EE6-4342-B048-85BDC9FD1C3A}</a:tableStyleId>
-              </a:tblPr>
-              <a:tblGrid>
-                <a:gridCol w="2271369"/>
-                <a:gridCol w="6141110"/>
-              </a:tblGrid>
-              <a:tr h="755904">
-                <a:tc>
-                  <a:txBody>
-                    <a:bodyPr wrap="none"/>
-                    <a:lstStyle/>
-                    <a:p>
-                      <a:pPr>
-                        <a:lnSpc>
-                          <a:spcPts val="1600"/>
-                        </a:lnSpc>
-                        <a:spcAft>
-                          <a:spcPts val="0"/>
-                        </a:spcAft>
-                        <a:defRPr sz="1200" b="0">
-                          <a:solidFill>
-                            <a:srgbClr val="21243A"/>
-                          </a:solidFill>
-                          <a:latin typeface="Arial"/>
-                        </a:defRPr>
-                      </a:pPr>
-                      <a:r>
-                        <a:t>Software citation</a:t>
-                      </a:r>
-                    </a:p>
-                  </a:txBody>
-                  <a:tcPr marL="82296" marR="82296" marT="64008" marB="64008">
-                    <a:solidFill>
-                      <a:srgbClr val="F1F7F7"/>
-                    </a:solidFill>
-                  </a:tcPr>
-                </a:tc>
-                <a:tc>
-                  <a:txBody>
-                    <a:bodyPr wrap="none"/>
-                    <a:lstStyle/>
-                    <a:p>
-                      <a:pPr>
-                        <a:lnSpc>
-                          <a:spcPts val="1600"/>
-                        </a:lnSpc>
-                        <a:spcAft>
-                          <a:spcPts val="0"/>
-                        </a:spcAft>
-                        <a:defRPr sz="1200" b="0">
-                          <a:solidFill>
-                            <a:srgbClr val="21243A"/>
-                          </a:solidFill>
-                          <a:latin typeface="Arial"/>
-                        </a:defRPr>
-                      </a:pPr>
-                      <a:r>
-                        <a:t>Martin, S. (2026) SDA Vision: Synthetic-media Discourse Analysis (version 0.1.0)</a:t>
-                      </a:r>
-                    </a:p>
-                    <a:p>
-                      <a:pPr>
-                        <a:lnSpc>
-                          <a:spcPts val="1600"/>
-                        </a:lnSpc>
-                        <a:spcAft>
-                          <a:spcPts val="0"/>
-                        </a:spcAft>
-                        <a:defRPr sz="1200" b="0">
-                          <a:solidFill>
-                            <a:srgbClr val="21243A"/>
-                          </a:solidFill>
-                          <a:latin typeface="Arial"/>
-                        </a:defRPr>
-                      </a:pPr>
-                      <a:r>
-                        <a:t>[Computer software]. Manchester Metropolitan University. Available at:</a:t>
-                      </a:r>
-                    </a:p>
-                    <a:p>
-                      <a:pPr>
-                        <a:lnSpc>
-                          <a:spcPts val="1600"/>
-                        </a:lnSpc>
-                        <a:spcAft>
-                          <a:spcPts val="0"/>
-                        </a:spcAft>
-                        <a:defRPr sz="1200" b="0">
-                          <a:solidFill>
-                            <a:srgbClr val="21243A"/>
-                          </a:solidFill>
-                          <a:latin typeface="Arial"/>
-                        </a:defRPr>
-                      </a:pPr>
-                      <a:r>
-                        <a:t>https://sdavision.io/</a:t>
-                      </a:r>
-                    </a:p>
-                  </a:txBody>
-                  <a:tcPr marL="82296" marR="82296" marT="64008" marB="64008">
-                    <a:solidFill>
-                      <a:srgbClr val="F1F7F7"/>
-                    </a:solidFill>
-                  </a:tcPr>
-                </a:tc>
-              </a:tr>
-            </a:tbl>
-          </a:graphicData>
-        </a:graphic>
-      </p:graphicFrame>
-      <p:graphicFrame>
-        <p:nvGraphicFramePr>
-          <p:cNvPr id="8" name="Table 7"/>
-          <p:cNvGraphicFramePr>
-            <a:graphicFrameLocks noGrp="1"/>
-          </p:cNvGraphicFramePr>
-          <p:nvPr/>
-        </p:nvGraphicFramePr>
-        <p:xfrm>
-          <a:off x="365760" y="2456688"/>
-          <a:ext cx="8412479" cy="552704"/>
-        </p:xfrm>
-        <a:graphic>
-          <a:graphicData uri="http://schemas.openxmlformats.org/drawingml/2006/table">
-            <a:tbl>
-              <a:tblPr firstRow="1" bandRow="1">
-                <a:tableStyleId>{5C22544A-7EE6-4342-B048-85BDC9FD1C3A}</a:tableStyleId>
-              </a:tblPr>
-              <a:tblGrid>
-                <a:gridCol w="2271369"/>
-                <a:gridCol w="6141110"/>
-              </a:tblGrid>
-              <a:tr h="552704">
-                <a:tc>
-                  <a:txBody>
-                    <a:bodyPr wrap="none"/>
-                    <a:lstStyle/>
-                    <a:p>
-                      <a:pPr>
-                        <a:lnSpc>
-                          <a:spcPts val="1600"/>
-                        </a:lnSpc>
-                        <a:spcAft>
-                          <a:spcPts val="0"/>
-                        </a:spcAft>
-                        <a:defRPr sz="1200" b="0">
-                          <a:solidFill>
-                            <a:srgbClr val="21243A"/>
-                          </a:solidFill>
-                          <a:latin typeface="Arial"/>
-                        </a:defRPr>
-                      </a:pPr>
-                      <a:r>
-                        <a:t>Software creator</a:t>
-                      </a:r>
-                    </a:p>
-                  </a:txBody>
-                  <a:tcPr marL="82296" marR="82296" marT="64008" marB="64008">
-                    <a:solidFill>
-                      <a:srgbClr val="FFFFFF"/>
-                    </a:solidFill>
-                  </a:tcPr>
-                </a:tc>
-                <a:tc>
-                  <a:txBody>
-                    <a:bodyPr wrap="none"/>
-                    <a:lstStyle/>
-                    <a:p>
-                      <a:pPr>
-                        <a:lnSpc>
-                          <a:spcPts val="1600"/>
-                        </a:lnSpc>
-                        <a:spcAft>
-                          <a:spcPts val="0"/>
-                        </a:spcAft>
-                        <a:defRPr sz="1200" b="0">
-                          <a:solidFill>
-                            <a:srgbClr val="21243A"/>
-                          </a:solidFill>
-                          <a:latin typeface="Arial"/>
-                        </a:defRPr>
-                      </a:pPr>
-                      <a:r>
-                        <a:t>Dr Sam Martin, Smart Data Research UK (UKRI) Fellow, Manchester Metropolitan</a:t>
-                      </a:r>
-                    </a:p>
-                    <a:p>
-                      <a:pPr>
-                        <a:lnSpc>
-                          <a:spcPts val="1600"/>
-                        </a:lnSpc>
-                        <a:spcAft>
-                          <a:spcPts val="0"/>
-                        </a:spcAft>
-                        <a:defRPr sz="1200" b="0">
-                          <a:solidFill>
-                            <a:srgbClr val="21243A"/>
-                          </a:solidFill>
-                          <a:latin typeface="Arial"/>
-                        </a:defRPr>
-                      </a:pPr>
-                      <a:r>
-                        <a:t>University (MMU). ORCID: https://orcid.org/0000-0002-4466-8374.</a:t>
-                      </a:r>
-                    </a:p>
-                  </a:txBody>
-                  <a:tcPr marL="82296" marR="82296" marT="64008" marB="64008">
-                    <a:solidFill>
-                      <a:srgbClr val="FFFFFF"/>
-                    </a:solidFill>
-                  </a:tcPr>
-                </a:tc>
-              </a:tr>
-            </a:tbl>
-          </a:graphicData>
-        </a:graphic>
-      </p:graphicFrame>
-      <p:graphicFrame>
-        <p:nvGraphicFramePr>
-          <p:cNvPr id="9" name="Table 8"/>
-          <p:cNvGraphicFramePr>
-            <a:graphicFrameLocks noGrp="1"/>
-          </p:cNvGraphicFramePr>
-          <p:nvPr/>
-        </p:nvGraphicFramePr>
-        <p:xfrm>
-          <a:off x="365760" y="3009392"/>
-          <a:ext cx="8412479" cy="552704"/>
-        </p:xfrm>
-        <a:graphic>
-          <a:graphicData uri="http://schemas.openxmlformats.org/drawingml/2006/table">
-            <a:tbl>
-              <a:tblPr firstRow="1" bandRow="1">
-                <a:tableStyleId>{5C22544A-7EE6-4342-B048-85BDC9FD1C3A}</a:tableStyleId>
-              </a:tblPr>
-              <a:tblGrid>
-                <a:gridCol w="2271369"/>
-                <a:gridCol w="6141110"/>
-              </a:tblGrid>
-              <a:tr h="552704">
-                <a:tc>
-                  <a:txBody>
-                    <a:bodyPr wrap="none"/>
-                    <a:lstStyle/>
-                    <a:p>
-                      <a:pPr>
-                        <a:lnSpc>
-                          <a:spcPts val="1600"/>
-                        </a:lnSpc>
-                        <a:spcAft>
-                          <a:spcPts val="0"/>
-                        </a:spcAft>
-                        <a:defRPr sz="1200" b="0">
-                          <a:solidFill>
-                            <a:srgbClr val="21243A"/>
-                          </a:solidFill>
-                          <a:latin typeface="Arial"/>
-                        </a:defRPr>
-                      </a:pPr>
-                      <a:r>
-                        <a:t>Funding acknowledgement</a:t>
-                      </a:r>
-                    </a:p>
-                  </a:txBody>
-                  <a:tcPr marL="82296" marR="82296" marT="64008" marB="64008">
-                    <a:solidFill>
-                      <a:srgbClr val="F1F7F7"/>
-                    </a:solidFill>
-                  </a:tcPr>
-                </a:tc>
-                <a:tc>
-                  <a:txBody>
-                    <a:bodyPr wrap="none"/>
-                    <a:lstStyle/>
-                    <a:p>
-                      <a:pPr>
-                        <a:lnSpc>
-                          <a:spcPts val="1600"/>
-                        </a:lnSpc>
-                        <a:spcAft>
-                          <a:spcPts val="0"/>
-                        </a:spcAft>
-                        <a:defRPr sz="1200" b="0">
-                          <a:solidFill>
-                            <a:srgbClr val="21243A"/>
-                          </a:solidFill>
-                          <a:latin typeface="Arial"/>
-                        </a:defRPr>
-                      </a:pPr>
-                      <a:r>
-                        <a:t>This work was supported by Smart Data Research UK, a UKRI investment; Grant</a:t>
-                      </a:r>
-                    </a:p>
-                    <a:p>
-                      <a:pPr>
-                        <a:lnSpc>
-                          <a:spcPts val="1600"/>
-                        </a:lnSpc>
-                        <a:spcAft>
-                          <a:spcPts val="0"/>
-                        </a:spcAft>
-                        <a:defRPr sz="1200" b="0">
-                          <a:solidFill>
-                            <a:srgbClr val="21243A"/>
-                          </a:solidFill>
-                          <a:latin typeface="Arial"/>
-                        </a:defRPr>
-                      </a:pPr>
-                      <a:r>
-                        <a:t>number UKRI4010.</a:t>
-                      </a:r>
-                    </a:p>
-                  </a:txBody>
-                  <a:tcPr marL="82296" marR="82296" marT="64008" marB="64008">
-                    <a:solidFill>
-                      <a:srgbClr val="F1F7F7"/>
-                    </a:solidFill>
-                  </a:tcPr>
-                </a:tc>
-              </a:tr>
-            </a:tbl>
-          </a:graphicData>
-        </a:graphic>
-      </p:graphicFrame>
-      <p:graphicFrame>
-        <p:nvGraphicFramePr>
-          <p:cNvPr id="10" name="Table 9"/>
-          <p:cNvGraphicFramePr>
-            <a:graphicFrameLocks noGrp="1"/>
-          </p:cNvGraphicFramePr>
-          <p:nvPr/>
-        </p:nvGraphicFramePr>
-        <p:xfrm>
-          <a:off x="365760" y="3562095"/>
-          <a:ext cx="8412479" cy="755904"/>
-        </p:xfrm>
-        <a:graphic>
-          <a:graphicData uri="http://schemas.openxmlformats.org/drawingml/2006/table">
-            <a:tbl>
-              <a:tblPr firstRow="1" bandRow="1">
-                <a:tableStyleId>{5C22544A-7EE6-4342-B048-85BDC9FD1C3A}</a:tableStyleId>
-              </a:tblPr>
-              <a:tblGrid>
-                <a:gridCol w="2271369"/>
-                <a:gridCol w="6141110"/>
-              </a:tblGrid>
-              <a:tr h="755904">
-                <a:tc>
-                  <a:txBody>
-                    <a:bodyPr wrap="none"/>
-                    <a:lstStyle/>
-                    <a:p>
-                      <a:pPr>
-                        <a:lnSpc>
-                          <a:spcPts val="1600"/>
-                        </a:lnSpc>
-                        <a:spcAft>
-                          <a:spcPts val="0"/>
-                        </a:spcAft>
-                        <a:defRPr sz="1200" b="0">
-                          <a:solidFill>
-                            <a:srgbClr val="21243A"/>
-                          </a:solidFill>
-                          <a:latin typeface="Arial"/>
-                        </a:defRPr>
-                      </a:pPr>
-                      <a:r>
-                        <a:t>Analysis record</a:t>
-                      </a:r>
-                    </a:p>
-                  </a:txBody>
-                  <a:tcPr marL="82296" marR="82296" marT="64008" marB="64008">
-                    <a:solidFill>
-                      <a:srgbClr val="FFFFFF"/>
-                    </a:solidFill>
-                  </a:tcPr>
-                </a:tc>
-                <a:tc>
-                  <a:txBody>
-                    <a:bodyPr wrap="none"/>
-                    <a:lstStyle/>
-                    <a:p>
-                      <a:pPr>
-                        <a:lnSpc>
-                          <a:spcPts val="1600"/>
-                        </a:lnSpc>
-                        <a:spcAft>
-                          <a:spcPts val="0"/>
-                        </a:spcAft>
-                        <a:defRPr sz="1200" b="0">
-                          <a:solidFill>
-                            <a:srgbClr val="21243A"/>
-                          </a:solidFill>
-                          <a:latin typeface="Arial"/>
-                        </a:defRPr>
-                      </a:pPr>
-                      <a:r>
-                        <a:t>File: journal-image.png; media type: image; recorded at:</a:t>
-                      </a:r>
-                    </a:p>
-                    <a:p>
-                      <a:pPr>
-                        <a:lnSpc>
-                          <a:spcPts val="1600"/>
-                        </a:lnSpc>
-                        <a:spcAft>
-                          <a:spcPts val="0"/>
-                        </a:spcAft>
-                        <a:defRPr sz="1200" b="0">
-                          <a:solidFill>
-                            <a:srgbClr val="21243A"/>
-                          </a:solidFill>
-                          <a:latin typeface="Arial"/>
-                        </a:defRPr>
-                      </a:pPr>
-                      <a:r>
-                        <a:t>2026-09-26T22:31:06+00:00; models: claude-opus-5-5, gemini-3.8-flash,</a:t>
-                      </a:r>
-                    </a:p>
-                    <a:p>
-                      <a:pPr>
-                        <a:lnSpc>
-                          <a:spcPts val="1600"/>
-                        </a:lnSpc>
-                        <a:spcAft>
-                          <a:spcPts val="0"/>
-                        </a:spcAft>
-                        <a:defRPr sz="1200" b="0">
-                          <a:solidFill>
-                            <a:srgbClr val="21243A"/>
-                          </a:solidFill>
-                          <a:latin typeface="Arial"/>
-                        </a:defRPr>
-                      </a:pPr>
-                      <a:r>
-                        <a:t>gpt-6-astra.</a:t>
-                      </a:r>
-                    </a:p>
-                  </a:txBody>
-                  <a:tcPr marL="82296" marR="82296" marT="64008" marB="64008">
-                    <a:solidFill>
-                      <a:srgbClr val="FFFFFF"/>
-                    </a:solidFill>
-                  </a:tcPr>
-                </a:tc>
-              </a:tr>
-            </a:tbl>
-          </a:graphicData>
-        </a:graphic>
-      </p:graphicFrame>
-    </p:spTree>
-  </p:cSld>
-  <p:clrMapOvr>
-    <a:masterClrMapping/>
-  </p:clrMapOvr>
-</p:sld>
-</file>
-
-<file path=ppt/slides/slide19.xml><?xml version="1.0" encoding="utf-8"?>
-<p:sld xmlns:a="http://schemas.openxmlformats.org/drawingml/2006/main" xmlns:p="http://schemas.openxmlformats.org/presentationml/2006/main" xmlns:r="http://schemas.openxmlformats.org/officeDocument/2006/relationships">
-  <p:cSld>
-    <p:spTree>
-      <p:nvGrpSpPr>
-        <p:cNvPr id="1" name=""/>
-        <p:cNvGrpSpPr/>
-        <p:nvPr/>
-      </p:nvGrpSpPr>
-      <p:grpSpPr/>
-      <p:sp>
-        <p:nvSpPr>
-          <p:cNvPr id="2" name="TextBox 1"/>
-          <p:cNvSpPr txBox="1"/>
-          <p:nvPr/>
-        </p:nvSpPr>
-        <p:spPr>
-          <a:xfrm>
-            <a:off x="365760" y="219456"/>
-            <a:ext cx="8412480" cy="228600"/>
-          </a:xfrm>
-          <a:prstGeom prst="rect">
-            <a:avLst/>
-          </a:prstGeom>
-          <a:noFill/>
-        </p:spPr>
-        <p:txBody>
-          <a:bodyPr wrap="square" lIns="0" rIns="0" tIns="0" bIns="0">
-            <a:spAutoFit/>
-          </a:bodyPr>
-          <a:lstStyle/>
-          <a:p>
-            <a:pPr>
-              <a:lnSpc>
-                <a:spcPct val="115000"/>
-              </a:lnSpc>
-              <a:spcAft>
-                <a:spcPts val="0"/>
-              </a:spcAft>
-              <a:defRPr sz="1100" b="1">
-                <a:solidFill>
-                  <a:srgbClr val="C5006A"/>
-                </a:solidFill>
-                <a:latin typeface="Arial"/>
-              </a:defRPr>
-            </a:pPr>
-            <a:r>
-              <a:t>SDA VISION / RESEARCH REPORT</a:t>
-            </a:r>
-          </a:p>
-        </p:txBody>
-      </p:sp>
-      <p:sp>
-        <p:nvSpPr>
-          <p:cNvPr id="3" name="TextBox 2"/>
-          <p:cNvSpPr txBox="1"/>
-          <p:nvPr/>
-        </p:nvSpPr>
-        <p:spPr>
-          <a:xfrm>
-            <a:off x="365760" y="658368"/>
-            <a:ext cx="8412480" cy="612648"/>
-          </a:xfrm>
-          <a:prstGeom prst="rect">
-            <a:avLst/>
-          </a:prstGeom>
-          <a:noFill/>
-        </p:spPr>
-        <p:txBody>
-          <a:bodyPr wrap="square" lIns="0" rIns="0" tIns="0" bIns="0">
-            <a:spAutoFit/>
-          </a:bodyPr>
-          <a:lstStyle/>
-          <a:p>
-            <a:pPr>
-              <a:lnSpc>
-                <a:spcPct val="115000"/>
-              </a:lnSpc>
-              <a:spcAft>
-                <a:spcPts val="0"/>
-              </a:spcAft>
-              <a:defRPr sz="2200" b="1">
-                <a:solidFill>
-                  <a:srgbClr val="21243A"/>
-                </a:solidFill>
-                <a:latin typeface="Arial"/>
-              </a:defRPr>
-            </a:pPr>
-            <a:r>
-              <a:t>File and analysis record</a:t>
-            </a:r>
-          </a:p>
-        </p:txBody>
-      </p:sp>
-      <p:sp>
-        <p:nvSpPr>
-          <p:cNvPr id="4" name="TextBox 3"/>
-          <p:cNvSpPr txBox="1"/>
-          <p:nvPr/>
-        </p:nvSpPr>
-        <p:spPr>
-          <a:xfrm>
-            <a:off x="365760" y="6291072"/>
-            <a:ext cx="8001000" cy="365760"/>
-          </a:xfrm>
-          <a:prstGeom prst="rect">
-            <a:avLst/>
-          </a:prstGeom>
-          <a:noFill/>
-        </p:spPr>
-        <p:txBody>
-          <a:bodyPr wrap="square" lIns="0" rIns="0" tIns="0" bIns="0">
-            <a:spAutoFit/>
-          </a:bodyPr>
-          <a:lstStyle/>
-          <a:p>
-            <a:pPr>
-              <a:lnSpc>
-                <a:spcPct val="115000"/>
-              </a:lnSpc>
-              <a:spcAft>
-                <a:spcPts val="0"/>
-              </a:spcAft>
-              <a:defRPr sz="800" b="0">
-                <a:solidFill>
-                  <a:srgbClr val="545B6D"/>
-                </a:solidFill>
-                <a:latin typeface="Arial"/>
-              </a:defRPr>
-            </a:pPr>
-            <a:r>
-              <a:t>Research assessment. Ratings are not calibrated probabilities.</a:t>
-            </a:r>
-          </a:p>
-        </p:txBody>
-      </p:sp>
-      <p:sp>
-        <p:nvSpPr>
-          <p:cNvPr id="5" name="TextBox 4"/>
-          <p:cNvSpPr txBox="1"/>
-          <p:nvPr/>
-        </p:nvSpPr>
-        <p:spPr>
-          <a:xfrm>
-            <a:off x="8394192" y="6318504"/>
-            <a:ext cx="365760" cy="228600"/>
-          </a:xfrm>
-          <a:prstGeom prst="rect">
-            <a:avLst/>
-          </a:prstGeom>
-          <a:noFill/>
-        </p:spPr>
-        <p:txBody>
-          <a:bodyPr wrap="square" lIns="0" rIns="0" tIns="0" bIns="0">
-            <a:spAutoFit/>
-          </a:bodyPr>
-          <a:lstStyle/>
-          <a:p>
-            <a:pPr>
-              <a:lnSpc>
-                <a:spcPct val="115000"/>
-              </a:lnSpc>
-              <a:spcAft>
-                <a:spcPts val="0"/>
-              </a:spcAft>
-              <a:defRPr sz="900" b="0">
-                <a:solidFill>
-                  <a:srgbClr val="545B6D"/>
-                </a:solidFill>
-                <a:latin typeface="Arial"/>
-              </a:defRPr>
-            </a:pPr>
-            <a:r>
-              <a:t>19</a:t>
             </a:r>
           </a:p>
         </p:txBody>
